--- a/MATERIAIS/QUALIFICACAO-PROFISSIONAL/DIGITAL SKILLS/SlidesDigitalSkillsGemini.pptx
+++ b/MATERIAIS/QUALIFICACAO-PROFISSIONAL/DIGITAL SKILLS/SlidesDigitalSkillsGemini.pptx
@@ -3170,7 +3170,7 @@
         <p:spPr>
           <a:xfrm>
             <a:off x="457200" y="274320"/>
-            <a:ext cx="8229600" cy="914400"/>
+            <a:ext cx="7132320" cy="914400"/>
           </a:xfrm>
           <a:prstGeom prst="rect">
             <a:avLst/>
@@ -3260,7 +3260,7 @@
         <p:spPr>
           <a:xfrm>
             <a:off x="457200" y="274320"/>
-            <a:ext cx="8229600" cy="914400"/>
+            <a:ext cx="7132320" cy="914400"/>
           </a:xfrm>
           <a:prstGeom prst="rect">
             <a:avLst/>
@@ -3434,7 +3434,7 @@
         <p:spPr>
           <a:xfrm>
             <a:off x="457200" y="274320"/>
-            <a:ext cx="8229600" cy="914400"/>
+            <a:ext cx="7132320" cy="914400"/>
           </a:xfrm>
           <a:prstGeom prst="rect">
             <a:avLst/>
@@ -3524,7 +3524,7 @@
         <p:spPr>
           <a:xfrm>
             <a:off x="457200" y="274320"/>
-            <a:ext cx="8229600" cy="914400"/>
+            <a:ext cx="7132320" cy="914400"/>
           </a:xfrm>
           <a:prstGeom prst="rect">
             <a:avLst/>
@@ -3679,7 +3679,7 @@
         <p:spPr>
           <a:xfrm>
             <a:off x="457200" y="274320"/>
-            <a:ext cx="8229600" cy="914400"/>
+            <a:ext cx="7132320" cy="914400"/>
           </a:xfrm>
           <a:prstGeom prst="rect">
             <a:avLst/>
@@ -3769,7 +3769,7 @@
         <p:spPr>
           <a:xfrm>
             <a:off x="457200" y="274320"/>
-            <a:ext cx="8229600" cy="914400"/>
+            <a:ext cx="7132320" cy="914400"/>
           </a:xfrm>
           <a:prstGeom prst="rect">
             <a:avLst/>
@@ -3962,7 +3962,7 @@
         <p:spPr>
           <a:xfrm>
             <a:off x="457200" y="274320"/>
-            <a:ext cx="8229600" cy="914400"/>
+            <a:ext cx="7132320" cy="914400"/>
           </a:xfrm>
           <a:prstGeom prst="rect">
             <a:avLst/>
@@ -4052,7 +4052,7 @@
         <p:spPr>
           <a:xfrm>
             <a:off x="457200" y="274320"/>
-            <a:ext cx="8229600" cy="914400"/>
+            <a:ext cx="7132320" cy="914400"/>
           </a:xfrm>
           <a:prstGeom prst="rect">
             <a:avLst/>
@@ -4245,7 +4245,7 @@
         <p:spPr>
           <a:xfrm>
             <a:off x="457200" y="274320"/>
-            <a:ext cx="8229600" cy="914400"/>
+            <a:ext cx="7132320" cy="914400"/>
           </a:xfrm>
           <a:prstGeom prst="rect">
             <a:avLst/>
@@ -4335,7 +4335,7 @@
         <p:spPr>
           <a:xfrm>
             <a:off x="457200" y="274320"/>
-            <a:ext cx="8229600" cy="914400"/>
+            <a:ext cx="7132320" cy="914400"/>
           </a:xfrm>
           <a:prstGeom prst="rect">
             <a:avLst/>
@@ -4509,7 +4509,7 @@
         <p:spPr>
           <a:xfrm>
             <a:off x="457200" y="274320"/>
-            <a:ext cx="8229600" cy="914400"/>
+            <a:ext cx="7132320" cy="914400"/>
           </a:xfrm>
           <a:prstGeom prst="rect">
             <a:avLst/>
@@ -4599,7 +4599,7 @@
         <p:spPr>
           <a:xfrm>
             <a:off x="457200" y="274320"/>
-            <a:ext cx="8229600" cy="914400"/>
+            <a:ext cx="7132320" cy="914400"/>
           </a:xfrm>
           <a:prstGeom prst="rect">
             <a:avLst/>
@@ -4773,7 +4773,7 @@
         <p:spPr>
           <a:xfrm>
             <a:off x="457200" y="274320"/>
-            <a:ext cx="8229600" cy="914400"/>
+            <a:ext cx="7132320" cy="914400"/>
           </a:xfrm>
           <a:prstGeom prst="rect">
             <a:avLst/>
@@ -4863,7 +4863,7 @@
         <p:spPr>
           <a:xfrm>
             <a:off x="457200" y="274320"/>
-            <a:ext cx="8229600" cy="914400"/>
+            <a:ext cx="7132320" cy="914400"/>
           </a:xfrm>
           <a:prstGeom prst="rect">
             <a:avLst/>
@@ -4983,7 +4983,7 @@
         <p:spPr>
           <a:xfrm>
             <a:off x="457200" y="274320"/>
-            <a:ext cx="8229600" cy="914400"/>
+            <a:ext cx="7132320" cy="914400"/>
           </a:xfrm>
           <a:prstGeom prst="rect">
             <a:avLst/>
@@ -5073,7 +5073,7 @@
         <p:spPr>
           <a:xfrm>
             <a:off x="457200" y="274320"/>
-            <a:ext cx="8229600" cy="914400"/>
+            <a:ext cx="7132320" cy="914400"/>
           </a:xfrm>
           <a:prstGeom prst="rect">
             <a:avLst/>
@@ -5407,7 +5407,7 @@
         <p:spPr>
           <a:xfrm>
             <a:off x="457200" y="274320"/>
-            <a:ext cx="8229600" cy="914400"/>
+            <a:ext cx="7132320" cy="914400"/>
           </a:xfrm>
           <a:prstGeom prst="rect">
             <a:avLst/>
@@ -5497,7 +5497,7 @@
         <p:spPr>
           <a:xfrm>
             <a:off x="457200" y="274320"/>
-            <a:ext cx="8229600" cy="914400"/>
+            <a:ext cx="7132320" cy="914400"/>
           </a:xfrm>
           <a:prstGeom prst="rect">
             <a:avLst/>
@@ -5652,7 +5652,7 @@
         <p:spPr>
           <a:xfrm>
             <a:off x="457200" y="274320"/>
-            <a:ext cx="8229600" cy="914400"/>
+            <a:ext cx="7132320" cy="914400"/>
           </a:xfrm>
           <a:prstGeom prst="rect">
             <a:avLst/>
@@ -5742,7 +5742,7 @@
         <p:spPr>
           <a:xfrm>
             <a:off x="457200" y="274320"/>
-            <a:ext cx="8229600" cy="914400"/>
+            <a:ext cx="7132320" cy="914400"/>
           </a:xfrm>
           <a:prstGeom prst="rect">
             <a:avLst/>
@@ -5862,7 +5862,7 @@
         <p:spPr>
           <a:xfrm>
             <a:off x="457200" y="274320"/>
-            <a:ext cx="8229600" cy="914400"/>
+            <a:ext cx="7132320" cy="914400"/>
           </a:xfrm>
           <a:prstGeom prst="rect">
             <a:avLst/>
@@ -5952,7 +5952,7 @@
         <p:spPr>
           <a:xfrm>
             <a:off x="457200" y="274320"/>
-            <a:ext cx="8229600" cy="914400"/>
+            <a:ext cx="7132320" cy="914400"/>
           </a:xfrm>
           <a:prstGeom prst="rect">
             <a:avLst/>
@@ -6054,7 +6054,7 @@
         <p:spPr>
           <a:xfrm>
             <a:off x="457200" y="274320"/>
-            <a:ext cx="8229600" cy="914400"/>
+            <a:ext cx="7132320" cy="914400"/>
           </a:xfrm>
           <a:prstGeom prst="rect">
             <a:avLst/>
@@ -6144,7 +6144,7 @@
         <p:spPr>
           <a:xfrm>
             <a:off x="457200" y="274320"/>
-            <a:ext cx="8229600" cy="914400"/>
+            <a:ext cx="7132320" cy="914400"/>
           </a:xfrm>
           <a:prstGeom prst="rect">
             <a:avLst/>
@@ -6246,7 +6246,7 @@
         <p:spPr>
           <a:xfrm>
             <a:off x="457200" y="274320"/>
-            <a:ext cx="8229600" cy="914400"/>
+            <a:ext cx="7132320" cy="914400"/>
           </a:xfrm>
           <a:prstGeom prst="rect">
             <a:avLst/>
@@ -6336,7 +6336,7 @@
         <p:spPr>
           <a:xfrm>
             <a:off x="457200" y="274320"/>
-            <a:ext cx="8229600" cy="914400"/>
+            <a:ext cx="7132320" cy="914400"/>
           </a:xfrm>
           <a:prstGeom prst="rect">
             <a:avLst/>
@@ -6438,7 +6438,7 @@
         <p:spPr>
           <a:xfrm>
             <a:off x="457200" y="274320"/>
-            <a:ext cx="8229600" cy="914400"/>
+            <a:ext cx="7132320" cy="914400"/>
           </a:xfrm>
           <a:prstGeom prst="rect">
             <a:avLst/>
@@ -6528,7 +6528,7 @@
         <p:spPr>
           <a:xfrm>
             <a:off x="457200" y="274320"/>
-            <a:ext cx="8229600" cy="914400"/>
+            <a:ext cx="7132320" cy="914400"/>
           </a:xfrm>
           <a:prstGeom prst="rect">
             <a:avLst/>
@@ -6740,7 +6740,7 @@
         <p:spPr>
           <a:xfrm>
             <a:off x="457200" y="274320"/>
-            <a:ext cx="8229600" cy="914400"/>
+            <a:ext cx="7132320" cy="914400"/>
           </a:xfrm>
           <a:prstGeom prst="rect">
             <a:avLst/>
@@ -6830,7 +6830,7 @@
         <p:spPr>
           <a:xfrm>
             <a:off x="457200" y="274320"/>
-            <a:ext cx="8229600" cy="914400"/>
+            <a:ext cx="7132320" cy="914400"/>
           </a:xfrm>
           <a:prstGeom prst="rect">
             <a:avLst/>
@@ -6932,7 +6932,7 @@
         <p:spPr>
           <a:xfrm>
             <a:off x="457200" y="274320"/>
-            <a:ext cx="8229600" cy="914400"/>
+            <a:ext cx="7132320" cy="914400"/>
           </a:xfrm>
           <a:prstGeom prst="rect">
             <a:avLst/>
@@ -7022,7 +7022,7 @@
         <p:spPr>
           <a:xfrm>
             <a:off x="457200" y="274320"/>
-            <a:ext cx="8229600" cy="914400"/>
+            <a:ext cx="7132320" cy="914400"/>
           </a:xfrm>
           <a:prstGeom prst="rect">
             <a:avLst/>
@@ -7142,7 +7142,7 @@
         <p:spPr>
           <a:xfrm>
             <a:off x="457200" y="274320"/>
-            <a:ext cx="8229600" cy="914400"/>
+            <a:ext cx="7132320" cy="914400"/>
           </a:xfrm>
           <a:prstGeom prst="rect">
             <a:avLst/>
@@ -7232,7 +7232,7 @@
         <p:spPr>
           <a:xfrm>
             <a:off x="457200" y="274320"/>
-            <a:ext cx="8229600" cy="914400"/>
+            <a:ext cx="7132320" cy="914400"/>
           </a:xfrm>
           <a:prstGeom prst="rect">
             <a:avLst/>
@@ -7536,7 +7536,7 @@
         <p:spPr>
           <a:xfrm>
             <a:off x="457200" y="274320"/>
-            <a:ext cx="8229600" cy="914400"/>
+            <a:ext cx="7132320" cy="914400"/>
           </a:xfrm>
           <a:prstGeom prst="rect">
             <a:avLst/>
@@ -7626,7 +7626,7 @@
         <p:spPr>
           <a:xfrm>
             <a:off x="457200" y="274320"/>
-            <a:ext cx="8229600" cy="914400"/>
+            <a:ext cx="7132320" cy="914400"/>
           </a:xfrm>
           <a:prstGeom prst="rect">
             <a:avLst/>
@@ -7838,7 +7838,7 @@
         <p:spPr>
           <a:xfrm>
             <a:off x="457200" y="274320"/>
-            <a:ext cx="8229600" cy="914400"/>
+            <a:ext cx="7132320" cy="914400"/>
           </a:xfrm>
           <a:prstGeom prst="rect">
             <a:avLst/>
@@ -7928,7 +7928,7 @@
         <p:spPr>
           <a:xfrm>
             <a:off x="457200" y="274320"/>
-            <a:ext cx="8229600" cy="914400"/>
+            <a:ext cx="7132320" cy="914400"/>
           </a:xfrm>
           <a:prstGeom prst="rect">
             <a:avLst/>
@@ -8302,7 +8302,7 @@
         <p:spPr>
           <a:xfrm>
             <a:off x="457200" y="274320"/>
-            <a:ext cx="8229600" cy="914400"/>
+            <a:ext cx="7132320" cy="914400"/>
           </a:xfrm>
           <a:prstGeom prst="rect">
             <a:avLst/>
@@ -8392,7 +8392,7 @@
         <p:spPr>
           <a:xfrm>
             <a:off x="457200" y="274320"/>
-            <a:ext cx="8229600" cy="914400"/>
+            <a:ext cx="7132320" cy="914400"/>
           </a:xfrm>
           <a:prstGeom prst="rect">
             <a:avLst/>
@@ -8760,7 +8760,7 @@
         <p:spPr>
           <a:xfrm>
             <a:off x="457200" y="274320"/>
-            <a:ext cx="8229600" cy="914400"/>
+            <a:ext cx="7132320" cy="914400"/>
           </a:xfrm>
           <a:prstGeom prst="rect">
             <a:avLst/>
@@ -8850,7 +8850,7 @@
         <p:spPr>
           <a:xfrm>
             <a:off x="457200" y="274320"/>
-            <a:ext cx="8229600" cy="914400"/>
+            <a:ext cx="7132320" cy="914400"/>
           </a:xfrm>
           <a:prstGeom prst="rect">
             <a:avLst/>
@@ -8952,7 +8952,7 @@
         <p:spPr>
           <a:xfrm>
             <a:off x="457200" y="274320"/>
-            <a:ext cx="8229600" cy="914400"/>
+            <a:ext cx="7132320" cy="914400"/>
           </a:xfrm>
           <a:prstGeom prst="rect">
             <a:avLst/>
@@ -9042,7 +9042,7 @@
         <p:spPr>
           <a:xfrm>
             <a:off x="457200" y="274320"/>
-            <a:ext cx="8229600" cy="914400"/>
+            <a:ext cx="7132320" cy="914400"/>
           </a:xfrm>
           <a:prstGeom prst="rect">
             <a:avLst/>
@@ -9162,7 +9162,7 @@
         <p:spPr>
           <a:xfrm>
             <a:off x="457200" y="274320"/>
-            <a:ext cx="8229600" cy="914400"/>
+            <a:ext cx="7132320" cy="914400"/>
           </a:xfrm>
           <a:prstGeom prst="rect">
             <a:avLst/>
@@ -9252,7 +9252,7 @@
         <p:spPr>
           <a:xfrm>
             <a:off x="457200" y="274320"/>
-            <a:ext cx="8229600" cy="914400"/>
+            <a:ext cx="7132320" cy="914400"/>
           </a:xfrm>
           <a:prstGeom prst="rect">
             <a:avLst/>
@@ -9372,7 +9372,7 @@
         <p:spPr>
           <a:xfrm>
             <a:off x="457200" y="274320"/>
-            <a:ext cx="8229600" cy="914400"/>
+            <a:ext cx="7132320" cy="914400"/>
           </a:xfrm>
           <a:prstGeom prst="rect">
             <a:avLst/>
@@ -9462,7 +9462,7 @@
         <p:spPr>
           <a:xfrm>
             <a:off x="457200" y="274320"/>
-            <a:ext cx="8229600" cy="914400"/>
+            <a:ext cx="7132320" cy="914400"/>
           </a:xfrm>
           <a:prstGeom prst="rect">
             <a:avLst/>
@@ -9617,7 +9617,7 @@
         <p:spPr>
           <a:xfrm>
             <a:off x="457200" y="274320"/>
-            <a:ext cx="8229600" cy="914400"/>
+            <a:ext cx="7132320" cy="914400"/>
           </a:xfrm>
           <a:prstGeom prst="rect">
             <a:avLst/>
@@ -9707,7 +9707,7 @@
         <p:spPr>
           <a:xfrm>
             <a:off x="457200" y="274320"/>
-            <a:ext cx="8229600" cy="914400"/>
+            <a:ext cx="7132320" cy="914400"/>
           </a:xfrm>
           <a:prstGeom prst="rect">
             <a:avLst/>
@@ -9973,7 +9973,7 @@
         <p:spPr>
           <a:xfrm>
             <a:off x="457200" y="274320"/>
-            <a:ext cx="8229600" cy="914400"/>
+            <a:ext cx="7132320" cy="914400"/>
           </a:xfrm>
           <a:prstGeom prst="rect">
             <a:avLst/>
@@ -10063,7 +10063,7 @@
         <p:spPr>
           <a:xfrm>
             <a:off x="457200" y="274320"/>
-            <a:ext cx="8229600" cy="914400"/>
+            <a:ext cx="7132320" cy="914400"/>
           </a:xfrm>
           <a:prstGeom prst="rect">
             <a:avLst/>
@@ -10218,7 +10218,7 @@
         <p:spPr>
           <a:xfrm>
             <a:off x="457200" y="274320"/>
-            <a:ext cx="8229600" cy="914400"/>
+            <a:ext cx="7132320" cy="914400"/>
           </a:xfrm>
           <a:prstGeom prst="rect">
             <a:avLst/>
@@ -10308,7 +10308,7 @@
         <p:spPr>
           <a:xfrm>
             <a:off x="457200" y="274320"/>
-            <a:ext cx="8229600" cy="914400"/>
+            <a:ext cx="7132320" cy="914400"/>
           </a:xfrm>
           <a:prstGeom prst="rect">
             <a:avLst/>
@@ -10805,7 +10805,7 @@
         <p:spPr>
           <a:xfrm>
             <a:off x="457200" y="274320"/>
-            <a:ext cx="8229600" cy="914400"/>
+            <a:ext cx="7132320" cy="914400"/>
           </a:xfrm>
           <a:prstGeom prst="rect">
             <a:avLst/>
@@ -10895,7 +10895,7 @@
         <p:spPr>
           <a:xfrm>
             <a:off x="457200" y="274320"/>
-            <a:ext cx="8229600" cy="914400"/>
+            <a:ext cx="7132320" cy="914400"/>
           </a:xfrm>
           <a:prstGeom prst="rect">
             <a:avLst/>
@@ -11050,7 +11050,7 @@
         <p:spPr>
           <a:xfrm>
             <a:off x="457200" y="274320"/>
-            <a:ext cx="8229600" cy="914400"/>
+            <a:ext cx="7132320" cy="914400"/>
           </a:xfrm>
           <a:prstGeom prst="rect">
             <a:avLst/>
@@ -11140,7 +11140,7 @@
         <p:spPr>
           <a:xfrm>
             <a:off x="457200" y="274320"/>
-            <a:ext cx="8229600" cy="914400"/>
+            <a:ext cx="7132320" cy="914400"/>
           </a:xfrm>
           <a:prstGeom prst="rect">
             <a:avLst/>
@@ -11260,7 +11260,7 @@
         <p:spPr>
           <a:xfrm>
             <a:off x="457200" y="274320"/>
-            <a:ext cx="8229600" cy="914400"/>
+            <a:ext cx="7132320" cy="914400"/>
           </a:xfrm>
           <a:prstGeom prst="rect">
             <a:avLst/>
@@ -11350,7 +11350,7 @@
         <p:spPr>
           <a:xfrm>
             <a:off x="457200" y="274320"/>
-            <a:ext cx="8229600" cy="914400"/>
+            <a:ext cx="7132320" cy="914400"/>
           </a:xfrm>
           <a:prstGeom prst="rect">
             <a:avLst/>
@@ -11600,7 +11600,7 @@
         <p:spPr>
           <a:xfrm>
             <a:off x="457200" y="274320"/>
-            <a:ext cx="8229600" cy="914400"/>
+            <a:ext cx="7132320" cy="914400"/>
           </a:xfrm>
           <a:prstGeom prst="rect">
             <a:avLst/>
@@ -11690,7 +11690,7 @@
         <p:spPr>
           <a:xfrm>
             <a:off x="457200" y="274320"/>
-            <a:ext cx="8229600" cy="914400"/>
+            <a:ext cx="7132320" cy="914400"/>
           </a:xfrm>
           <a:prstGeom prst="rect">
             <a:avLst/>
@@ -13177,7 +13177,7 @@
         <p:spPr>
           <a:xfrm>
             <a:off x="457200" y="274320"/>
-            <a:ext cx="8229600" cy="914400"/>
+            <a:ext cx="7132320" cy="914400"/>
           </a:xfrm>
           <a:prstGeom prst="rect">
             <a:avLst/>
@@ -13267,7 +13267,7 @@
         <p:spPr>
           <a:xfrm>
             <a:off x="457200" y="274320"/>
-            <a:ext cx="8229600" cy="914400"/>
+            <a:ext cx="7132320" cy="914400"/>
           </a:xfrm>
           <a:prstGeom prst="rect">
             <a:avLst/>
@@ -13460,7 +13460,7 @@
         <p:spPr>
           <a:xfrm>
             <a:off x="457200" y="274320"/>
-            <a:ext cx="8229600" cy="914400"/>
+            <a:ext cx="7132320" cy="914400"/>
           </a:xfrm>
           <a:prstGeom prst="rect">
             <a:avLst/>
@@ -13550,7 +13550,7 @@
         <p:spPr>
           <a:xfrm>
             <a:off x="457200" y="274320"/>
-            <a:ext cx="8229600" cy="914400"/>
+            <a:ext cx="7132320" cy="914400"/>
           </a:xfrm>
           <a:prstGeom prst="rect">
             <a:avLst/>
@@ -13838,7 +13838,7 @@
         <p:spPr>
           <a:xfrm>
             <a:off x="457200" y="274320"/>
-            <a:ext cx="8229600" cy="914400"/>
+            <a:ext cx="7132320" cy="914400"/>
           </a:xfrm>
           <a:prstGeom prst="rect">
             <a:avLst/>
@@ -13928,7 +13928,7 @@
         <p:spPr>
           <a:xfrm>
             <a:off x="457200" y="274320"/>
-            <a:ext cx="8229600" cy="914400"/>
+            <a:ext cx="7132320" cy="914400"/>
           </a:xfrm>
           <a:prstGeom prst="rect">
             <a:avLst/>
@@ -14325,7 +14325,7 @@
         <p:spPr>
           <a:xfrm>
             <a:off x="457200" y="274320"/>
-            <a:ext cx="8229600" cy="914400"/>
+            <a:ext cx="7132320" cy="914400"/>
           </a:xfrm>
           <a:prstGeom prst="rect">
             <a:avLst/>
@@ -14415,7 +14415,7 @@
         <p:spPr>
           <a:xfrm>
             <a:off x="457200" y="274320"/>
-            <a:ext cx="8229600" cy="914400"/>
+            <a:ext cx="7132320" cy="914400"/>
           </a:xfrm>
           <a:prstGeom prst="rect">
             <a:avLst/>
@@ -15984,7 +15984,7 @@
         <p:spPr>
           <a:xfrm>
             <a:off x="457200" y="274320"/>
-            <a:ext cx="8229600" cy="914400"/>
+            <a:ext cx="7132320" cy="914400"/>
           </a:xfrm>
           <a:prstGeom prst="rect">
             <a:avLst/>
@@ -16074,7 +16074,7 @@
         <p:spPr>
           <a:xfrm>
             <a:off x="457200" y="274320"/>
-            <a:ext cx="8229600" cy="914400"/>
+            <a:ext cx="7132320" cy="914400"/>
           </a:xfrm>
           <a:prstGeom prst="rect">
             <a:avLst/>
@@ -16359,7 +16359,7 @@
         <p:spPr>
           <a:xfrm>
             <a:off x="457200" y="274320"/>
-            <a:ext cx="8229600" cy="914400"/>
+            <a:ext cx="7132320" cy="914400"/>
           </a:xfrm>
           <a:prstGeom prst="rect">
             <a:avLst/>
@@ -16449,7 +16449,7 @@
         <p:spPr>
           <a:xfrm>
             <a:off x="457200" y="274320"/>
-            <a:ext cx="8229600" cy="914400"/>
+            <a:ext cx="7132320" cy="914400"/>
           </a:xfrm>
           <a:prstGeom prst="rect">
             <a:avLst/>
@@ -16972,7 +16972,7 @@
         <p:spPr>
           <a:xfrm>
             <a:off x="457200" y="274320"/>
-            <a:ext cx="8229600" cy="914400"/>
+            <a:ext cx="7132320" cy="914400"/>
           </a:xfrm>
           <a:prstGeom prst="rect">
             <a:avLst/>
@@ -17062,7 +17062,7 @@
         <p:spPr>
           <a:xfrm>
             <a:off x="457200" y="274320"/>
-            <a:ext cx="8229600" cy="914400"/>
+            <a:ext cx="7132320" cy="914400"/>
           </a:xfrm>
           <a:prstGeom prst="rect">
             <a:avLst/>
@@ -18516,7 +18516,7 @@
         <p:spPr>
           <a:xfrm>
             <a:off x="457200" y="274320"/>
-            <a:ext cx="8229600" cy="914400"/>
+            <a:ext cx="7132320" cy="914400"/>
           </a:xfrm>
           <a:prstGeom prst="rect">
             <a:avLst/>
@@ -18606,7 +18606,7 @@
         <p:spPr>
           <a:xfrm>
             <a:off x="457200" y="274320"/>
-            <a:ext cx="8229600" cy="914400"/>
+            <a:ext cx="7132320" cy="914400"/>
           </a:xfrm>
           <a:prstGeom prst="rect">
             <a:avLst/>
@@ -18708,7 +18708,7 @@
         <p:spPr>
           <a:xfrm>
             <a:off x="457200" y="274320"/>
-            <a:ext cx="8229600" cy="914400"/>
+            <a:ext cx="7132320" cy="914400"/>
           </a:xfrm>
           <a:prstGeom prst="rect">
             <a:avLst/>
@@ -18798,7 +18798,7 @@
         <p:spPr>
           <a:xfrm>
             <a:off x="457200" y="274320"/>
-            <a:ext cx="8229600" cy="914400"/>
+            <a:ext cx="7132320" cy="914400"/>
           </a:xfrm>
           <a:prstGeom prst="rect">
             <a:avLst/>
@@ -18900,7 +18900,7 @@
         <p:spPr>
           <a:xfrm>
             <a:off x="457200" y="274320"/>
-            <a:ext cx="8229600" cy="914400"/>
+            <a:ext cx="7132320" cy="914400"/>
           </a:xfrm>
           <a:prstGeom prst="rect">
             <a:avLst/>
@@ -18990,7 +18990,7 @@
         <p:spPr>
           <a:xfrm>
             <a:off x="457200" y="274320"/>
-            <a:ext cx="8229600" cy="914400"/>
+            <a:ext cx="7132320" cy="914400"/>
           </a:xfrm>
           <a:prstGeom prst="rect">
             <a:avLst/>
@@ -19092,7 +19092,7 @@
         <p:spPr>
           <a:xfrm>
             <a:off x="457200" y="274320"/>
-            <a:ext cx="8229600" cy="914400"/>
+            <a:ext cx="7132320" cy="914400"/>
           </a:xfrm>
           <a:prstGeom prst="rect">
             <a:avLst/>
@@ -19182,7 +19182,7 @@
         <p:spPr>
           <a:xfrm>
             <a:off x="457200" y="274320"/>
-            <a:ext cx="8229600" cy="914400"/>
+            <a:ext cx="7132320" cy="914400"/>
           </a:xfrm>
           <a:prstGeom prst="rect">
             <a:avLst/>
@@ -20208,7 +20208,7 @@
         <p:spPr>
           <a:xfrm>
             <a:off x="457200" y="274320"/>
-            <a:ext cx="8229600" cy="914400"/>
+            <a:ext cx="7132320" cy="914400"/>
           </a:xfrm>
           <a:prstGeom prst="rect">
             <a:avLst/>
@@ -20298,7 +20298,7 @@
         <p:spPr>
           <a:xfrm>
             <a:off x="457200" y="274320"/>
-            <a:ext cx="8229600" cy="914400"/>
+            <a:ext cx="7132320" cy="914400"/>
           </a:xfrm>
           <a:prstGeom prst="rect">
             <a:avLst/>
@@ -20453,7 +20453,7 @@
         <p:spPr>
           <a:xfrm>
             <a:off x="457200" y="274320"/>
-            <a:ext cx="8229600" cy="914400"/>
+            <a:ext cx="7132320" cy="914400"/>
           </a:xfrm>
           <a:prstGeom prst="rect">
             <a:avLst/>
@@ -20543,7 +20543,7 @@
         <p:spPr>
           <a:xfrm>
             <a:off x="457200" y="274320"/>
-            <a:ext cx="8229600" cy="914400"/>
+            <a:ext cx="7132320" cy="914400"/>
           </a:xfrm>
           <a:prstGeom prst="rect">
             <a:avLst/>
@@ -20645,7 +20645,7 @@
         <p:spPr>
           <a:xfrm>
             <a:off x="457200" y="274320"/>
-            <a:ext cx="8229600" cy="914400"/>
+            <a:ext cx="7132320" cy="914400"/>
           </a:xfrm>
           <a:prstGeom prst="rect">
             <a:avLst/>
@@ -20735,7 +20735,7 @@
         <p:spPr>
           <a:xfrm>
             <a:off x="457200" y="274320"/>
-            <a:ext cx="8229600" cy="914400"/>
+            <a:ext cx="7132320" cy="914400"/>
           </a:xfrm>
           <a:prstGeom prst="rect">
             <a:avLst/>
@@ -21100,7 +21100,7 @@
         <p:spPr>
           <a:xfrm>
             <a:off x="457200" y="274320"/>
-            <a:ext cx="8229600" cy="914400"/>
+            <a:ext cx="7132320" cy="914400"/>
           </a:xfrm>
           <a:prstGeom prst="rect">
             <a:avLst/>
@@ -21190,7 +21190,7 @@
         <p:spPr>
           <a:xfrm>
             <a:off x="457200" y="274320"/>
-            <a:ext cx="8229600" cy="914400"/>
+            <a:ext cx="7132320" cy="914400"/>
           </a:xfrm>
           <a:prstGeom prst="rect">
             <a:avLst/>
@@ -22889,7 +22889,7 @@
         <p:spPr>
           <a:xfrm>
             <a:off x="457200" y="274320"/>
-            <a:ext cx="8229600" cy="914400"/>
+            <a:ext cx="7132320" cy="914400"/>
           </a:xfrm>
           <a:prstGeom prst="rect">
             <a:avLst/>
@@ -22979,7 +22979,7 @@
         <p:spPr>
           <a:xfrm>
             <a:off x="457200" y="274320"/>
-            <a:ext cx="8229600" cy="914400"/>
+            <a:ext cx="7132320" cy="914400"/>
           </a:xfrm>
           <a:prstGeom prst="rect">
             <a:avLst/>
@@ -23169,7 +23169,7 @@
         <p:spPr>
           <a:xfrm>
             <a:off x="457200" y="274320"/>
-            <a:ext cx="8229600" cy="914400"/>
+            <a:ext cx="7132320" cy="914400"/>
           </a:xfrm>
           <a:prstGeom prst="rect">
             <a:avLst/>
@@ -23259,7 +23259,7 @@
         <p:spPr>
           <a:xfrm>
             <a:off x="457200" y="274320"/>
-            <a:ext cx="8229600" cy="914400"/>
+            <a:ext cx="7132320" cy="914400"/>
           </a:xfrm>
           <a:prstGeom prst="rect">
             <a:avLst/>
@@ -23361,7 +23361,7 @@
         <p:spPr>
           <a:xfrm>
             <a:off x="457200" y="274320"/>
-            <a:ext cx="8229600" cy="914400"/>
+            <a:ext cx="7132320" cy="914400"/>
           </a:xfrm>
           <a:prstGeom prst="rect">
             <a:avLst/>
@@ -23451,7 +23451,7 @@
         <p:spPr>
           <a:xfrm>
             <a:off x="457200" y="274320"/>
-            <a:ext cx="8229600" cy="914400"/>
+            <a:ext cx="7132320" cy="914400"/>
           </a:xfrm>
           <a:prstGeom prst="rect">
             <a:avLst/>
@@ -23606,7 +23606,7 @@
         <p:spPr>
           <a:xfrm>
             <a:off x="457200" y="274320"/>
-            <a:ext cx="8229600" cy="914400"/>
+            <a:ext cx="7132320" cy="914400"/>
           </a:xfrm>
           <a:prstGeom prst="rect">
             <a:avLst/>
@@ -23696,7 +23696,7 @@
         <p:spPr>
           <a:xfrm>
             <a:off x="457200" y="274320"/>
-            <a:ext cx="8229600" cy="914400"/>
+            <a:ext cx="7132320" cy="914400"/>
           </a:xfrm>
           <a:prstGeom prst="rect">
             <a:avLst/>

--- a/MATERIAIS/QUALIFICACAO-PROFISSIONAL/DIGITAL SKILLS/SlidesDigitalSkillsGemini.pptx
+++ b/MATERIAIS/QUALIFICACAO-PROFISSIONAL/DIGITAL SKILLS/SlidesDigitalSkillsGemini.pptx
@@ -3170,7 +3170,7 @@
         <p:spPr>
           <a:xfrm>
             <a:off x="457200" y="274320"/>
-            <a:ext cx="7132320" cy="914400"/>
+            <a:ext cx="6400800" cy="914400"/>
           </a:xfrm>
           <a:prstGeom prst="rect">
             <a:avLst/>
@@ -3260,7 +3260,7 @@
         <p:spPr>
           <a:xfrm>
             <a:off x="457200" y="274320"/>
-            <a:ext cx="7132320" cy="914400"/>
+            <a:ext cx="6400800" cy="914400"/>
           </a:xfrm>
           <a:prstGeom prst="rect">
             <a:avLst/>
@@ -3434,7 +3434,7 @@
         <p:spPr>
           <a:xfrm>
             <a:off x="457200" y="274320"/>
-            <a:ext cx="7132320" cy="914400"/>
+            <a:ext cx="6400800" cy="914400"/>
           </a:xfrm>
           <a:prstGeom prst="rect">
             <a:avLst/>
@@ -3524,7 +3524,7 @@
         <p:spPr>
           <a:xfrm>
             <a:off x="457200" y="274320"/>
-            <a:ext cx="7132320" cy="914400"/>
+            <a:ext cx="6400800" cy="914400"/>
           </a:xfrm>
           <a:prstGeom prst="rect">
             <a:avLst/>
@@ -3679,7 +3679,7 @@
         <p:spPr>
           <a:xfrm>
             <a:off x="457200" y="274320"/>
-            <a:ext cx="7132320" cy="914400"/>
+            <a:ext cx="6400800" cy="914400"/>
           </a:xfrm>
           <a:prstGeom prst="rect">
             <a:avLst/>
@@ -3769,7 +3769,7 @@
         <p:spPr>
           <a:xfrm>
             <a:off x="457200" y="274320"/>
-            <a:ext cx="7132320" cy="914400"/>
+            <a:ext cx="6400800" cy="914400"/>
           </a:xfrm>
           <a:prstGeom prst="rect">
             <a:avLst/>
@@ -3962,7 +3962,7 @@
         <p:spPr>
           <a:xfrm>
             <a:off x="457200" y="274320"/>
-            <a:ext cx="7132320" cy="914400"/>
+            <a:ext cx="6400800" cy="914400"/>
           </a:xfrm>
           <a:prstGeom prst="rect">
             <a:avLst/>
@@ -4052,7 +4052,7 @@
         <p:spPr>
           <a:xfrm>
             <a:off x="457200" y="274320"/>
-            <a:ext cx="7132320" cy="914400"/>
+            <a:ext cx="6400800" cy="914400"/>
           </a:xfrm>
           <a:prstGeom prst="rect">
             <a:avLst/>
@@ -4245,7 +4245,7 @@
         <p:spPr>
           <a:xfrm>
             <a:off x="457200" y="274320"/>
-            <a:ext cx="7132320" cy="914400"/>
+            <a:ext cx="6400800" cy="914400"/>
           </a:xfrm>
           <a:prstGeom prst="rect">
             <a:avLst/>
@@ -4335,7 +4335,7 @@
         <p:spPr>
           <a:xfrm>
             <a:off x="457200" y="274320"/>
-            <a:ext cx="7132320" cy="914400"/>
+            <a:ext cx="6400800" cy="914400"/>
           </a:xfrm>
           <a:prstGeom prst="rect">
             <a:avLst/>
@@ -4509,7 +4509,7 @@
         <p:spPr>
           <a:xfrm>
             <a:off x="457200" y="274320"/>
-            <a:ext cx="7132320" cy="914400"/>
+            <a:ext cx="6400800" cy="914400"/>
           </a:xfrm>
           <a:prstGeom prst="rect">
             <a:avLst/>
@@ -4599,7 +4599,7 @@
         <p:spPr>
           <a:xfrm>
             <a:off x="457200" y="274320"/>
-            <a:ext cx="7132320" cy="914400"/>
+            <a:ext cx="6400800" cy="914400"/>
           </a:xfrm>
           <a:prstGeom prst="rect">
             <a:avLst/>
@@ -4773,7 +4773,7 @@
         <p:spPr>
           <a:xfrm>
             <a:off x="457200" y="274320"/>
-            <a:ext cx="7132320" cy="914400"/>
+            <a:ext cx="6400800" cy="914400"/>
           </a:xfrm>
           <a:prstGeom prst="rect">
             <a:avLst/>
@@ -4863,7 +4863,7 @@
         <p:spPr>
           <a:xfrm>
             <a:off x="457200" y="274320"/>
-            <a:ext cx="7132320" cy="914400"/>
+            <a:ext cx="6400800" cy="914400"/>
           </a:xfrm>
           <a:prstGeom prst="rect">
             <a:avLst/>
@@ -4983,7 +4983,7 @@
         <p:spPr>
           <a:xfrm>
             <a:off x="457200" y="274320"/>
-            <a:ext cx="7132320" cy="914400"/>
+            <a:ext cx="6400800" cy="914400"/>
           </a:xfrm>
           <a:prstGeom prst="rect">
             <a:avLst/>
@@ -5073,7 +5073,7 @@
         <p:spPr>
           <a:xfrm>
             <a:off x="457200" y="274320"/>
-            <a:ext cx="7132320" cy="914400"/>
+            <a:ext cx="6400800" cy="914400"/>
           </a:xfrm>
           <a:prstGeom prst="rect">
             <a:avLst/>
@@ -5407,7 +5407,7 @@
         <p:spPr>
           <a:xfrm>
             <a:off x="457200" y="274320"/>
-            <a:ext cx="7132320" cy="914400"/>
+            <a:ext cx="6400800" cy="914400"/>
           </a:xfrm>
           <a:prstGeom prst="rect">
             <a:avLst/>
@@ -5497,7 +5497,7 @@
         <p:spPr>
           <a:xfrm>
             <a:off x="457200" y="274320"/>
-            <a:ext cx="7132320" cy="914400"/>
+            <a:ext cx="6400800" cy="914400"/>
           </a:xfrm>
           <a:prstGeom prst="rect">
             <a:avLst/>
@@ -5652,7 +5652,7 @@
         <p:spPr>
           <a:xfrm>
             <a:off x="457200" y="274320"/>
-            <a:ext cx="7132320" cy="914400"/>
+            <a:ext cx="6400800" cy="914400"/>
           </a:xfrm>
           <a:prstGeom prst="rect">
             <a:avLst/>
@@ -5742,7 +5742,7 @@
         <p:spPr>
           <a:xfrm>
             <a:off x="457200" y="274320"/>
-            <a:ext cx="7132320" cy="914400"/>
+            <a:ext cx="6400800" cy="914400"/>
           </a:xfrm>
           <a:prstGeom prst="rect">
             <a:avLst/>
@@ -5862,7 +5862,7 @@
         <p:spPr>
           <a:xfrm>
             <a:off x="457200" y="274320"/>
-            <a:ext cx="7132320" cy="914400"/>
+            <a:ext cx="6400800" cy="914400"/>
           </a:xfrm>
           <a:prstGeom prst="rect">
             <a:avLst/>
@@ -5952,7 +5952,7 @@
         <p:spPr>
           <a:xfrm>
             <a:off x="457200" y="274320"/>
-            <a:ext cx="7132320" cy="914400"/>
+            <a:ext cx="6400800" cy="914400"/>
           </a:xfrm>
           <a:prstGeom prst="rect">
             <a:avLst/>
@@ -6054,7 +6054,7 @@
         <p:spPr>
           <a:xfrm>
             <a:off x="457200" y="274320"/>
-            <a:ext cx="7132320" cy="914400"/>
+            <a:ext cx="6400800" cy="914400"/>
           </a:xfrm>
           <a:prstGeom prst="rect">
             <a:avLst/>
@@ -6144,7 +6144,7 @@
         <p:spPr>
           <a:xfrm>
             <a:off x="457200" y="274320"/>
-            <a:ext cx="7132320" cy="914400"/>
+            <a:ext cx="6400800" cy="914400"/>
           </a:xfrm>
           <a:prstGeom prst="rect">
             <a:avLst/>
@@ -6246,7 +6246,7 @@
         <p:spPr>
           <a:xfrm>
             <a:off x="457200" y="274320"/>
-            <a:ext cx="7132320" cy="914400"/>
+            <a:ext cx="6400800" cy="914400"/>
           </a:xfrm>
           <a:prstGeom prst="rect">
             <a:avLst/>
@@ -6336,7 +6336,7 @@
         <p:spPr>
           <a:xfrm>
             <a:off x="457200" y="274320"/>
-            <a:ext cx="7132320" cy="914400"/>
+            <a:ext cx="6400800" cy="914400"/>
           </a:xfrm>
           <a:prstGeom prst="rect">
             <a:avLst/>
@@ -6438,7 +6438,7 @@
         <p:spPr>
           <a:xfrm>
             <a:off x="457200" y="274320"/>
-            <a:ext cx="7132320" cy="914400"/>
+            <a:ext cx="6400800" cy="914400"/>
           </a:xfrm>
           <a:prstGeom prst="rect">
             <a:avLst/>
@@ -6528,7 +6528,7 @@
         <p:spPr>
           <a:xfrm>
             <a:off x="457200" y="274320"/>
-            <a:ext cx="7132320" cy="914400"/>
+            <a:ext cx="6400800" cy="914400"/>
           </a:xfrm>
           <a:prstGeom prst="rect">
             <a:avLst/>
@@ -6740,7 +6740,7 @@
         <p:spPr>
           <a:xfrm>
             <a:off x="457200" y="274320"/>
-            <a:ext cx="7132320" cy="914400"/>
+            <a:ext cx="6400800" cy="914400"/>
           </a:xfrm>
           <a:prstGeom prst="rect">
             <a:avLst/>
@@ -6830,7 +6830,7 @@
         <p:spPr>
           <a:xfrm>
             <a:off x="457200" y="274320"/>
-            <a:ext cx="7132320" cy="914400"/>
+            <a:ext cx="6400800" cy="914400"/>
           </a:xfrm>
           <a:prstGeom prst="rect">
             <a:avLst/>
@@ -6932,7 +6932,7 @@
         <p:spPr>
           <a:xfrm>
             <a:off x="457200" y="274320"/>
-            <a:ext cx="7132320" cy="914400"/>
+            <a:ext cx="6400800" cy="914400"/>
           </a:xfrm>
           <a:prstGeom prst="rect">
             <a:avLst/>
@@ -7022,7 +7022,7 @@
         <p:spPr>
           <a:xfrm>
             <a:off x="457200" y="274320"/>
-            <a:ext cx="7132320" cy="914400"/>
+            <a:ext cx="6400800" cy="914400"/>
           </a:xfrm>
           <a:prstGeom prst="rect">
             <a:avLst/>
@@ -7142,7 +7142,7 @@
         <p:spPr>
           <a:xfrm>
             <a:off x="457200" y="274320"/>
-            <a:ext cx="7132320" cy="914400"/>
+            <a:ext cx="6400800" cy="914400"/>
           </a:xfrm>
           <a:prstGeom prst="rect">
             <a:avLst/>
@@ -7232,7 +7232,7 @@
         <p:spPr>
           <a:xfrm>
             <a:off x="457200" y="274320"/>
-            <a:ext cx="7132320" cy="914400"/>
+            <a:ext cx="6400800" cy="914400"/>
           </a:xfrm>
           <a:prstGeom prst="rect">
             <a:avLst/>
@@ -7536,7 +7536,7 @@
         <p:spPr>
           <a:xfrm>
             <a:off x="457200" y="274320"/>
-            <a:ext cx="7132320" cy="914400"/>
+            <a:ext cx="6400800" cy="914400"/>
           </a:xfrm>
           <a:prstGeom prst="rect">
             <a:avLst/>
@@ -7626,7 +7626,7 @@
         <p:spPr>
           <a:xfrm>
             <a:off x="457200" y="274320"/>
-            <a:ext cx="7132320" cy="914400"/>
+            <a:ext cx="6400800" cy="914400"/>
           </a:xfrm>
           <a:prstGeom prst="rect">
             <a:avLst/>
@@ -7838,7 +7838,7 @@
         <p:spPr>
           <a:xfrm>
             <a:off x="457200" y="274320"/>
-            <a:ext cx="7132320" cy="914400"/>
+            <a:ext cx="6400800" cy="914400"/>
           </a:xfrm>
           <a:prstGeom prst="rect">
             <a:avLst/>
@@ -7928,7 +7928,7 @@
         <p:spPr>
           <a:xfrm>
             <a:off x="457200" y="274320"/>
-            <a:ext cx="7132320" cy="914400"/>
+            <a:ext cx="6400800" cy="914400"/>
           </a:xfrm>
           <a:prstGeom prst="rect">
             <a:avLst/>
@@ -8302,7 +8302,7 @@
         <p:spPr>
           <a:xfrm>
             <a:off x="457200" y="274320"/>
-            <a:ext cx="7132320" cy="914400"/>
+            <a:ext cx="6400800" cy="914400"/>
           </a:xfrm>
           <a:prstGeom prst="rect">
             <a:avLst/>
@@ -8392,7 +8392,7 @@
         <p:spPr>
           <a:xfrm>
             <a:off x="457200" y="274320"/>
-            <a:ext cx="7132320" cy="914400"/>
+            <a:ext cx="6400800" cy="914400"/>
           </a:xfrm>
           <a:prstGeom prst="rect">
             <a:avLst/>
@@ -8760,7 +8760,7 @@
         <p:spPr>
           <a:xfrm>
             <a:off x="457200" y="274320"/>
-            <a:ext cx="7132320" cy="914400"/>
+            <a:ext cx="6400800" cy="914400"/>
           </a:xfrm>
           <a:prstGeom prst="rect">
             <a:avLst/>
@@ -8850,7 +8850,7 @@
         <p:spPr>
           <a:xfrm>
             <a:off x="457200" y="274320"/>
-            <a:ext cx="7132320" cy="914400"/>
+            <a:ext cx="6400800" cy="914400"/>
           </a:xfrm>
           <a:prstGeom prst="rect">
             <a:avLst/>
@@ -8952,7 +8952,7 @@
         <p:spPr>
           <a:xfrm>
             <a:off x="457200" y="274320"/>
-            <a:ext cx="7132320" cy="914400"/>
+            <a:ext cx="6400800" cy="914400"/>
           </a:xfrm>
           <a:prstGeom prst="rect">
             <a:avLst/>
@@ -9042,7 +9042,7 @@
         <p:spPr>
           <a:xfrm>
             <a:off x="457200" y="274320"/>
-            <a:ext cx="7132320" cy="914400"/>
+            <a:ext cx="6400800" cy="914400"/>
           </a:xfrm>
           <a:prstGeom prst="rect">
             <a:avLst/>
@@ -9162,7 +9162,7 @@
         <p:spPr>
           <a:xfrm>
             <a:off x="457200" y="274320"/>
-            <a:ext cx="7132320" cy="914400"/>
+            <a:ext cx="6400800" cy="914400"/>
           </a:xfrm>
           <a:prstGeom prst="rect">
             <a:avLst/>
@@ -9252,7 +9252,7 @@
         <p:spPr>
           <a:xfrm>
             <a:off x="457200" y="274320"/>
-            <a:ext cx="7132320" cy="914400"/>
+            <a:ext cx="6400800" cy="914400"/>
           </a:xfrm>
           <a:prstGeom prst="rect">
             <a:avLst/>
@@ -9372,7 +9372,7 @@
         <p:spPr>
           <a:xfrm>
             <a:off x="457200" y="274320"/>
-            <a:ext cx="7132320" cy="914400"/>
+            <a:ext cx="6400800" cy="914400"/>
           </a:xfrm>
           <a:prstGeom prst="rect">
             <a:avLst/>
@@ -9462,7 +9462,7 @@
         <p:spPr>
           <a:xfrm>
             <a:off x="457200" y="274320"/>
-            <a:ext cx="7132320" cy="914400"/>
+            <a:ext cx="6400800" cy="914400"/>
           </a:xfrm>
           <a:prstGeom prst="rect">
             <a:avLst/>
@@ -9617,7 +9617,7 @@
         <p:spPr>
           <a:xfrm>
             <a:off x="457200" y="274320"/>
-            <a:ext cx="7132320" cy="914400"/>
+            <a:ext cx="6400800" cy="914400"/>
           </a:xfrm>
           <a:prstGeom prst="rect">
             <a:avLst/>
@@ -9707,7 +9707,7 @@
         <p:spPr>
           <a:xfrm>
             <a:off x="457200" y="274320"/>
-            <a:ext cx="7132320" cy="914400"/>
+            <a:ext cx="6400800" cy="914400"/>
           </a:xfrm>
           <a:prstGeom prst="rect">
             <a:avLst/>
@@ -9973,7 +9973,7 @@
         <p:spPr>
           <a:xfrm>
             <a:off x="457200" y="274320"/>
-            <a:ext cx="7132320" cy="914400"/>
+            <a:ext cx="6400800" cy="914400"/>
           </a:xfrm>
           <a:prstGeom prst="rect">
             <a:avLst/>
@@ -10063,7 +10063,7 @@
         <p:spPr>
           <a:xfrm>
             <a:off x="457200" y="274320"/>
-            <a:ext cx="7132320" cy="914400"/>
+            <a:ext cx="6400800" cy="914400"/>
           </a:xfrm>
           <a:prstGeom prst="rect">
             <a:avLst/>
@@ -10218,7 +10218,7 @@
         <p:spPr>
           <a:xfrm>
             <a:off x="457200" y="274320"/>
-            <a:ext cx="7132320" cy="914400"/>
+            <a:ext cx="6400800" cy="914400"/>
           </a:xfrm>
           <a:prstGeom prst="rect">
             <a:avLst/>
@@ -10308,7 +10308,7 @@
         <p:spPr>
           <a:xfrm>
             <a:off x="457200" y="274320"/>
-            <a:ext cx="7132320" cy="914400"/>
+            <a:ext cx="6400800" cy="914400"/>
           </a:xfrm>
           <a:prstGeom prst="rect">
             <a:avLst/>
@@ -10805,7 +10805,7 @@
         <p:spPr>
           <a:xfrm>
             <a:off x="457200" y="274320"/>
-            <a:ext cx="7132320" cy="914400"/>
+            <a:ext cx="6400800" cy="914400"/>
           </a:xfrm>
           <a:prstGeom prst="rect">
             <a:avLst/>
@@ -10895,7 +10895,7 @@
         <p:spPr>
           <a:xfrm>
             <a:off x="457200" y="274320"/>
-            <a:ext cx="7132320" cy="914400"/>
+            <a:ext cx="6400800" cy="914400"/>
           </a:xfrm>
           <a:prstGeom prst="rect">
             <a:avLst/>
@@ -11050,7 +11050,7 @@
         <p:spPr>
           <a:xfrm>
             <a:off x="457200" y="274320"/>
-            <a:ext cx="7132320" cy="914400"/>
+            <a:ext cx="6400800" cy="914400"/>
           </a:xfrm>
           <a:prstGeom prst="rect">
             <a:avLst/>
@@ -11140,7 +11140,7 @@
         <p:spPr>
           <a:xfrm>
             <a:off x="457200" y="274320"/>
-            <a:ext cx="7132320" cy="914400"/>
+            <a:ext cx="6400800" cy="914400"/>
           </a:xfrm>
           <a:prstGeom prst="rect">
             <a:avLst/>
@@ -11260,7 +11260,7 @@
         <p:spPr>
           <a:xfrm>
             <a:off x="457200" y="274320"/>
-            <a:ext cx="7132320" cy="914400"/>
+            <a:ext cx="6400800" cy="914400"/>
           </a:xfrm>
           <a:prstGeom prst="rect">
             <a:avLst/>
@@ -11350,7 +11350,7 @@
         <p:spPr>
           <a:xfrm>
             <a:off x="457200" y="274320"/>
-            <a:ext cx="7132320" cy="914400"/>
+            <a:ext cx="6400800" cy="914400"/>
           </a:xfrm>
           <a:prstGeom prst="rect">
             <a:avLst/>
@@ -11600,7 +11600,7 @@
         <p:spPr>
           <a:xfrm>
             <a:off x="457200" y="274320"/>
-            <a:ext cx="7132320" cy="914400"/>
+            <a:ext cx="6400800" cy="914400"/>
           </a:xfrm>
           <a:prstGeom prst="rect">
             <a:avLst/>
@@ -11690,7 +11690,7 @@
         <p:spPr>
           <a:xfrm>
             <a:off x="457200" y="274320"/>
-            <a:ext cx="7132320" cy="914400"/>
+            <a:ext cx="6400800" cy="914400"/>
           </a:xfrm>
           <a:prstGeom prst="rect">
             <a:avLst/>
@@ -13177,7 +13177,7 @@
         <p:spPr>
           <a:xfrm>
             <a:off x="457200" y="274320"/>
-            <a:ext cx="7132320" cy="914400"/>
+            <a:ext cx="6400800" cy="914400"/>
           </a:xfrm>
           <a:prstGeom prst="rect">
             <a:avLst/>
@@ -13267,7 +13267,7 @@
         <p:spPr>
           <a:xfrm>
             <a:off x="457200" y="274320"/>
-            <a:ext cx="7132320" cy="914400"/>
+            <a:ext cx="6400800" cy="914400"/>
           </a:xfrm>
           <a:prstGeom prst="rect">
             <a:avLst/>
@@ -13460,7 +13460,7 @@
         <p:spPr>
           <a:xfrm>
             <a:off x="457200" y="274320"/>
-            <a:ext cx="7132320" cy="914400"/>
+            <a:ext cx="6400800" cy="914400"/>
           </a:xfrm>
           <a:prstGeom prst="rect">
             <a:avLst/>
@@ -13550,7 +13550,7 @@
         <p:spPr>
           <a:xfrm>
             <a:off x="457200" y="274320"/>
-            <a:ext cx="7132320" cy="914400"/>
+            <a:ext cx="6400800" cy="914400"/>
           </a:xfrm>
           <a:prstGeom prst="rect">
             <a:avLst/>
@@ -13838,7 +13838,7 @@
         <p:spPr>
           <a:xfrm>
             <a:off x="457200" y="274320"/>
-            <a:ext cx="7132320" cy="914400"/>
+            <a:ext cx="6400800" cy="914400"/>
           </a:xfrm>
           <a:prstGeom prst="rect">
             <a:avLst/>
@@ -13928,7 +13928,7 @@
         <p:spPr>
           <a:xfrm>
             <a:off x="457200" y="274320"/>
-            <a:ext cx="7132320" cy="914400"/>
+            <a:ext cx="6400800" cy="914400"/>
           </a:xfrm>
           <a:prstGeom prst="rect">
             <a:avLst/>
@@ -14325,7 +14325,7 @@
         <p:spPr>
           <a:xfrm>
             <a:off x="457200" y="274320"/>
-            <a:ext cx="7132320" cy="914400"/>
+            <a:ext cx="6400800" cy="914400"/>
           </a:xfrm>
           <a:prstGeom prst="rect">
             <a:avLst/>
@@ -14415,7 +14415,7 @@
         <p:spPr>
           <a:xfrm>
             <a:off x="457200" y="274320"/>
-            <a:ext cx="7132320" cy="914400"/>
+            <a:ext cx="6400800" cy="914400"/>
           </a:xfrm>
           <a:prstGeom prst="rect">
             <a:avLst/>
@@ -15984,7 +15984,7 @@
         <p:spPr>
           <a:xfrm>
             <a:off x="457200" y="274320"/>
-            <a:ext cx="7132320" cy="914400"/>
+            <a:ext cx="6400800" cy="914400"/>
           </a:xfrm>
           <a:prstGeom prst="rect">
             <a:avLst/>
@@ -16074,7 +16074,7 @@
         <p:spPr>
           <a:xfrm>
             <a:off x="457200" y="274320"/>
-            <a:ext cx="7132320" cy="914400"/>
+            <a:ext cx="6400800" cy="914400"/>
           </a:xfrm>
           <a:prstGeom prst="rect">
             <a:avLst/>
@@ -16359,7 +16359,7 @@
         <p:spPr>
           <a:xfrm>
             <a:off x="457200" y="274320"/>
-            <a:ext cx="7132320" cy="914400"/>
+            <a:ext cx="6400800" cy="914400"/>
           </a:xfrm>
           <a:prstGeom prst="rect">
             <a:avLst/>
@@ -16449,7 +16449,7 @@
         <p:spPr>
           <a:xfrm>
             <a:off x="457200" y="274320"/>
-            <a:ext cx="7132320" cy="914400"/>
+            <a:ext cx="6400800" cy="914400"/>
           </a:xfrm>
           <a:prstGeom prst="rect">
             <a:avLst/>
@@ -16972,7 +16972,7 @@
         <p:spPr>
           <a:xfrm>
             <a:off x="457200" y="274320"/>
-            <a:ext cx="7132320" cy="914400"/>
+            <a:ext cx="6400800" cy="914400"/>
           </a:xfrm>
           <a:prstGeom prst="rect">
             <a:avLst/>
@@ -17062,7 +17062,7 @@
         <p:spPr>
           <a:xfrm>
             <a:off x="457200" y="274320"/>
-            <a:ext cx="7132320" cy="914400"/>
+            <a:ext cx="6400800" cy="914400"/>
           </a:xfrm>
           <a:prstGeom prst="rect">
             <a:avLst/>
@@ -18516,7 +18516,7 @@
         <p:spPr>
           <a:xfrm>
             <a:off x="457200" y="274320"/>
-            <a:ext cx="7132320" cy="914400"/>
+            <a:ext cx="6400800" cy="914400"/>
           </a:xfrm>
           <a:prstGeom prst="rect">
             <a:avLst/>
@@ -18606,7 +18606,7 @@
         <p:spPr>
           <a:xfrm>
             <a:off x="457200" y="274320"/>
-            <a:ext cx="7132320" cy="914400"/>
+            <a:ext cx="6400800" cy="914400"/>
           </a:xfrm>
           <a:prstGeom prst="rect">
             <a:avLst/>
@@ -18708,7 +18708,7 @@
         <p:spPr>
           <a:xfrm>
             <a:off x="457200" y="274320"/>
-            <a:ext cx="7132320" cy="914400"/>
+            <a:ext cx="6400800" cy="914400"/>
           </a:xfrm>
           <a:prstGeom prst="rect">
             <a:avLst/>
@@ -18798,7 +18798,7 @@
         <p:spPr>
           <a:xfrm>
             <a:off x="457200" y="274320"/>
-            <a:ext cx="7132320" cy="914400"/>
+            <a:ext cx="6400800" cy="914400"/>
           </a:xfrm>
           <a:prstGeom prst="rect">
             <a:avLst/>
@@ -18900,7 +18900,7 @@
         <p:spPr>
           <a:xfrm>
             <a:off x="457200" y="274320"/>
-            <a:ext cx="7132320" cy="914400"/>
+            <a:ext cx="6400800" cy="914400"/>
           </a:xfrm>
           <a:prstGeom prst="rect">
             <a:avLst/>
@@ -18990,7 +18990,7 @@
         <p:spPr>
           <a:xfrm>
             <a:off x="457200" y="274320"/>
-            <a:ext cx="7132320" cy="914400"/>
+            <a:ext cx="6400800" cy="914400"/>
           </a:xfrm>
           <a:prstGeom prst="rect">
             <a:avLst/>
@@ -19092,7 +19092,7 @@
         <p:spPr>
           <a:xfrm>
             <a:off x="457200" y="274320"/>
-            <a:ext cx="7132320" cy="914400"/>
+            <a:ext cx="6400800" cy="914400"/>
           </a:xfrm>
           <a:prstGeom prst="rect">
             <a:avLst/>
@@ -19182,7 +19182,7 @@
         <p:spPr>
           <a:xfrm>
             <a:off x="457200" y="274320"/>
-            <a:ext cx="7132320" cy="914400"/>
+            <a:ext cx="6400800" cy="914400"/>
           </a:xfrm>
           <a:prstGeom prst="rect">
             <a:avLst/>
@@ -20208,7 +20208,7 @@
         <p:spPr>
           <a:xfrm>
             <a:off x="457200" y="274320"/>
-            <a:ext cx="7132320" cy="914400"/>
+            <a:ext cx="6400800" cy="914400"/>
           </a:xfrm>
           <a:prstGeom prst="rect">
             <a:avLst/>
@@ -20298,7 +20298,7 @@
         <p:spPr>
           <a:xfrm>
             <a:off x="457200" y="274320"/>
-            <a:ext cx="7132320" cy="914400"/>
+            <a:ext cx="6400800" cy="914400"/>
           </a:xfrm>
           <a:prstGeom prst="rect">
             <a:avLst/>
@@ -20453,7 +20453,7 @@
         <p:spPr>
           <a:xfrm>
             <a:off x="457200" y="274320"/>
-            <a:ext cx="7132320" cy="914400"/>
+            <a:ext cx="6400800" cy="914400"/>
           </a:xfrm>
           <a:prstGeom prst="rect">
             <a:avLst/>
@@ -20543,7 +20543,7 @@
         <p:spPr>
           <a:xfrm>
             <a:off x="457200" y="274320"/>
-            <a:ext cx="7132320" cy="914400"/>
+            <a:ext cx="6400800" cy="914400"/>
           </a:xfrm>
           <a:prstGeom prst="rect">
             <a:avLst/>
@@ -20645,7 +20645,7 @@
         <p:spPr>
           <a:xfrm>
             <a:off x="457200" y="274320"/>
-            <a:ext cx="7132320" cy="914400"/>
+            <a:ext cx="6400800" cy="914400"/>
           </a:xfrm>
           <a:prstGeom prst="rect">
             <a:avLst/>
@@ -20735,7 +20735,7 @@
         <p:spPr>
           <a:xfrm>
             <a:off x="457200" y="274320"/>
-            <a:ext cx="7132320" cy="914400"/>
+            <a:ext cx="6400800" cy="914400"/>
           </a:xfrm>
           <a:prstGeom prst="rect">
             <a:avLst/>
@@ -21100,7 +21100,7 @@
         <p:spPr>
           <a:xfrm>
             <a:off x="457200" y="274320"/>
-            <a:ext cx="7132320" cy="914400"/>
+            <a:ext cx="6400800" cy="914400"/>
           </a:xfrm>
           <a:prstGeom prst="rect">
             <a:avLst/>
@@ -21190,7 +21190,7 @@
         <p:spPr>
           <a:xfrm>
             <a:off x="457200" y="274320"/>
-            <a:ext cx="7132320" cy="914400"/>
+            <a:ext cx="6400800" cy="914400"/>
           </a:xfrm>
           <a:prstGeom prst="rect">
             <a:avLst/>
@@ -22889,7 +22889,7 @@
         <p:spPr>
           <a:xfrm>
             <a:off x="457200" y="274320"/>
-            <a:ext cx="7132320" cy="914400"/>
+            <a:ext cx="6400800" cy="914400"/>
           </a:xfrm>
           <a:prstGeom prst="rect">
             <a:avLst/>
@@ -22979,7 +22979,7 @@
         <p:spPr>
           <a:xfrm>
             <a:off x="457200" y="274320"/>
-            <a:ext cx="7132320" cy="914400"/>
+            <a:ext cx="6400800" cy="914400"/>
           </a:xfrm>
           <a:prstGeom prst="rect">
             <a:avLst/>
@@ -23169,7 +23169,7 @@
         <p:spPr>
           <a:xfrm>
             <a:off x="457200" y="274320"/>
-            <a:ext cx="7132320" cy="914400"/>
+            <a:ext cx="6400800" cy="914400"/>
           </a:xfrm>
           <a:prstGeom prst="rect">
             <a:avLst/>
@@ -23259,7 +23259,7 @@
         <p:spPr>
           <a:xfrm>
             <a:off x="457200" y="274320"/>
-            <a:ext cx="7132320" cy="914400"/>
+            <a:ext cx="6400800" cy="914400"/>
           </a:xfrm>
           <a:prstGeom prst="rect">
             <a:avLst/>
@@ -23361,7 +23361,7 @@
         <p:spPr>
           <a:xfrm>
             <a:off x="457200" y="274320"/>
-            <a:ext cx="7132320" cy="914400"/>
+            <a:ext cx="6400800" cy="914400"/>
           </a:xfrm>
           <a:prstGeom prst="rect">
             <a:avLst/>
@@ -23451,7 +23451,7 @@
         <p:spPr>
           <a:xfrm>
             <a:off x="457200" y="274320"/>
-            <a:ext cx="7132320" cy="914400"/>
+            <a:ext cx="6400800" cy="914400"/>
           </a:xfrm>
           <a:prstGeom prst="rect">
             <a:avLst/>
@@ -23606,7 +23606,7 @@
         <p:spPr>
           <a:xfrm>
             <a:off x="457200" y="274320"/>
-            <a:ext cx="7132320" cy="914400"/>
+            <a:ext cx="6400800" cy="914400"/>
           </a:xfrm>
           <a:prstGeom prst="rect">
             <a:avLst/>
@@ -23696,7 +23696,7 @@
         <p:spPr>
           <a:xfrm>
             <a:off x="457200" y="274320"/>
-            <a:ext cx="7132320" cy="914400"/>
+            <a:ext cx="6400800" cy="914400"/>
           </a:xfrm>
           <a:prstGeom prst="rect">
             <a:avLst/>

--- a/MATERIAIS/QUALIFICACAO-PROFISSIONAL/DIGITAL SKILLS/SlidesDigitalSkillsGemini.pptx
+++ b/MATERIAIS/QUALIFICACAO-PROFISSIONAL/DIGITAL SKILLS/SlidesDigitalSkillsGemini.pptx
@@ -3207,14 +3207,50 @@
       </p:pic>
       <p:sp>
         <p:nvSpPr>
-          <p:cNvPr id="3" name="Rectangle 2"/>
+          <p:cNvPr id="3" name="TextBox 2"/>
+          <p:cNvSpPr txBox="1"/>
+          <p:nvPr/>
+        </p:nvSpPr>
+        <p:spPr>
+          <a:xfrm>
+            <a:off x="457200" y="274320"/>
+            <a:ext cx="6400800" cy="914400"/>
+          </a:xfrm>
+          <a:prstGeom prst="rect">
+            <a:avLst/>
+          </a:prstGeom>
+          <a:noFill/>
+        </p:spPr>
+        <p:txBody>
+          <a:bodyPr wrap="square" anchor="ctr">
+            <a:spAutoFit/>
+          </a:bodyPr>
+          <a:lstStyle/>
+          <a:p>
+            <a:pPr algn="l">
+              <a:defRPr sz="3600" b="1">
+                <a:solidFill>
+                  <a:srgbClr val="008AD1"/>
+                </a:solidFill>
+                <a:latin typeface="Century Gothic"/>
+              </a:defRPr>
+            </a:pPr>
+            <a:r>
+              <a:t>SLIDE 09: Quem nasceu primeiro?</a:t>
+            </a:r>
+          </a:p>
+        </p:txBody>
+      </p:sp>
+      <p:sp>
+        <p:nvSpPr>
+          <p:cNvPr id="4" name="Rectangle 3"/>
           <p:cNvSpPr/>
           <p:nvPr/>
         </p:nvSpPr>
         <p:spPr>
           <a:xfrm>
-            <a:off x="457200" y="274320"/>
-            <a:ext cx="6400800" cy="914400"/>
+            <a:off x="457200" y="1371600"/>
+            <a:ext cx="8229600" cy="5212080"/>
           </a:xfrm>
           <a:prstGeom prst="rect">
             <a:avLst/>
@@ -3222,7 +3258,7 @@
           <a:solidFill>
             <a:srgbClr val="FFFFFF"/>
           </a:solidFill>
-          <a:ln w="25400">
+          <a:ln w="12700">
             <a:solidFill>
               <a:srgbClr val="008AD1"/>
             </a:solidFill>
@@ -3252,88 +3288,7 @@
       </p:sp>
       <p:sp>
         <p:nvSpPr>
-          <p:cNvPr id="5" name="Rectangle 4"/>
-          <p:cNvSpPr/>
-          <p:nvPr/>
-        </p:nvSpPr>
-        <p:spPr>
-          <a:xfrm>
-            <a:off x="457200" y="1371600"/>
-            <a:ext cx="8229600" cy="5212080"/>
-          </a:xfrm>
-          <a:prstGeom prst="rect">
-            <a:avLst/>
-          </a:prstGeom>
-          <a:solidFill>
-            <a:srgbClr val="FFFFFF"/>
-          </a:solidFill>
-          <a:ln w="12700">
-            <a:solidFill>
-              <a:srgbClr val="008AD1"/>
-            </a:solidFill>
-          </a:ln>
-        </p:spPr>
-        <p:style>
-          <a:lnRef idx="1">
-            <a:schemeClr val="accent1"/>
-          </a:lnRef>
-          <a:fillRef idx="3">
-            <a:schemeClr val="accent1"/>
-          </a:fillRef>
-          <a:effectRef idx="2">
-            <a:schemeClr val="accent1"/>
-          </a:effectRef>
-          <a:fontRef idx="minor">
-            <a:schemeClr val="lt1"/>
-          </a:fontRef>
-        </p:style>
-        <p:txBody>
-          <a:bodyPr rtlCol="0" anchor="ctr"/>
-          <a:lstStyle/>
-          <a:p>
-            <a:pPr algn="ctr"/>
-          </a:p>
-        </p:txBody>
-      </p:sp>
-      <p:sp>
-        <p:nvSpPr>
-          <p:cNvPr id="4" name="TextBox 3"/>
-          <p:cNvSpPr txBox="1"/>
-          <p:nvPr/>
-        </p:nvSpPr>
-        <p:spPr>
-          <a:xfrm>
-            <a:off x="457200" y="274320"/>
-            <a:ext cx="6400800" cy="914400"/>
-          </a:xfrm>
-          <a:prstGeom prst="rect">
-            <a:avLst/>
-          </a:prstGeom>
-          <a:noFill/>
-        </p:spPr>
-        <p:txBody>
-          <a:bodyPr wrap="square" anchor="ctr">
-            <a:spAutoFit/>
-          </a:bodyPr>
-          <a:lstStyle/>
-          <a:p>
-            <a:pPr algn="l">
-              <a:defRPr sz="3600" b="1">
-                <a:solidFill>
-                  <a:srgbClr val="008AD1"/>
-                </a:solidFill>
-                <a:latin typeface="Century Gothic"/>
-              </a:defRPr>
-            </a:pPr>
-            <a:r>
-              <a:t>SLIDE 09: Quem nasceu primeiro?</a:t>
-            </a:r>
-          </a:p>
-        </p:txBody>
-      </p:sp>
-      <p:sp>
-        <p:nvSpPr>
-          <p:cNvPr id="6" name="TextBox 5"/>
+          <p:cNvPr id="5" name="TextBox 4"/>
           <p:cNvSpPr txBox="1"/>
           <p:nvPr/>
         </p:nvSpPr>
@@ -3452,14 +3407,50 @@
       </p:pic>
       <p:sp>
         <p:nvSpPr>
-          <p:cNvPr id="3" name="Rectangle 2"/>
+          <p:cNvPr id="3" name="TextBox 2"/>
+          <p:cNvSpPr txBox="1"/>
+          <p:nvPr/>
+        </p:nvSpPr>
+        <p:spPr>
+          <a:xfrm>
+            <a:off x="457200" y="274320"/>
+            <a:ext cx="6400800" cy="914400"/>
+          </a:xfrm>
+          <a:prstGeom prst="rect">
+            <a:avLst/>
+          </a:prstGeom>
+          <a:noFill/>
+        </p:spPr>
+        <p:txBody>
+          <a:bodyPr wrap="square" anchor="ctr">
+            <a:spAutoFit/>
+          </a:bodyPr>
+          <a:lstStyle/>
+          <a:p>
+            <a:pPr algn="l">
+              <a:defRPr sz="3600" b="1">
+                <a:solidFill>
+                  <a:srgbClr val="008AD1"/>
+                </a:solidFill>
+                <a:latin typeface="Century Gothic"/>
+              </a:defRPr>
+            </a:pPr>
+            <a:r>
+              <a:t>SLIDE 10: 2022</a:t>
+            </a:r>
+          </a:p>
+        </p:txBody>
+      </p:sp>
+      <p:sp>
+        <p:nvSpPr>
+          <p:cNvPr id="4" name="Rectangle 3"/>
           <p:cNvSpPr/>
           <p:nvPr/>
         </p:nvSpPr>
         <p:spPr>
           <a:xfrm>
-            <a:off x="457200" y="274320"/>
-            <a:ext cx="6400800" cy="914400"/>
+            <a:off x="457200" y="1371600"/>
+            <a:ext cx="8229600" cy="5212080"/>
           </a:xfrm>
           <a:prstGeom prst="rect">
             <a:avLst/>
@@ -3467,7 +3458,7 @@
           <a:solidFill>
             <a:srgbClr val="FFFFFF"/>
           </a:solidFill>
-          <a:ln w="25400">
+          <a:ln w="12700">
             <a:solidFill>
               <a:srgbClr val="008AD1"/>
             </a:solidFill>
@@ -3497,88 +3488,7 @@
       </p:sp>
       <p:sp>
         <p:nvSpPr>
-          <p:cNvPr id="5" name="Rectangle 4"/>
-          <p:cNvSpPr/>
-          <p:nvPr/>
-        </p:nvSpPr>
-        <p:spPr>
-          <a:xfrm>
-            <a:off x="457200" y="1371600"/>
-            <a:ext cx="8229600" cy="5212080"/>
-          </a:xfrm>
-          <a:prstGeom prst="rect">
-            <a:avLst/>
-          </a:prstGeom>
-          <a:solidFill>
-            <a:srgbClr val="FFFFFF"/>
-          </a:solidFill>
-          <a:ln w="12700">
-            <a:solidFill>
-              <a:srgbClr val="008AD1"/>
-            </a:solidFill>
-          </a:ln>
-        </p:spPr>
-        <p:style>
-          <a:lnRef idx="1">
-            <a:schemeClr val="accent1"/>
-          </a:lnRef>
-          <a:fillRef idx="3">
-            <a:schemeClr val="accent1"/>
-          </a:fillRef>
-          <a:effectRef idx="2">
-            <a:schemeClr val="accent1"/>
-          </a:effectRef>
-          <a:fontRef idx="minor">
-            <a:schemeClr val="lt1"/>
-          </a:fontRef>
-        </p:style>
-        <p:txBody>
-          <a:bodyPr rtlCol="0" anchor="ctr"/>
-          <a:lstStyle/>
-          <a:p>
-            <a:pPr algn="ctr"/>
-          </a:p>
-        </p:txBody>
-      </p:sp>
-      <p:sp>
-        <p:nvSpPr>
-          <p:cNvPr id="4" name="TextBox 3"/>
-          <p:cNvSpPr txBox="1"/>
-          <p:nvPr/>
-        </p:nvSpPr>
-        <p:spPr>
-          <a:xfrm>
-            <a:off x="457200" y="274320"/>
-            <a:ext cx="6400800" cy="914400"/>
-          </a:xfrm>
-          <a:prstGeom prst="rect">
-            <a:avLst/>
-          </a:prstGeom>
-          <a:noFill/>
-        </p:spPr>
-        <p:txBody>
-          <a:bodyPr wrap="square" anchor="ctr">
-            <a:spAutoFit/>
-          </a:bodyPr>
-          <a:lstStyle/>
-          <a:p>
-            <a:pPr algn="l">
-              <a:defRPr sz="3600" b="1">
-                <a:solidFill>
-                  <a:srgbClr val="008AD1"/>
-                </a:solidFill>
-                <a:latin typeface="Century Gothic"/>
-              </a:defRPr>
-            </a:pPr>
-            <a:r>
-              <a:t>SLIDE 10: 2022</a:t>
-            </a:r>
-          </a:p>
-        </p:txBody>
-      </p:sp>
-      <p:sp>
-        <p:nvSpPr>
-          <p:cNvPr id="6" name="TextBox 5"/>
+          <p:cNvPr id="5" name="TextBox 4"/>
           <p:cNvSpPr txBox="1"/>
           <p:nvPr/>
         </p:nvSpPr>
@@ -3697,14 +3607,50 @@
       </p:pic>
       <p:sp>
         <p:nvSpPr>
-          <p:cNvPr id="3" name="Rectangle 2"/>
+          <p:cNvPr id="3" name="TextBox 2"/>
+          <p:cNvSpPr txBox="1"/>
+          <p:nvPr/>
+        </p:nvSpPr>
+        <p:spPr>
+          <a:xfrm>
+            <a:off x="457200" y="274320"/>
+            <a:ext cx="6400800" cy="914400"/>
+          </a:xfrm>
+          <a:prstGeom prst="rect">
+            <a:avLst/>
+          </a:prstGeom>
+          <a:noFill/>
+        </p:spPr>
+        <p:txBody>
+          <a:bodyPr wrap="square" anchor="ctr">
+            <a:spAutoFit/>
+          </a:bodyPr>
+          <a:lstStyle/>
+          <a:p>
+            <a:pPr algn="l">
+              <a:defRPr sz="3600" b="1">
+                <a:solidFill>
+                  <a:srgbClr val="008AD1"/>
+                </a:solidFill>
+                <a:latin typeface="Century Gothic"/>
+              </a:defRPr>
+            </a:pPr>
+            <a:r>
+              <a:t>SLIDE 11: Digital Skills (Habilidades Digitais)</a:t>
+            </a:r>
+          </a:p>
+        </p:txBody>
+      </p:sp>
+      <p:sp>
+        <p:nvSpPr>
+          <p:cNvPr id="4" name="Rectangle 3"/>
           <p:cNvSpPr/>
           <p:nvPr/>
         </p:nvSpPr>
         <p:spPr>
           <a:xfrm>
-            <a:off x="457200" y="274320"/>
-            <a:ext cx="6400800" cy="914400"/>
+            <a:off x="457200" y="1371600"/>
+            <a:ext cx="8229600" cy="5212080"/>
           </a:xfrm>
           <a:prstGeom prst="rect">
             <a:avLst/>
@@ -3712,7 +3658,7 @@
           <a:solidFill>
             <a:srgbClr val="FFFFFF"/>
           </a:solidFill>
-          <a:ln w="25400">
+          <a:ln w="12700">
             <a:solidFill>
               <a:srgbClr val="008AD1"/>
             </a:solidFill>
@@ -3742,88 +3688,7 @@
       </p:sp>
       <p:sp>
         <p:nvSpPr>
-          <p:cNvPr id="5" name="Rectangle 4"/>
-          <p:cNvSpPr/>
-          <p:nvPr/>
-        </p:nvSpPr>
-        <p:spPr>
-          <a:xfrm>
-            <a:off x="457200" y="1371600"/>
-            <a:ext cx="8229600" cy="5212080"/>
-          </a:xfrm>
-          <a:prstGeom prst="rect">
-            <a:avLst/>
-          </a:prstGeom>
-          <a:solidFill>
-            <a:srgbClr val="FFFFFF"/>
-          </a:solidFill>
-          <a:ln w="12700">
-            <a:solidFill>
-              <a:srgbClr val="008AD1"/>
-            </a:solidFill>
-          </a:ln>
-        </p:spPr>
-        <p:style>
-          <a:lnRef idx="1">
-            <a:schemeClr val="accent1"/>
-          </a:lnRef>
-          <a:fillRef idx="3">
-            <a:schemeClr val="accent1"/>
-          </a:fillRef>
-          <a:effectRef idx="2">
-            <a:schemeClr val="accent1"/>
-          </a:effectRef>
-          <a:fontRef idx="minor">
-            <a:schemeClr val="lt1"/>
-          </a:fontRef>
-        </p:style>
-        <p:txBody>
-          <a:bodyPr rtlCol="0" anchor="ctr"/>
-          <a:lstStyle/>
-          <a:p>
-            <a:pPr algn="ctr"/>
-          </a:p>
-        </p:txBody>
-      </p:sp>
-      <p:sp>
-        <p:nvSpPr>
-          <p:cNvPr id="4" name="TextBox 3"/>
-          <p:cNvSpPr txBox="1"/>
-          <p:nvPr/>
-        </p:nvSpPr>
-        <p:spPr>
-          <a:xfrm>
-            <a:off x="457200" y="274320"/>
-            <a:ext cx="6400800" cy="914400"/>
-          </a:xfrm>
-          <a:prstGeom prst="rect">
-            <a:avLst/>
-          </a:prstGeom>
-          <a:noFill/>
-        </p:spPr>
-        <p:txBody>
-          <a:bodyPr wrap="square" anchor="ctr">
-            <a:spAutoFit/>
-          </a:bodyPr>
-          <a:lstStyle/>
-          <a:p>
-            <a:pPr algn="l">
-              <a:defRPr sz="3600" b="1">
-                <a:solidFill>
-                  <a:srgbClr val="008AD1"/>
-                </a:solidFill>
-                <a:latin typeface="Century Gothic"/>
-              </a:defRPr>
-            </a:pPr>
-            <a:r>
-              <a:t>SLIDE 11: Digital Skills (Habilidades Digitais)</a:t>
-            </a:r>
-          </a:p>
-        </p:txBody>
-      </p:sp>
-      <p:sp>
-        <p:nvSpPr>
-          <p:cNvPr id="6" name="TextBox 5"/>
+          <p:cNvPr id="5" name="TextBox 4"/>
           <p:cNvSpPr txBox="1"/>
           <p:nvPr/>
         </p:nvSpPr>
@@ -3980,14 +3845,50 @@
       </p:pic>
       <p:sp>
         <p:nvSpPr>
-          <p:cNvPr id="3" name="Rectangle 2"/>
+          <p:cNvPr id="3" name="TextBox 2"/>
+          <p:cNvSpPr txBox="1"/>
+          <p:nvPr/>
+        </p:nvSpPr>
+        <p:spPr>
+          <a:xfrm>
+            <a:off x="457200" y="274320"/>
+            <a:ext cx="6400800" cy="914400"/>
+          </a:xfrm>
+          <a:prstGeom prst="rect">
+            <a:avLst/>
+          </a:prstGeom>
+          <a:noFill/>
+        </p:spPr>
+        <p:txBody>
+          <a:bodyPr wrap="square" anchor="ctr">
+            <a:spAutoFit/>
+          </a:bodyPr>
+          <a:lstStyle/>
+          <a:p>
+            <a:pPr algn="l">
+              <a:defRPr sz="3600" b="1">
+                <a:solidFill>
+                  <a:srgbClr val="008AD1"/>
+                </a:solidFill>
+                <a:latin typeface="Century Gothic"/>
+              </a:defRPr>
+            </a:pPr>
+            <a:r>
+              <a:t>SLIDE 12: Por que Digital Skills são importantes?</a:t>
+            </a:r>
+          </a:p>
+        </p:txBody>
+      </p:sp>
+      <p:sp>
+        <p:nvSpPr>
+          <p:cNvPr id="4" name="Rectangle 3"/>
           <p:cNvSpPr/>
           <p:nvPr/>
         </p:nvSpPr>
         <p:spPr>
           <a:xfrm>
-            <a:off x="457200" y="274320"/>
-            <a:ext cx="6400800" cy="914400"/>
+            <a:off x="457200" y="1371600"/>
+            <a:ext cx="8229600" cy="5212080"/>
           </a:xfrm>
           <a:prstGeom prst="rect">
             <a:avLst/>
@@ -3995,7 +3896,7 @@
           <a:solidFill>
             <a:srgbClr val="FFFFFF"/>
           </a:solidFill>
-          <a:ln w="25400">
+          <a:ln w="12700">
             <a:solidFill>
               <a:srgbClr val="008AD1"/>
             </a:solidFill>
@@ -4025,88 +3926,7 @@
       </p:sp>
       <p:sp>
         <p:nvSpPr>
-          <p:cNvPr id="5" name="Rectangle 4"/>
-          <p:cNvSpPr/>
-          <p:nvPr/>
-        </p:nvSpPr>
-        <p:spPr>
-          <a:xfrm>
-            <a:off x="457200" y="1371600"/>
-            <a:ext cx="8229600" cy="5212080"/>
-          </a:xfrm>
-          <a:prstGeom prst="rect">
-            <a:avLst/>
-          </a:prstGeom>
-          <a:solidFill>
-            <a:srgbClr val="FFFFFF"/>
-          </a:solidFill>
-          <a:ln w="12700">
-            <a:solidFill>
-              <a:srgbClr val="008AD1"/>
-            </a:solidFill>
-          </a:ln>
-        </p:spPr>
-        <p:style>
-          <a:lnRef idx="1">
-            <a:schemeClr val="accent1"/>
-          </a:lnRef>
-          <a:fillRef idx="3">
-            <a:schemeClr val="accent1"/>
-          </a:fillRef>
-          <a:effectRef idx="2">
-            <a:schemeClr val="accent1"/>
-          </a:effectRef>
-          <a:fontRef idx="minor">
-            <a:schemeClr val="lt1"/>
-          </a:fontRef>
-        </p:style>
-        <p:txBody>
-          <a:bodyPr rtlCol="0" anchor="ctr"/>
-          <a:lstStyle/>
-          <a:p>
-            <a:pPr algn="ctr"/>
-          </a:p>
-        </p:txBody>
-      </p:sp>
-      <p:sp>
-        <p:nvSpPr>
-          <p:cNvPr id="4" name="TextBox 3"/>
-          <p:cNvSpPr txBox="1"/>
-          <p:nvPr/>
-        </p:nvSpPr>
-        <p:spPr>
-          <a:xfrm>
-            <a:off x="457200" y="274320"/>
-            <a:ext cx="6400800" cy="914400"/>
-          </a:xfrm>
-          <a:prstGeom prst="rect">
-            <a:avLst/>
-          </a:prstGeom>
-          <a:noFill/>
-        </p:spPr>
-        <p:txBody>
-          <a:bodyPr wrap="square" anchor="ctr">
-            <a:spAutoFit/>
-          </a:bodyPr>
-          <a:lstStyle/>
-          <a:p>
-            <a:pPr algn="l">
-              <a:defRPr sz="3600" b="1">
-                <a:solidFill>
-                  <a:srgbClr val="008AD1"/>
-                </a:solidFill>
-                <a:latin typeface="Century Gothic"/>
-              </a:defRPr>
-            </a:pPr>
-            <a:r>
-              <a:t>SLIDE 12: Por que Digital Skills são importantes?</a:t>
-            </a:r>
-          </a:p>
-        </p:txBody>
-      </p:sp>
-      <p:sp>
-        <p:nvSpPr>
-          <p:cNvPr id="6" name="TextBox 5"/>
+          <p:cNvPr id="5" name="TextBox 4"/>
           <p:cNvSpPr txBox="1"/>
           <p:nvPr/>
         </p:nvSpPr>
@@ -4263,14 +4083,50 @@
       </p:pic>
       <p:sp>
         <p:nvSpPr>
-          <p:cNvPr id="3" name="Rectangle 2"/>
+          <p:cNvPr id="3" name="TextBox 2"/>
+          <p:cNvSpPr txBox="1"/>
+          <p:nvPr/>
+        </p:nvSpPr>
+        <p:spPr>
+          <a:xfrm>
+            <a:off x="457200" y="274320"/>
+            <a:ext cx="6400800" cy="914400"/>
+          </a:xfrm>
+          <a:prstGeom prst="rect">
+            <a:avLst/>
+          </a:prstGeom>
+          <a:noFill/>
+        </p:spPr>
+        <p:txBody>
+          <a:bodyPr wrap="square" anchor="ctr">
+            <a:spAutoFit/>
+          </a:bodyPr>
+          <a:lstStyle/>
+          <a:p>
+            <a:pPr algn="l">
+              <a:defRPr sz="3600" b="1">
+                <a:solidFill>
+                  <a:srgbClr val="008AD1"/>
+                </a:solidFill>
+                <a:latin typeface="Century Gothic"/>
+              </a:defRPr>
+            </a:pPr>
+            <a:r>
+              <a:t>SLIDE 13: O que é Inteligência Artificial (IA) ?</a:t>
+            </a:r>
+          </a:p>
+        </p:txBody>
+      </p:sp>
+      <p:sp>
+        <p:nvSpPr>
+          <p:cNvPr id="4" name="Rectangle 3"/>
           <p:cNvSpPr/>
           <p:nvPr/>
         </p:nvSpPr>
         <p:spPr>
           <a:xfrm>
-            <a:off x="457200" y="274320"/>
-            <a:ext cx="6400800" cy="914400"/>
+            <a:off x="457200" y="1371600"/>
+            <a:ext cx="8229600" cy="5212080"/>
           </a:xfrm>
           <a:prstGeom prst="rect">
             <a:avLst/>
@@ -4278,7 +4134,7 @@
           <a:solidFill>
             <a:srgbClr val="FFFFFF"/>
           </a:solidFill>
-          <a:ln w="25400">
+          <a:ln w="12700">
             <a:solidFill>
               <a:srgbClr val="008AD1"/>
             </a:solidFill>
@@ -4308,88 +4164,7 @@
       </p:sp>
       <p:sp>
         <p:nvSpPr>
-          <p:cNvPr id="5" name="Rectangle 4"/>
-          <p:cNvSpPr/>
-          <p:nvPr/>
-        </p:nvSpPr>
-        <p:spPr>
-          <a:xfrm>
-            <a:off x="457200" y="1371600"/>
-            <a:ext cx="8229600" cy="5212080"/>
-          </a:xfrm>
-          <a:prstGeom prst="rect">
-            <a:avLst/>
-          </a:prstGeom>
-          <a:solidFill>
-            <a:srgbClr val="FFFFFF"/>
-          </a:solidFill>
-          <a:ln w="12700">
-            <a:solidFill>
-              <a:srgbClr val="008AD1"/>
-            </a:solidFill>
-          </a:ln>
-        </p:spPr>
-        <p:style>
-          <a:lnRef idx="1">
-            <a:schemeClr val="accent1"/>
-          </a:lnRef>
-          <a:fillRef idx="3">
-            <a:schemeClr val="accent1"/>
-          </a:fillRef>
-          <a:effectRef idx="2">
-            <a:schemeClr val="accent1"/>
-          </a:effectRef>
-          <a:fontRef idx="minor">
-            <a:schemeClr val="lt1"/>
-          </a:fontRef>
-        </p:style>
-        <p:txBody>
-          <a:bodyPr rtlCol="0" anchor="ctr"/>
-          <a:lstStyle/>
-          <a:p>
-            <a:pPr algn="ctr"/>
-          </a:p>
-        </p:txBody>
-      </p:sp>
-      <p:sp>
-        <p:nvSpPr>
-          <p:cNvPr id="4" name="TextBox 3"/>
-          <p:cNvSpPr txBox="1"/>
-          <p:nvPr/>
-        </p:nvSpPr>
-        <p:spPr>
-          <a:xfrm>
-            <a:off x="457200" y="274320"/>
-            <a:ext cx="6400800" cy="914400"/>
-          </a:xfrm>
-          <a:prstGeom prst="rect">
-            <a:avLst/>
-          </a:prstGeom>
-          <a:noFill/>
-        </p:spPr>
-        <p:txBody>
-          <a:bodyPr wrap="square" anchor="ctr">
-            <a:spAutoFit/>
-          </a:bodyPr>
-          <a:lstStyle/>
-          <a:p>
-            <a:pPr algn="l">
-              <a:defRPr sz="3600" b="1">
-                <a:solidFill>
-                  <a:srgbClr val="008AD1"/>
-                </a:solidFill>
-                <a:latin typeface="Century Gothic"/>
-              </a:defRPr>
-            </a:pPr>
-            <a:r>
-              <a:t>SLIDE 13: O que é Inteligência Artificial (IA) ?</a:t>
-            </a:r>
-          </a:p>
-        </p:txBody>
-      </p:sp>
-      <p:sp>
-        <p:nvSpPr>
-          <p:cNvPr id="6" name="TextBox 5"/>
+          <p:cNvPr id="5" name="TextBox 4"/>
           <p:cNvSpPr txBox="1"/>
           <p:nvPr/>
         </p:nvSpPr>
@@ -4527,14 +4302,50 @@
       </p:pic>
       <p:sp>
         <p:nvSpPr>
-          <p:cNvPr id="3" name="Rectangle 2"/>
+          <p:cNvPr id="3" name="TextBox 2"/>
+          <p:cNvSpPr txBox="1"/>
+          <p:nvPr/>
+        </p:nvSpPr>
+        <p:spPr>
+          <a:xfrm>
+            <a:off x="457200" y="274320"/>
+            <a:ext cx="6400800" cy="914400"/>
+          </a:xfrm>
+          <a:prstGeom prst="rect">
+            <a:avLst/>
+          </a:prstGeom>
+          <a:noFill/>
+        </p:spPr>
+        <p:txBody>
+          <a:bodyPr wrap="square" anchor="ctr">
+            <a:spAutoFit/>
+          </a:bodyPr>
+          <a:lstStyle/>
+          <a:p>
+            <a:pPr algn="l">
+              <a:defRPr sz="3600" b="1">
+                <a:solidFill>
+                  <a:srgbClr val="008AD1"/>
+                </a:solidFill>
+                <a:latin typeface="Century Gothic"/>
+              </a:defRPr>
+            </a:pPr>
+            <a:r>
+              <a:t>SLIDE 14: IA Generativa e Modelos de Linguagem</a:t>
+            </a:r>
+          </a:p>
+        </p:txBody>
+      </p:sp>
+      <p:sp>
+        <p:nvSpPr>
+          <p:cNvPr id="4" name="Rectangle 3"/>
           <p:cNvSpPr/>
           <p:nvPr/>
         </p:nvSpPr>
         <p:spPr>
           <a:xfrm>
-            <a:off x="457200" y="274320"/>
-            <a:ext cx="6400800" cy="914400"/>
+            <a:off x="457200" y="1371600"/>
+            <a:ext cx="8229600" cy="5212080"/>
           </a:xfrm>
           <a:prstGeom prst="rect">
             <a:avLst/>
@@ -4542,7 +4353,7 @@
           <a:solidFill>
             <a:srgbClr val="FFFFFF"/>
           </a:solidFill>
-          <a:ln w="25400">
+          <a:ln w="12700">
             <a:solidFill>
               <a:srgbClr val="008AD1"/>
             </a:solidFill>
@@ -4572,88 +4383,7 @@
       </p:sp>
       <p:sp>
         <p:nvSpPr>
-          <p:cNvPr id="5" name="Rectangle 4"/>
-          <p:cNvSpPr/>
-          <p:nvPr/>
-        </p:nvSpPr>
-        <p:spPr>
-          <a:xfrm>
-            <a:off x="457200" y="1371600"/>
-            <a:ext cx="8229600" cy="5212080"/>
-          </a:xfrm>
-          <a:prstGeom prst="rect">
-            <a:avLst/>
-          </a:prstGeom>
-          <a:solidFill>
-            <a:srgbClr val="FFFFFF"/>
-          </a:solidFill>
-          <a:ln w="12700">
-            <a:solidFill>
-              <a:srgbClr val="008AD1"/>
-            </a:solidFill>
-          </a:ln>
-        </p:spPr>
-        <p:style>
-          <a:lnRef idx="1">
-            <a:schemeClr val="accent1"/>
-          </a:lnRef>
-          <a:fillRef idx="3">
-            <a:schemeClr val="accent1"/>
-          </a:fillRef>
-          <a:effectRef idx="2">
-            <a:schemeClr val="accent1"/>
-          </a:effectRef>
-          <a:fontRef idx="minor">
-            <a:schemeClr val="lt1"/>
-          </a:fontRef>
-        </p:style>
-        <p:txBody>
-          <a:bodyPr rtlCol="0" anchor="ctr"/>
-          <a:lstStyle/>
-          <a:p>
-            <a:pPr algn="ctr"/>
-          </a:p>
-        </p:txBody>
-      </p:sp>
-      <p:sp>
-        <p:nvSpPr>
-          <p:cNvPr id="4" name="TextBox 3"/>
-          <p:cNvSpPr txBox="1"/>
-          <p:nvPr/>
-        </p:nvSpPr>
-        <p:spPr>
-          <a:xfrm>
-            <a:off x="457200" y="274320"/>
-            <a:ext cx="6400800" cy="914400"/>
-          </a:xfrm>
-          <a:prstGeom prst="rect">
-            <a:avLst/>
-          </a:prstGeom>
-          <a:noFill/>
-        </p:spPr>
-        <p:txBody>
-          <a:bodyPr wrap="square" anchor="ctr">
-            <a:spAutoFit/>
-          </a:bodyPr>
-          <a:lstStyle/>
-          <a:p>
-            <a:pPr algn="l">
-              <a:defRPr sz="3600" b="1">
-                <a:solidFill>
-                  <a:srgbClr val="008AD1"/>
-                </a:solidFill>
-                <a:latin typeface="Century Gothic"/>
-              </a:defRPr>
-            </a:pPr>
-            <a:r>
-              <a:t>SLIDE 14: IA Generativa e Modelos de Linguagem</a:t>
-            </a:r>
-          </a:p>
-        </p:txBody>
-      </p:sp>
-      <p:sp>
-        <p:nvSpPr>
-          <p:cNvPr id="6" name="TextBox 5"/>
+          <p:cNvPr id="5" name="TextBox 4"/>
           <p:cNvSpPr txBox="1"/>
           <p:nvPr/>
         </p:nvSpPr>
@@ -4791,14 +4521,50 @@
       </p:pic>
       <p:sp>
         <p:nvSpPr>
-          <p:cNvPr id="3" name="Rectangle 2"/>
+          <p:cNvPr id="3" name="TextBox 2"/>
+          <p:cNvSpPr txBox="1"/>
+          <p:nvPr/>
+        </p:nvSpPr>
+        <p:spPr>
+          <a:xfrm>
+            <a:off x="457200" y="274320"/>
+            <a:ext cx="6400800" cy="914400"/>
+          </a:xfrm>
+          <a:prstGeom prst="rect">
+            <a:avLst/>
+          </a:prstGeom>
+          <a:noFill/>
+        </p:spPr>
+        <p:txBody>
+          <a:bodyPr wrap="square" anchor="ctr">
+            <a:spAutoFit/>
+          </a:bodyPr>
+          <a:lstStyle/>
+          <a:p>
+            <a:pPr algn="l">
+              <a:defRPr sz="3600" b="1">
+                <a:solidFill>
+                  <a:srgbClr val="008AD1"/>
+                </a:solidFill>
+                <a:latin typeface="Century Gothic"/>
+              </a:defRPr>
+            </a:pPr>
+            <a:r>
+              <a:t>SLIDE 15: Já usou a expressão Dá um Google?</a:t>
+            </a:r>
+          </a:p>
+        </p:txBody>
+      </p:sp>
+      <p:sp>
+        <p:nvSpPr>
+          <p:cNvPr id="4" name="Rectangle 3"/>
           <p:cNvSpPr/>
           <p:nvPr/>
         </p:nvSpPr>
         <p:spPr>
           <a:xfrm>
-            <a:off x="457200" y="274320"/>
-            <a:ext cx="6400800" cy="914400"/>
+            <a:off x="457200" y="1371600"/>
+            <a:ext cx="8229600" cy="5212080"/>
           </a:xfrm>
           <a:prstGeom prst="rect">
             <a:avLst/>
@@ -4806,7 +4572,7 @@
           <a:solidFill>
             <a:srgbClr val="FFFFFF"/>
           </a:solidFill>
-          <a:ln w="25400">
+          <a:ln w="12700">
             <a:solidFill>
               <a:srgbClr val="008AD1"/>
             </a:solidFill>
@@ -4836,88 +4602,7 @@
       </p:sp>
       <p:sp>
         <p:nvSpPr>
-          <p:cNvPr id="5" name="Rectangle 4"/>
-          <p:cNvSpPr/>
-          <p:nvPr/>
-        </p:nvSpPr>
-        <p:spPr>
-          <a:xfrm>
-            <a:off x="457200" y="1371600"/>
-            <a:ext cx="8229600" cy="5212080"/>
-          </a:xfrm>
-          <a:prstGeom prst="rect">
-            <a:avLst/>
-          </a:prstGeom>
-          <a:solidFill>
-            <a:srgbClr val="FFFFFF"/>
-          </a:solidFill>
-          <a:ln w="12700">
-            <a:solidFill>
-              <a:srgbClr val="008AD1"/>
-            </a:solidFill>
-          </a:ln>
-        </p:spPr>
-        <p:style>
-          <a:lnRef idx="1">
-            <a:schemeClr val="accent1"/>
-          </a:lnRef>
-          <a:fillRef idx="3">
-            <a:schemeClr val="accent1"/>
-          </a:fillRef>
-          <a:effectRef idx="2">
-            <a:schemeClr val="accent1"/>
-          </a:effectRef>
-          <a:fontRef idx="minor">
-            <a:schemeClr val="lt1"/>
-          </a:fontRef>
-        </p:style>
-        <p:txBody>
-          <a:bodyPr rtlCol="0" anchor="ctr"/>
-          <a:lstStyle/>
-          <a:p>
-            <a:pPr algn="ctr"/>
-          </a:p>
-        </p:txBody>
-      </p:sp>
-      <p:sp>
-        <p:nvSpPr>
-          <p:cNvPr id="4" name="TextBox 3"/>
-          <p:cNvSpPr txBox="1"/>
-          <p:nvPr/>
-        </p:nvSpPr>
-        <p:spPr>
-          <a:xfrm>
-            <a:off x="457200" y="274320"/>
-            <a:ext cx="6400800" cy="914400"/>
-          </a:xfrm>
-          <a:prstGeom prst="rect">
-            <a:avLst/>
-          </a:prstGeom>
-          <a:noFill/>
-        </p:spPr>
-        <p:txBody>
-          <a:bodyPr wrap="square" anchor="ctr">
-            <a:spAutoFit/>
-          </a:bodyPr>
-          <a:lstStyle/>
-          <a:p>
-            <a:pPr algn="l">
-              <a:defRPr sz="3600" b="1">
-                <a:solidFill>
-                  <a:srgbClr val="008AD1"/>
-                </a:solidFill>
-                <a:latin typeface="Century Gothic"/>
-              </a:defRPr>
-            </a:pPr>
-            <a:r>
-              <a:t>SLIDE 15: Já usou a expressão Dá um Google?</a:t>
-            </a:r>
-          </a:p>
-        </p:txBody>
-      </p:sp>
-      <p:sp>
-        <p:nvSpPr>
-          <p:cNvPr id="6" name="TextBox 5"/>
+          <p:cNvPr id="5" name="TextBox 4"/>
           <p:cNvSpPr txBox="1"/>
           <p:nvPr/>
         </p:nvSpPr>
@@ -5001,14 +4686,50 @@
       </p:pic>
       <p:sp>
         <p:nvSpPr>
-          <p:cNvPr id="3" name="Rectangle 2"/>
+          <p:cNvPr id="3" name="TextBox 2"/>
+          <p:cNvSpPr txBox="1"/>
+          <p:nvPr/>
+        </p:nvSpPr>
+        <p:spPr>
+          <a:xfrm>
+            <a:off x="457200" y="274320"/>
+            <a:ext cx="6400800" cy="914400"/>
+          </a:xfrm>
+          <a:prstGeom prst="rect">
+            <a:avLst/>
+          </a:prstGeom>
+          <a:noFill/>
+        </p:spPr>
+        <p:txBody>
+          <a:bodyPr wrap="square" anchor="ctr">
+            <a:spAutoFit/>
+          </a:bodyPr>
+          <a:lstStyle/>
+          <a:p>
+            <a:pPr algn="l">
+              <a:defRPr sz="3600" b="1">
+                <a:solidFill>
+                  <a:srgbClr val="008AD1"/>
+                </a:solidFill>
+                <a:latin typeface="Century Gothic"/>
+              </a:defRPr>
+            </a:pPr>
+            <a:r>
+              <a:t>SLIDE 16: Gelvazio Camargo – Presença Digital</a:t>
+            </a:r>
+          </a:p>
+        </p:txBody>
+      </p:sp>
+      <p:sp>
+        <p:nvSpPr>
+          <p:cNvPr id="4" name="Rectangle 3"/>
           <p:cNvSpPr/>
           <p:nvPr/>
         </p:nvSpPr>
         <p:spPr>
           <a:xfrm>
-            <a:off x="457200" y="274320"/>
-            <a:ext cx="6400800" cy="914400"/>
+            <a:off x="457200" y="1371600"/>
+            <a:ext cx="8229600" cy="5212080"/>
           </a:xfrm>
           <a:prstGeom prst="rect">
             <a:avLst/>
@@ -5016,7 +4737,7 @@
           <a:solidFill>
             <a:srgbClr val="FFFFFF"/>
           </a:solidFill>
-          <a:ln w="25400">
+          <a:ln w="12700">
             <a:solidFill>
               <a:srgbClr val="008AD1"/>
             </a:solidFill>
@@ -5046,88 +4767,7 @@
       </p:sp>
       <p:sp>
         <p:nvSpPr>
-          <p:cNvPr id="5" name="Rectangle 4"/>
-          <p:cNvSpPr/>
-          <p:nvPr/>
-        </p:nvSpPr>
-        <p:spPr>
-          <a:xfrm>
-            <a:off x="457200" y="1371600"/>
-            <a:ext cx="8229600" cy="5212080"/>
-          </a:xfrm>
-          <a:prstGeom prst="rect">
-            <a:avLst/>
-          </a:prstGeom>
-          <a:solidFill>
-            <a:srgbClr val="FFFFFF"/>
-          </a:solidFill>
-          <a:ln w="12700">
-            <a:solidFill>
-              <a:srgbClr val="008AD1"/>
-            </a:solidFill>
-          </a:ln>
-        </p:spPr>
-        <p:style>
-          <a:lnRef idx="1">
-            <a:schemeClr val="accent1"/>
-          </a:lnRef>
-          <a:fillRef idx="3">
-            <a:schemeClr val="accent1"/>
-          </a:fillRef>
-          <a:effectRef idx="2">
-            <a:schemeClr val="accent1"/>
-          </a:effectRef>
-          <a:fontRef idx="minor">
-            <a:schemeClr val="lt1"/>
-          </a:fontRef>
-        </p:style>
-        <p:txBody>
-          <a:bodyPr rtlCol="0" anchor="ctr"/>
-          <a:lstStyle/>
-          <a:p>
-            <a:pPr algn="ctr"/>
-          </a:p>
-        </p:txBody>
-      </p:sp>
-      <p:sp>
-        <p:nvSpPr>
-          <p:cNvPr id="4" name="TextBox 3"/>
-          <p:cNvSpPr txBox="1"/>
-          <p:nvPr/>
-        </p:nvSpPr>
-        <p:spPr>
-          <a:xfrm>
-            <a:off x="457200" y="274320"/>
-            <a:ext cx="6400800" cy="914400"/>
-          </a:xfrm>
-          <a:prstGeom prst="rect">
-            <a:avLst/>
-          </a:prstGeom>
-          <a:noFill/>
-        </p:spPr>
-        <p:txBody>
-          <a:bodyPr wrap="square" anchor="ctr">
-            <a:spAutoFit/>
-          </a:bodyPr>
-          <a:lstStyle/>
-          <a:p>
-            <a:pPr algn="l">
-              <a:defRPr sz="3600" b="1">
-                <a:solidFill>
-                  <a:srgbClr val="008AD1"/>
-                </a:solidFill>
-                <a:latin typeface="Century Gothic"/>
-              </a:defRPr>
-            </a:pPr>
-            <a:r>
-              <a:t>SLIDE 16: Gelvazio Camargo – Presença Digital</a:t>
-            </a:r>
-          </a:p>
-        </p:txBody>
-      </p:sp>
-      <p:sp>
-        <p:nvSpPr>
-          <p:cNvPr id="6" name="TextBox 5"/>
+          <p:cNvPr id="5" name="TextBox 4"/>
           <p:cNvSpPr txBox="1"/>
           <p:nvPr/>
         </p:nvSpPr>
@@ -5425,14 +5065,50 @@
       </p:pic>
       <p:sp>
         <p:nvSpPr>
-          <p:cNvPr id="3" name="Rectangle 2"/>
+          <p:cNvPr id="3" name="TextBox 2"/>
+          <p:cNvSpPr txBox="1"/>
+          <p:nvPr/>
+        </p:nvSpPr>
+        <p:spPr>
+          <a:xfrm>
+            <a:off x="457200" y="274320"/>
+            <a:ext cx="6400800" cy="914400"/>
+          </a:xfrm>
+          <a:prstGeom prst="rect">
+            <a:avLst/>
+          </a:prstGeom>
+          <a:noFill/>
+        </p:spPr>
+        <p:txBody>
+          <a:bodyPr wrap="square" anchor="ctr">
+            <a:spAutoFit/>
+          </a:bodyPr>
+          <a:lstStyle/>
+          <a:p>
+            <a:pPr algn="l">
+              <a:defRPr sz="3600" b="1">
+                <a:solidFill>
+                  <a:srgbClr val="008AD1"/>
+                </a:solidFill>
+                <a:latin typeface="Century Gothic"/>
+              </a:defRPr>
+            </a:pPr>
+            <a:r>
+              <a:t>SLIDE 17: Faça uma pesquisa sobre você no chatgpt</a:t>
+            </a:r>
+          </a:p>
+        </p:txBody>
+      </p:sp>
+      <p:sp>
+        <p:nvSpPr>
+          <p:cNvPr id="4" name="Rectangle 3"/>
           <p:cNvSpPr/>
           <p:nvPr/>
         </p:nvSpPr>
         <p:spPr>
           <a:xfrm>
-            <a:off x="457200" y="274320"/>
-            <a:ext cx="6400800" cy="914400"/>
+            <a:off x="457200" y="1371600"/>
+            <a:ext cx="8229600" cy="5212080"/>
           </a:xfrm>
           <a:prstGeom prst="rect">
             <a:avLst/>
@@ -5440,7 +5116,7 @@
           <a:solidFill>
             <a:srgbClr val="FFFFFF"/>
           </a:solidFill>
-          <a:ln w="25400">
+          <a:ln w="12700">
             <a:solidFill>
               <a:srgbClr val="008AD1"/>
             </a:solidFill>
@@ -5470,88 +5146,7 @@
       </p:sp>
       <p:sp>
         <p:nvSpPr>
-          <p:cNvPr id="5" name="Rectangle 4"/>
-          <p:cNvSpPr/>
-          <p:nvPr/>
-        </p:nvSpPr>
-        <p:spPr>
-          <a:xfrm>
-            <a:off x="457200" y="1371600"/>
-            <a:ext cx="8229600" cy="5212080"/>
-          </a:xfrm>
-          <a:prstGeom prst="rect">
-            <a:avLst/>
-          </a:prstGeom>
-          <a:solidFill>
-            <a:srgbClr val="FFFFFF"/>
-          </a:solidFill>
-          <a:ln w="12700">
-            <a:solidFill>
-              <a:srgbClr val="008AD1"/>
-            </a:solidFill>
-          </a:ln>
-        </p:spPr>
-        <p:style>
-          <a:lnRef idx="1">
-            <a:schemeClr val="accent1"/>
-          </a:lnRef>
-          <a:fillRef idx="3">
-            <a:schemeClr val="accent1"/>
-          </a:fillRef>
-          <a:effectRef idx="2">
-            <a:schemeClr val="accent1"/>
-          </a:effectRef>
-          <a:fontRef idx="minor">
-            <a:schemeClr val="lt1"/>
-          </a:fontRef>
-        </p:style>
-        <p:txBody>
-          <a:bodyPr rtlCol="0" anchor="ctr"/>
-          <a:lstStyle/>
-          <a:p>
-            <a:pPr algn="ctr"/>
-          </a:p>
-        </p:txBody>
-      </p:sp>
-      <p:sp>
-        <p:nvSpPr>
-          <p:cNvPr id="4" name="TextBox 3"/>
-          <p:cNvSpPr txBox="1"/>
-          <p:nvPr/>
-        </p:nvSpPr>
-        <p:spPr>
-          <a:xfrm>
-            <a:off x="457200" y="274320"/>
-            <a:ext cx="6400800" cy="914400"/>
-          </a:xfrm>
-          <a:prstGeom prst="rect">
-            <a:avLst/>
-          </a:prstGeom>
-          <a:noFill/>
-        </p:spPr>
-        <p:txBody>
-          <a:bodyPr wrap="square" anchor="ctr">
-            <a:spAutoFit/>
-          </a:bodyPr>
-          <a:lstStyle/>
-          <a:p>
-            <a:pPr algn="l">
-              <a:defRPr sz="3600" b="1">
-                <a:solidFill>
-                  <a:srgbClr val="008AD1"/>
-                </a:solidFill>
-                <a:latin typeface="Century Gothic"/>
-              </a:defRPr>
-            </a:pPr>
-            <a:r>
-              <a:t>SLIDE 17: Faça uma pesquisa sobre você no chatgpt</a:t>
-            </a:r>
-          </a:p>
-        </p:txBody>
-      </p:sp>
-      <p:sp>
-        <p:nvSpPr>
-          <p:cNvPr id="6" name="TextBox 5"/>
+          <p:cNvPr id="5" name="TextBox 4"/>
           <p:cNvSpPr txBox="1"/>
           <p:nvPr/>
         </p:nvSpPr>
@@ -5670,14 +5265,50 @@
       </p:pic>
       <p:sp>
         <p:nvSpPr>
-          <p:cNvPr id="3" name="Rectangle 2"/>
+          <p:cNvPr id="3" name="TextBox 2"/>
+          <p:cNvSpPr txBox="1"/>
+          <p:nvPr/>
+        </p:nvSpPr>
+        <p:spPr>
+          <a:xfrm>
+            <a:off x="457200" y="274320"/>
+            <a:ext cx="6400800" cy="914400"/>
+          </a:xfrm>
+          <a:prstGeom prst="rect">
+            <a:avLst/>
+          </a:prstGeom>
+          <a:noFill/>
+        </p:spPr>
+        <p:txBody>
+          <a:bodyPr wrap="square" anchor="ctr">
+            <a:spAutoFit/>
+          </a:bodyPr>
+          <a:lstStyle/>
+          <a:p>
+            <a:pPr algn="l">
+              <a:defRPr sz="3600" b="1">
+                <a:solidFill>
+                  <a:srgbClr val="008AD1"/>
+                </a:solidFill>
+                <a:latin typeface="Century Gothic"/>
+              </a:defRPr>
+            </a:pPr>
+            <a:r>
+              <a:t>SLIDE 18: Cuidado! Amigo?!</a:t>
+            </a:r>
+          </a:p>
+        </p:txBody>
+      </p:sp>
+      <p:sp>
+        <p:nvSpPr>
+          <p:cNvPr id="4" name="Rectangle 3"/>
           <p:cNvSpPr/>
           <p:nvPr/>
         </p:nvSpPr>
         <p:spPr>
           <a:xfrm>
-            <a:off x="457200" y="274320"/>
-            <a:ext cx="6400800" cy="914400"/>
+            <a:off x="457200" y="1371600"/>
+            <a:ext cx="8229600" cy="5212080"/>
           </a:xfrm>
           <a:prstGeom prst="rect">
             <a:avLst/>
@@ -5685,7 +5316,7 @@
           <a:solidFill>
             <a:srgbClr val="FFFFFF"/>
           </a:solidFill>
-          <a:ln w="25400">
+          <a:ln w="12700">
             <a:solidFill>
               <a:srgbClr val="008AD1"/>
             </a:solidFill>
@@ -5715,88 +5346,7 @@
       </p:sp>
       <p:sp>
         <p:nvSpPr>
-          <p:cNvPr id="5" name="Rectangle 4"/>
-          <p:cNvSpPr/>
-          <p:nvPr/>
-        </p:nvSpPr>
-        <p:spPr>
-          <a:xfrm>
-            <a:off x="457200" y="1371600"/>
-            <a:ext cx="8229600" cy="5212080"/>
-          </a:xfrm>
-          <a:prstGeom prst="rect">
-            <a:avLst/>
-          </a:prstGeom>
-          <a:solidFill>
-            <a:srgbClr val="FFFFFF"/>
-          </a:solidFill>
-          <a:ln w="12700">
-            <a:solidFill>
-              <a:srgbClr val="008AD1"/>
-            </a:solidFill>
-          </a:ln>
-        </p:spPr>
-        <p:style>
-          <a:lnRef idx="1">
-            <a:schemeClr val="accent1"/>
-          </a:lnRef>
-          <a:fillRef idx="3">
-            <a:schemeClr val="accent1"/>
-          </a:fillRef>
-          <a:effectRef idx="2">
-            <a:schemeClr val="accent1"/>
-          </a:effectRef>
-          <a:fontRef idx="minor">
-            <a:schemeClr val="lt1"/>
-          </a:fontRef>
-        </p:style>
-        <p:txBody>
-          <a:bodyPr rtlCol="0" anchor="ctr"/>
-          <a:lstStyle/>
-          <a:p>
-            <a:pPr algn="ctr"/>
-          </a:p>
-        </p:txBody>
-      </p:sp>
-      <p:sp>
-        <p:nvSpPr>
-          <p:cNvPr id="4" name="TextBox 3"/>
-          <p:cNvSpPr txBox="1"/>
-          <p:nvPr/>
-        </p:nvSpPr>
-        <p:spPr>
-          <a:xfrm>
-            <a:off x="457200" y="274320"/>
-            <a:ext cx="6400800" cy="914400"/>
-          </a:xfrm>
-          <a:prstGeom prst="rect">
-            <a:avLst/>
-          </a:prstGeom>
-          <a:noFill/>
-        </p:spPr>
-        <p:txBody>
-          <a:bodyPr wrap="square" anchor="ctr">
-            <a:spAutoFit/>
-          </a:bodyPr>
-          <a:lstStyle/>
-          <a:p>
-            <a:pPr algn="l">
-              <a:defRPr sz="3600" b="1">
-                <a:solidFill>
-                  <a:srgbClr val="008AD1"/>
-                </a:solidFill>
-                <a:latin typeface="Century Gothic"/>
-              </a:defRPr>
-            </a:pPr>
-            <a:r>
-              <a:t>SLIDE 18: Cuidado! Amigo?!</a:t>
-            </a:r>
-          </a:p>
-        </p:txBody>
-      </p:sp>
-      <p:sp>
-        <p:nvSpPr>
-          <p:cNvPr id="6" name="TextBox 5"/>
+          <p:cNvPr id="5" name="TextBox 4"/>
           <p:cNvSpPr txBox="1"/>
           <p:nvPr/>
         </p:nvSpPr>
@@ -5880,14 +5430,50 @@
       </p:pic>
       <p:sp>
         <p:nvSpPr>
-          <p:cNvPr id="3" name="Rectangle 2"/>
+          <p:cNvPr id="3" name="TextBox 2"/>
+          <p:cNvSpPr txBox="1"/>
+          <p:nvPr/>
+        </p:nvSpPr>
+        <p:spPr>
+          <a:xfrm>
+            <a:off x="457200" y="274320"/>
+            <a:ext cx="6400800" cy="914400"/>
+          </a:xfrm>
+          <a:prstGeom prst="rect">
+            <a:avLst/>
+          </a:prstGeom>
+          <a:noFill/>
+        </p:spPr>
+        <p:txBody>
+          <a:bodyPr wrap="square" anchor="ctr">
+            <a:spAutoFit/>
+          </a:bodyPr>
+          <a:lstStyle/>
+          <a:p>
+            <a:pPr algn="l">
+              <a:defRPr sz="3600" b="1">
+                <a:solidFill>
+                  <a:srgbClr val="008AD1"/>
+                </a:solidFill>
+                <a:latin typeface="Century Gothic"/>
+              </a:defRPr>
+            </a:pPr>
+            <a:r>
+              <a:t>SLIDE 01: Formando</a:t>
+            </a:r>
+          </a:p>
+        </p:txBody>
+      </p:sp>
+      <p:sp>
+        <p:nvSpPr>
+          <p:cNvPr id="4" name="Rectangle 3"/>
           <p:cNvSpPr/>
           <p:nvPr/>
         </p:nvSpPr>
         <p:spPr>
           <a:xfrm>
-            <a:off x="457200" y="274320"/>
-            <a:ext cx="6400800" cy="914400"/>
+            <a:off x="457200" y="1371600"/>
+            <a:ext cx="8229600" cy="5212080"/>
           </a:xfrm>
           <a:prstGeom prst="rect">
             <a:avLst/>
@@ -5895,7 +5481,7 @@
           <a:solidFill>
             <a:srgbClr val="FFFFFF"/>
           </a:solidFill>
-          <a:ln w="25400">
+          <a:ln w="12700">
             <a:solidFill>
               <a:srgbClr val="008AD1"/>
             </a:solidFill>
@@ -5925,88 +5511,7 @@
       </p:sp>
       <p:sp>
         <p:nvSpPr>
-          <p:cNvPr id="5" name="Rectangle 4"/>
-          <p:cNvSpPr/>
-          <p:nvPr/>
-        </p:nvSpPr>
-        <p:spPr>
-          <a:xfrm>
-            <a:off x="457200" y="1371600"/>
-            <a:ext cx="8229600" cy="5212080"/>
-          </a:xfrm>
-          <a:prstGeom prst="rect">
-            <a:avLst/>
-          </a:prstGeom>
-          <a:solidFill>
-            <a:srgbClr val="FFFFFF"/>
-          </a:solidFill>
-          <a:ln w="12700">
-            <a:solidFill>
-              <a:srgbClr val="008AD1"/>
-            </a:solidFill>
-          </a:ln>
-        </p:spPr>
-        <p:style>
-          <a:lnRef idx="1">
-            <a:schemeClr val="accent1"/>
-          </a:lnRef>
-          <a:fillRef idx="3">
-            <a:schemeClr val="accent1"/>
-          </a:fillRef>
-          <a:effectRef idx="2">
-            <a:schemeClr val="accent1"/>
-          </a:effectRef>
-          <a:fontRef idx="minor">
-            <a:schemeClr val="lt1"/>
-          </a:fontRef>
-        </p:style>
-        <p:txBody>
-          <a:bodyPr rtlCol="0" anchor="ctr"/>
-          <a:lstStyle/>
-          <a:p>
-            <a:pPr algn="ctr"/>
-          </a:p>
-        </p:txBody>
-      </p:sp>
-      <p:sp>
-        <p:nvSpPr>
-          <p:cNvPr id="4" name="TextBox 3"/>
-          <p:cNvSpPr txBox="1"/>
-          <p:nvPr/>
-        </p:nvSpPr>
-        <p:spPr>
-          <a:xfrm>
-            <a:off x="457200" y="274320"/>
-            <a:ext cx="6400800" cy="914400"/>
-          </a:xfrm>
-          <a:prstGeom prst="rect">
-            <a:avLst/>
-          </a:prstGeom>
-          <a:noFill/>
-        </p:spPr>
-        <p:txBody>
-          <a:bodyPr wrap="square" anchor="ctr">
-            <a:spAutoFit/>
-          </a:bodyPr>
-          <a:lstStyle/>
-          <a:p>
-            <a:pPr algn="l">
-              <a:defRPr sz="3600" b="1">
-                <a:solidFill>
-                  <a:srgbClr val="008AD1"/>
-                </a:solidFill>
-                <a:latin typeface="Century Gothic"/>
-              </a:defRPr>
-            </a:pPr>
-            <a:r>
-              <a:t>SLIDE 01: Formando</a:t>
-            </a:r>
-          </a:p>
-        </p:txBody>
-      </p:sp>
-      <p:sp>
-        <p:nvSpPr>
-          <p:cNvPr id="6" name="TextBox 5"/>
+          <p:cNvPr id="5" name="TextBox 4"/>
           <p:cNvSpPr txBox="1"/>
           <p:nvPr/>
         </p:nvSpPr>
@@ -6144,14 +5649,50 @@
       </p:pic>
       <p:sp>
         <p:nvSpPr>
-          <p:cNvPr id="3" name="Rectangle 2"/>
+          <p:cNvPr id="3" name="TextBox 2"/>
+          <p:cNvSpPr txBox="1"/>
+          <p:nvPr/>
+        </p:nvSpPr>
+        <p:spPr>
+          <a:xfrm>
+            <a:off x="457200" y="274320"/>
+            <a:ext cx="6400800" cy="914400"/>
+          </a:xfrm>
+          <a:prstGeom prst="rect">
+            <a:avLst/>
+          </a:prstGeom>
+          <a:noFill/>
+        </p:spPr>
+        <p:txBody>
+          <a:bodyPr wrap="square" anchor="ctr">
+            <a:spAutoFit/>
+          </a:bodyPr>
+          <a:lstStyle/>
+          <a:p>
+            <a:pPr algn="l">
+              <a:defRPr sz="3600" b="1">
+                <a:solidFill>
+                  <a:srgbClr val="008AD1"/>
+                </a:solidFill>
+                <a:latin typeface="Century Gothic"/>
+              </a:defRPr>
+            </a:pPr>
+            <a:r>
+              <a:t>SLIDE 19: ---</a:t>
+            </a:r>
+          </a:p>
+        </p:txBody>
+      </p:sp>
+      <p:sp>
+        <p:nvSpPr>
+          <p:cNvPr id="4" name="Rectangle 3"/>
           <p:cNvSpPr/>
           <p:nvPr/>
         </p:nvSpPr>
         <p:spPr>
           <a:xfrm>
-            <a:off x="457200" y="274320"/>
-            <a:ext cx="6400800" cy="914400"/>
+            <a:off x="457200" y="1371600"/>
+            <a:ext cx="8229600" cy="5212080"/>
           </a:xfrm>
           <a:prstGeom prst="rect">
             <a:avLst/>
@@ -6159,7 +5700,7 @@
           <a:solidFill>
             <a:srgbClr val="FFFFFF"/>
           </a:solidFill>
-          <a:ln w="25400">
+          <a:ln w="12700">
             <a:solidFill>
               <a:srgbClr val="008AD1"/>
             </a:solidFill>
@@ -6189,88 +5730,7 @@
       </p:sp>
       <p:sp>
         <p:nvSpPr>
-          <p:cNvPr id="5" name="Rectangle 4"/>
-          <p:cNvSpPr/>
-          <p:nvPr/>
-        </p:nvSpPr>
-        <p:spPr>
-          <a:xfrm>
-            <a:off x="457200" y="1371600"/>
-            <a:ext cx="8229600" cy="5212080"/>
-          </a:xfrm>
-          <a:prstGeom prst="rect">
-            <a:avLst/>
-          </a:prstGeom>
-          <a:solidFill>
-            <a:srgbClr val="FFFFFF"/>
-          </a:solidFill>
-          <a:ln w="12700">
-            <a:solidFill>
-              <a:srgbClr val="008AD1"/>
-            </a:solidFill>
-          </a:ln>
-        </p:spPr>
-        <p:style>
-          <a:lnRef idx="1">
-            <a:schemeClr val="accent1"/>
-          </a:lnRef>
-          <a:fillRef idx="3">
-            <a:schemeClr val="accent1"/>
-          </a:fillRef>
-          <a:effectRef idx="2">
-            <a:schemeClr val="accent1"/>
-          </a:effectRef>
-          <a:fontRef idx="minor">
-            <a:schemeClr val="lt1"/>
-          </a:fontRef>
-        </p:style>
-        <p:txBody>
-          <a:bodyPr rtlCol="0" anchor="ctr"/>
-          <a:lstStyle/>
-          <a:p>
-            <a:pPr algn="ctr"/>
-          </a:p>
-        </p:txBody>
-      </p:sp>
-      <p:sp>
-        <p:nvSpPr>
-          <p:cNvPr id="4" name="TextBox 3"/>
-          <p:cNvSpPr txBox="1"/>
-          <p:nvPr/>
-        </p:nvSpPr>
-        <p:spPr>
-          <a:xfrm>
-            <a:off x="457200" y="274320"/>
-            <a:ext cx="6400800" cy="914400"/>
-          </a:xfrm>
-          <a:prstGeom prst="rect">
-            <a:avLst/>
-          </a:prstGeom>
-          <a:noFill/>
-        </p:spPr>
-        <p:txBody>
-          <a:bodyPr wrap="square" anchor="ctr">
-            <a:spAutoFit/>
-          </a:bodyPr>
-          <a:lstStyle/>
-          <a:p>
-            <a:pPr algn="l">
-              <a:defRPr sz="3600" b="1">
-                <a:solidFill>
-                  <a:srgbClr val="008AD1"/>
-                </a:solidFill>
-                <a:latin typeface="Century Gothic"/>
-              </a:defRPr>
-            </a:pPr>
-            <a:r>
-              <a:t>SLIDE 19: ---</a:t>
-            </a:r>
-          </a:p>
-        </p:txBody>
-      </p:sp>
-      <p:sp>
-        <p:nvSpPr>
-          <p:cNvPr id="6" name="TextBox 5"/>
+          <p:cNvPr id="5" name="TextBox 4"/>
           <p:cNvSpPr txBox="1"/>
           <p:nvPr/>
         </p:nvSpPr>
@@ -6336,14 +5796,50 @@
       </p:pic>
       <p:sp>
         <p:nvSpPr>
-          <p:cNvPr id="3" name="Rectangle 2"/>
+          <p:cNvPr id="3" name="TextBox 2"/>
+          <p:cNvSpPr txBox="1"/>
+          <p:nvPr/>
+        </p:nvSpPr>
+        <p:spPr>
+          <a:xfrm>
+            <a:off x="457200" y="274320"/>
+            <a:ext cx="6400800" cy="914400"/>
+          </a:xfrm>
+          <a:prstGeom prst="rect">
+            <a:avLst/>
+          </a:prstGeom>
+          <a:noFill/>
+        </p:spPr>
+        <p:txBody>
+          <a:bodyPr wrap="square" anchor="ctr">
+            <a:spAutoFit/>
+          </a:bodyPr>
+          <a:lstStyle/>
+          <a:p>
+            <a:pPr algn="l">
+              <a:defRPr sz="3600" b="1">
+                <a:solidFill>
+                  <a:srgbClr val="008AD1"/>
+                </a:solidFill>
+                <a:latin typeface="Century Gothic"/>
+              </a:defRPr>
+            </a:pPr>
+            <a:r>
+              <a:t>SLIDE 20: ---</a:t>
+            </a:r>
+          </a:p>
+        </p:txBody>
+      </p:sp>
+      <p:sp>
+        <p:nvSpPr>
+          <p:cNvPr id="4" name="Rectangle 3"/>
           <p:cNvSpPr/>
           <p:nvPr/>
         </p:nvSpPr>
         <p:spPr>
           <a:xfrm>
-            <a:off x="457200" y="274320"/>
-            <a:ext cx="6400800" cy="914400"/>
+            <a:off x="457200" y="1371600"/>
+            <a:ext cx="8229600" cy="5212080"/>
           </a:xfrm>
           <a:prstGeom prst="rect">
             <a:avLst/>
@@ -6351,7 +5847,7 @@
           <a:solidFill>
             <a:srgbClr val="FFFFFF"/>
           </a:solidFill>
-          <a:ln w="25400">
+          <a:ln w="12700">
             <a:solidFill>
               <a:srgbClr val="008AD1"/>
             </a:solidFill>
@@ -6381,88 +5877,7 @@
       </p:sp>
       <p:sp>
         <p:nvSpPr>
-          <p:cNvPr id="5" name="Rectangle 4"/>
-          <p:cNvSpPr/>
-          <p:nvPr/>
-        </p:nvSpPr>
-        <p:spPr>
-          <a:xfrm>
-            <a:off x="457200" y="1371600"/>
-            <a:ext cx="8229600" cy="5212080"/>
-          </a:xfrm>
-          <a:prstGeom prst="rect">
-            <a:avLst/>
-          </a:prstGeom>
-          <a:solidFill>
-            <a:srgbClr val="FFFFFF"/>
-          </a:solidFill>
-          <a:ln w="12700">
-            <a:solidFill>
-              <a:srgbClr val="008AD1"/>
-            </a:solidFill>
-          </a:ln>
-        </p:spPr>
-        <p:style>
-          <a:lnRef idx="1">
-            <a:schemeClr val="accent1"/>
-          </a:lnRef>
-          <a:fillRef idx="3">
-            <a:schemeClr val="accent1"/>
-          </a:fillRef>
-          <a:effectRef idx="2">
-            <a:schemeClr val="accent1"/>
-          </a:effectRef>
-          <a:fontRef idx="minor">
-            <a:schemeClr val="lt1"/>
-          </a:fontRef>
-        </p:style>
-        <p:txBody>
-          <a:bodyPr rtlCol="0" anchor="ctr"/>
-          <a:lstStyle/>
-          <a:p>
-            <a:pPr algn="ctr"/>
-          </a:p>
-        </p:txBody>
-      </p:sp>
-      <p:sp>
-        <p:nvSpPr>
-          <p:cNvPr id="4" name="TextBox 3"/>
-          <p:cNvSpPr txBox="1"/>
-          <p:nvPr/>
-        </p:nvSpPr>
-        <p:spPr>
-          <a:xfrm>
-            <a:off x="457200" y="274320"/>
-            <a:ext cx="6400800" cy="914400"/>
-          </a:xfrm>
-          <a:prstGeom prst="rect">
-            <a:avLst/>
-          </a:prstGeom>
-          <a:noFill/>
-        </p:spPr>
-        <p:txBody>
-          <a:bodyPr wrap="square" anchor="ctr">
-            <a:spAutoFit/>
-          </a:bodyPr>
-          <a:lstStyle/>
-          <a:p>
-            <a:pPr algn="l">
-              <a:defRPr sz="3600" b="1">
-                <a:solidFill>
-                  <a:srgbClr val="008AD1"/>
-                </a:solidFill>
-                <a:latin typeface="Century Gothic"/>
-              </a:defRPr>
-            </a:pPr>
-            <a:r>
-              <a:t>SLIDE 20: ---</a:t>
-            </a:r>
-          </a:p>
-        </p:txBody>
-      </p:sp>
-      <p:sp>
-        <p:nvSpPr>
-          <p:cNvPr id="6" name="TextBox 5"/>
+          <p:cNvPr id="5" name="TextBox 4"/>
           <p:cNvSpPr txBox="1"/>
           <p:nvPr/>
         </p:nvSpPr>
@@ -6528,14 +5943,50 @@
       </p:pic>
       <p:sp>
         <p:nvSpPr>
-          <p:cNvPr id="3" name="Rectangle 2"/>
+          <p:cNvPr id="3" name="TextBox 2"/>
+          <p:cNvSpPr txBox="1"/>
+          <p:nvPr/>
+        </p:nvSpPr>
+        <p:spPr>
+          <a:xfrm>
+            <a:off x="457200" y="274320"/>
+            <a:ext cx="6400800" cy="914400"/>
+          </a:xfrm>
+          <a:prstGeom prst="rect">
+            <a:avLst/>
+          </a:prstGeom>
+          <a:noFill/>
+        </p:spPr>
+        <p:txBody>
+          <a:bodyPr wrap="square" anchor="ctr">
+            <a:spAutoFit/>
+          </a:bodyPr>
+          <a:lstStyle/>
+          <a:p>
+            <a:pPr algn="l">
+              <a:defRPr sz="3600" b="1">
+                <a:solidFill>
+                  <a:srgbClr val="008AD1"/>
+                </a:solidFill>
+                <a:latin typeface="Century Gothic"/>
+              </a:defRPr>
+            </a:pPr>
+            <a:r>
+              <a:t>SLIDE 21: Como ChatGPT funciona?</a:t>
+            </a:r>
+          </a:p>
+        </p:txBody>
+      </p:sp>
+      <p:sp>
+        <p:nvSpPr>
+          <p:cNvPr id="4" name="Rectangle 3"/>
           <p:cNvSpPr/>
           <p:nvPr/>
         </p:nvSpPr>
         <p:spPr>
           <a:xfrm>
-            <a:off x="457200" y="274320"/>
-            <a:ext cx="6400800" cy="914400"/>
+            <a:off x="457200" y="1371600"/>
+            <a:ext cx="8229600" cy="5212080"/>
           </a:xfrm>
           <a:prstGeom prst="rect">
             <a:avLst/>
@@ -6543,7 +5994,7 @@
           <a:solidFill>
             <a:srgbClr val="FFFFFF"/>
           </a:solidFill>
-          <a:ln w="25400">
+          <a:ln w="12700">
             <a:solidFill>
               <a:srgbClr val="008AD1"/>
             </a:solidFill>
@@ -6573,88 +6024,7 @@
       </p:sp>
       <p:sp>
         <p:nvSpPr>
-          <p:cNvPr id="5" name="Rectangle 4"/>
-          <p:cNvSpPr/>
-          <p:nvPr/>
-        </p:nvSpPr>
-        <p:spPr>
-          <a:xfrm>
-            <a:off x="457200" y="1371600"/>
-            <a:ext cx="8229600" cy="5212080"/>
-          </a:xfrm>
-          <a:prstGeom prst="rect">
-            <a:avLst/>
-          </a:prstGeom>
-          <a:solidFill>
-            <a:srgbClr val="FFFFFF"/>
-          </a:solidFill>
-          <a:ln w="12700">
-            <a:solidFill>
-              <a:srgbClr val="008AD1"/>
-            </a:solidFill>
-          </a:ln>
-        </p:spPr>
-        <p:style>
-          <a:lnRef idx="1">
-            <a:schemeClr val="accent1"/>
-          </a:lnRef>
-          <a:fillRef idx="3">
-            <a:schemeClr val="accent1"/>
-          </a:fillRef>
-          <a:effectRef idx="2">
-            <a:schemeClr val="accent1"/>
-          </a:effectRef>
-          <a:fontRef idx="minor">
-            <a:schemeClr val="lt1"/>
-          </a:fontRef>
-        </p:style>
-        <p:txBody>
-          <a:bodyPr rtlCol="0" anchor="ctr"/>
-          <a:lstStyle/>
-          <a:p>
-            <a:pPr algn="ctr"/>
-          </a:p>
-        </p:txBody>
-      </p:sp>
-      <p:sp>
-        <p:nvSpPr>
-          <p:cNvPr id="4" name="TextBox 3"/>
-          <p:cNvSpPr txBox="1"/>
-          <p:nvPr/>
-        </p:nvSpPr>
-        <p:spPr>
-          <a:xfrm>
-            <a:off x="457200" y="274320"/>
-            <a:ext cx="6400800" cy="914400"/>
-          </a:xfrm>
-          <a:prstGeom prst="rect">
-            <a:avLst/>
-          </a:prstGeom>
-          <a:noFill/>
-        </p:spPr>
-        <p:txBody>
-          <a:bodyPr wrap="square" anchor="ctr">
-            <a:spAutoFit/>
-          </a:bodyPr>
-          <a:lstStyle/>
-          <a:p>
-            <a:pPr algn="l">
-              <a:defRPr sz="3600" b="1">
-                <a:solidFill>
-                  <a:srgbClr val="008AD1"/>
-                </a:solidFill>
-                <a:latin typeface="Century Gothic"/>
-              </a:defRPr>
-            </a:pPr>
-            <a:r>
-              <a:t>SLIDE 21: Como ChatGPT funciona?</a:t>
-            </a:r>
-          </a:p>
-        </p:txBody>
-      </p:sp>
-      <p:sp>
-        <p:nvSpPr>
-          <p:cNvPr id="6" name="TextBox 5"/>
+          <p:cNvPr id="5" name="TextBox 4"/>
           <p:cNvSpPr txBox="1"/>
           <p:nvPr/>
         </p:nvSpPr>
@@ -6830,14 +6200,50 @@
       </p:pic>
       <p:sp>
         <p:nvSpPr>
-          <p:cNvPr id="3" name="Rectangle 2"/>
+          <p:cNvPr id="3" name="TextBox 2"/>
+          <p:cNvSpPr txBox="1"/>
+          <p:nvPr/>
+        </p:nvSpPr>
+        <p:spPr>
+          <a:xfrm>
+            <a:off x="457200" y="274320"/>
+            <a:ext cx="6400800" cy="914400"/>
+          </a:xfrm>
+          <a:prstGeom prst="rect">
+            <a:avLst/>
+          </a:prstGeom>
+          <a:noFill/>
+        </p:spPr>
+        <p:txBody>
+          <a:bodyPr wrap="square" anchor="ctr">
+            <a:spAutoFit/>
+          </a:bodyPr>
+          <a:lstStyle/>
+          <a:p>
+            <a:pPr algn="l">
+              <a:defRPr sz="3600" b="1">
+                <a:solidFill>
+                  <a:srgbClr val="008AD1"/>
+                </a:solidFill>
+                <a:latin typeface="Century Gothic"/>
+              </a:defRPr>
+            </a:pPr>
+            <a:r>
+              <a:t>SLIDE 22: ---</a:t>
+            </a:r>
+          </a:p>
+        </p:txBody>
+      </p:sp>
+      <p:sp>
+        <p:nvSpPr>
+          <p:cNvPr id="4" name="Rectangle 3"/>
           <p:cNvSpPr/>
           <p:nvPr/>
         </p:nvSpPr>
         <p:spPr>
           <a:xfrm>
-            <a:off x="457200" y="274320"/>
-            <a:ext cx="6400800" cy="914400"/>
+            <a:off x="457200" y="1371600"/>
+            <a:ext cx="8229600" cy="5212080"/>
           </a:xfrm>
           <a:prstGeom prst="rect">
             <a:avLst/>
@@ -6845,7 +6251,7 @@
           <a:solidFill>
             <a:srgbClr val="FFFFFF"/>
           </a:solidFill>
-          <a:ln w="25400">
+          <a:ln w="12700">
             <a:solidFill>
               <a:srgbClr val="008AD1"/>
             </a:solidFill>
@@ -6875,88 +6281,7 @@
       </p:sp>
       <p:sp>
         <p:nvSpPr>
-          <p:cNvPr id="5" name="Rectangle 4"/>
-          <p:cNvSpPr/>
-          <p:nvPr/>
-        </p:nvSpPr>
-        <p:spPr>
-          <a:xfrm>
-            <a:off x="457200" y="1371600"/>
-            <a:ext cx="8229600" cy="5212080"/>
-          </a:xfrm>
-          <a:prstGeom prst="rect">
-            <a:avLst/>
-          </a:prstGeom>
-          <a:solidFill>
-            <a:srgbClr val="FFFFFF"/>
-          </a:solidFill>
-          <a:ln w="12700">
-            <a:solidFill>
-              <a:srgbClr val="008AD1"/>
-            </a:solidFill>
-          </a:ln>
-        </p:spPr>
-        <p:style>
-          <a:lnRef idx="1">
-            <a:schemeClr val="accent1"/>
-          </a:lnRef>
-          <a:fillRef idx="3">
-            <a:schemeClr val="accent1"/>
-          </a:fillRef>
-          <a:effectRef idx="2">
-            <a:schemeClr val="accent1"/>
-          </a:effectRef>
-          <a:fontRef idx="minor">
-            <a:schemeClr val="lt1"/>
-          </a:fontRef>
-        </p:style>
-        <p:txBody>
-          <a:bodyPr rtlCol="0" anchor="ctr"/>
-          <a:lstStyle/>
-          <a:p>
-            <a:pPr algn="ctr"/>
-          </a:p>
-        </p:txBody>
-      </p:sp>
-      <p:sp>
-        <p:nvSpPr>
-          <p:cNvPr id="4" name="TextBox 3"/>
-          <p:cNvSpPr txBox="1"/>
-          <p:nvPr/>
-        </p:nvSpPr>
-        <p:spPr>
-          <a:xfrm>
-            <a:off x="457200" y="274320"/>
-            <a:ext cx="6400800" cy="914400"/>
-          </a:xfrm>
-          <a:prstGeom prst="rect">
-            <a:avLst/>
-          </a:prstGeom>
-          <a:noFill/>
-        </p:spPr>
-        <p:txBody>
-          <a:bodyPr wrap="square" anchor="ctr">
-            <a:spAutoFit/>
-          </a:bodyPr>
-          <a:lstStyle/>
-          <a:p>
-            <a:pPr algn="l">
-              <a:defRPr sz="3600" b="1">
-                <a:solidFill>
-                  <a:srgbClr val="008AD1"/>
-                </a:solidFill>
-                <a:latin typeface="Century Gothic"/>
-              </a:defRPr>
-            </a:pPr>
-            <a:r>
-              <a:t>SLIDE 22: ---</a:t>
-            </a:r>
-          </a:p>
-        </p:txBody>
-      </p:sp>
-      <p:sp>
-        <p:nvSpPr>
-          <p:cNvPr id="6" name="TextBox 5"/>
+          <p:cNvPr id="5" name="TextBox 4"/>
           <p:cNvSpPr txBox="1"/>
           <p:nvPr/>
         </p:nvSpPr>
@@ -7022,14 +6347,50 @@
       </p:pic>
       <p:sp>
         <p:nvSpPr>
-          <p:cNvPr id="3" name="Rectangle 2"/>
+          <p:cNvPr id="3" name="TextBox 2"/>
+          <p:cNvSpPr txBox="1"/>
+          <p:nvPr/>
+        </p:nvSpPr>
+        <p:spPr>
+          <a:xfrm>
+            <a:off x="457200" y="274320"/>
+            <a:ext cx="6400800" cy="914400"/>
+          </a:xfrm>
+          <a:prstGeom prst="rect">
+            <a:avLst/>
+          </a:prstGeom>
+          <a:noFill/>
+        </p:spPr>
+        <p:txBody>
+          <a:bodyPr wrap="square" anchor="ctr">
+            <a:spAutoFit/>
+          </a:bodyPr>
+          <a:lstStyle/>
+          <a:p>
+            <a:pPr algn="l">
+              <a:defRPr sz="3600" b="1">
+                <a:solidFill>
+                  <a:srgbClr val="008AD1"/>
+                </a:solidFill>
+                <a:latin typeface="Century Gothic"/>
+              </a:defRPr>
+            </a:pPr>
+            <a:r>
+              <a:t>SLIDE 23: Personalização</a:t>
+            </a:r>
+          </a:p>
+        </p:txBody>
+      </p:sp>
+      <p:sp>
+        <p:nvSpPr>
+          <p:cNvPr id="4" name="Rectangle 3"/>
           <p:cNvSpPr/>
           <p:nvPr/>
         </p:nvSpPr>
         <p:spPr>
           <a:xfrm>
-            <a:off x="457200" y="274320"/>
-            <a:ext cx="6400800" cy="914400"/>
+            <a:off x="457200" y="1371600"/>
+            <a:ext cx="8229600" cy="5212080"/>
           </a:xfrm>
           <a:prstGeom prst="rect">
             <a:avLst/>
@@ -7037,7 +6398,7 @@
           <a:solidFill>
             <a:srgbClr val="FFFFFF"/>
           </a:solidFill>
-          <a:ln w="25400">
+          <a:ln w="12700">
             <a:solidFill>
               <a:srgbClr val="008AD1"/>
             </a:solidFill>
@@ -7067,88 +6428,7 @@
       </p:sp>
       <p:sp>
         <p:nvSpPr>
-          <p:cNvPr id="5" name="Rectangle 4"/>
-          <p:cNvSpPr/>
-          <p:nvPr/>
-        </p:nvSpPr>
-        <p:spPr>
-          <a:xfrm>
-            <a:off x="457200" y="1371600"/>
-            <a:ext cx="8229600" cy="5212080"/>
-          </a:xfrm>
-          <a:prstGeom prst="rect">
-            <a:avLst/>
-          </a:prstGeom>
-          <a:solidFill>
-            <a:srgbClr val="FFFFFF"/>
-          </a:solidFill>
-          <a:ln w="12700">
-            <a:solidFill>
-              <a:srgbClr val="008AD1"/>
-            </a:solidFill>
-          </a:ln>
-        </p:spPr>
-        <p:style>
-          <a:lnRef idx="1">
-            <a:schemeClr val="accent1"/>
-          </a:lnRef>
-          <a:fillRef idx="3">
-            <a:schemeClr val="accent1"/>
-          </a:fillRef>
-          <a:effectRef idx="2">
-            <a:schemeClr val="accent1"/>
-          </a:effectRef>
-          <a:fontRef idx="minor">
-            <a:schemeClr val="lt1"/>
-          </a:fontRef>
-        </p:style>
-        <p:txBody>
-          <a:bodyPr rtlCol="0" anchor="ctr"/>
-          <a:lstStyle/>
-          <a:p>
-            <a:pPr algn="ctr"/>
-          </a:p>
-        </p:txBody>
-      </p:sp>
-      <p:sp>
-        <p:nvSpPr>
-          <p:cNvPr id="4" name="TextBox 3"/>
-          <p:cNvSpPr txBox="1"/>
-          <p:nvPr/>
-        </p:nvSpPr>
-        <p:spPr>
-          <a:xfrm>
-            <a:off x="457200" y="274320"/>
-            <a:ext cx="6400800" cy="914400"/>
-          </a:xfrm>
-          <a:prstGeom prst="rect">
-            <a:avLst/>
-          </a:prstGeom>
-          <a:noFill/>
-        </p:spPr>
-        <p:txBody>
-          <a:bodyPr wrap="square" anchor="ctr">
-            <a:spAutoFit/>
-          </a:bodyPr>
-          <a:lstStyle/>
-          <a:p>
-            <a:pPr algn="l">
-              <a:defRPr sz="3600" b="1">
-                <a:solidFill>
-                  <a:srgbClr val="008AD1"/>
-                </a:solidFill>
-                <a:latin typeface="Century Gothic"/>
-              </a:defRPr>
-            </a:pPr>
-            <a:r>
-              <a:t>SLIDE 23: Personalização</a:t>
-            </a:r>
-          </a:p>
-        </p:txBody>
-      </p:sp>
-      <p:sp>
-        <p:nvSpPr>
-          <p:cNvPr id="6" name="TextBox 5"/>
+          <p:cNvPr id="5" name="TextBox 4"/>
           <p:cNvSpPr txBox="1"/>
           <p:nvPr/>
         </p:nvSpPr>
@@ -7232,14 +6512,50 @@
       </p:pic>
       <p:sp>
         <p:nvSpPr>
-          <p:cNvPr id="3" name="Rectangle 2"/>
+          <p:cNvPr id="3" name="TextBox 2"/>
+          <p:cNvSpPr txBox="1"/>
+          <p:nvPr/>
+        </p:nvSpPr>
+        <p:spPr>
+          <a:xfrm>
+            <a:off x="457200" y="274320"/>
+            <a:ext cx="6400800" cy="914400"/>
+          </a:xfrm>
+          <a:prstGeom prst="rect">
+            <a:avLst/>
+          </a:prstGeom>
+          <a:noFill/>
+        </p:spPr>
+        <p:txBody>
+          <a:bodyPr wrap="square" anchor="ctr">
+            <a:spAutoFit/>
+          </a:bodyPr>
+          <a:lstStyle/>
+          <a:p>
+            <a:pPr algn="l">
+              <a:defRPr sz="3600" b="1">
+                <a:solidFill>
+                  <a:srgbClr val="008AD1"/>
+                </a:solidFill>
+                <a:latin typeface="Century Gothic"/>
+              </a:defRPr>
+            </a:pPr>
+            <a:r>
+              <a:t>SLIDE 24: Construção de um Bom Prompt</a:t>
+            </a:r>
+          </a:p>
+        </p:txBody>
+      </p:sp>
+      <p:sp>
+        <p:nvSpPr>
+          <p:cNvPr id="4" name="Rectangle 3"/>
           <p:cNvSpPr/>
           <p:nvPr/>
         </p:nvSpPr>
         <p:spPr>
           <a:xfrm>
-            <a:off x="457200" y="274320"/>
-            <a:ext cx="6400800" cy="914400"/>
+            <a:off x="457200" y="1371600"/>
+            <a:ext cx="8229600" cy="5212080"/>
           </a:xfrm>
           <a:prstGeom prst="rect">
             <a:avLst/>
@@ -7247,7 +6563,7 @@
           <a:solidFill>
             <a:srgbClr val="FFFFFF"/>
           </a:solidFill>
-          <a:ln w="25400">
+          <a:ln w="12700">
             <a:solidFill>
               <a:srgbClr val="008AD1"/>
             </a:solidFill>
@@ -7277,88 +6593,7 @@
       </p:sp>
       <p:sp>
         <p:nvSpPr>
-          <p:cNvPr id="5" name="Rectangle 4"/>
-          <p:cNvSpPr/>
-          <p:nvPr/>
-        </p:nvSpPr>
-        <p:spPr>
-          <a:xfrm>
-            <a:off x="457200" y="1371600"/>
-            <a:ext cx="8229600" cy="5212080"/>
-          </a:xfrm>
-          <a:prstGeom prst="rect">
-            <a:avLst/>
-          </a:prstGeom>
-          <a:solidFill>
-            <a:srgbClr val="FFFFFF"/>
-          </a:solidFill>
-          <a:ln w="12700">
-            <a:solidFill>
-              <a:srgbClr val="008AD1"/>
-            </a:solidFill>
-          </a:ln>
-        </p:spPr>
-        <p:style>
-          <a:lnRef idx="1">
-            <a:schemeClr val="accent1"/>
-          </a:lnRef>
-          <a:fillRef idx="3">
-            <a:schemeClr val="accent1"/>
-          </a:fillRef>
-          <a:effectRef idx="2">
-            <a:schemeClr val="accent1"/>
-          </a:effectRef>
-          <a:fontRef idx="minor">
-            <a:schemeClr val="lt1"/>
-          </a:fontRef>
-        </p:style>
-        <p:txBody>
-          <a:bodyPr rtlCol="0" anchor="ctr"/>
-          <a:lstStyle/>
-          <a:p>
-            <a:pPr algn="ctr"/>
-          </a:p>
-        </p:txBody>
-      </p:sp>
-      <p:sp>
-        <p:nvSpPr>
-          <p:cNvPr id="4" name="TextBox 3"/>
-          <p:cNvSpPr txBox="1"/>
-          <p:nvPr/>
-        </p:nvSpPr>
-        <p:spPr>
-          <a:xfrm>
-            <a:off x="457200" y="274320"/>
-            <a:ext cx="6400800" cy="914400"/>
-          </a:xfrm>
-          <a:prstGeom prst="rect">
-            <a:avLst/>
-          </a:prstGeom>
-          <a:noFill/>
-        </p:spPr>
-        <p:txBody>
-          <a:bodyPr wrap="square" anchor="ctr">
-            <a:spAutoFit/>
-          </a:bodyPr>
-          <a:lstStyle/>
-          <a:p>
-            <a:pPr algn="l">
-              <a:defRPr sz="3600" b="1">
-                <a:solidFill>
-                  <a:srgbClr val="008AD1"/>
-                </a:solidFill>
-                <a:latin typeface="Century Gothic"/>
-              </a:defRPr>
-            </a:pPr>
-            <a:r>
-              <a:t>SLIDE 24: Construção de um Bom Prompt</a:t>
-            </a:r>
-          </a:p>
-        </p:txBody>
-      </p:sp>
-      <p:sp>
-        <p:nvSpPr>
-          <p:cNvPr id="6" name="TextBox 5"/>
+          <p:cNvPr id="5" name="TextBox 4"/>
           <p:cNvSpPr txBox="1"/>
           <p:nvPr/>
         </p:nvSpPr>
@@ -7626,14 +6861,50 @@
       </p:pic>
       <p:sp>
         <p:nvSpPr>
-          <p:cNvPr id="3" name="Rectangle 2"/>
+          <p:cNvPr id="3" name="TextBox 2"/>
+          <p:cNvSpPr txBox="1"/>
+          <p:nvPr/>
+        </p:nvSpPr>
+        <p:spPr>
+          <a:xfrm>
+            <a:off x="457200" y="274320"/>
+            <a:ext cx="6400800" cy="914400"/>
+          </a:xfrm>
+          <a:prstGeom prst="rect">
+            <a:avLst/>
+          </a:prstGeom>
+          <a:noFill/>
+        </p:spPr>
+        <p:txBody>
+          <a:bodyPr wrap="square" anchor="ctr">
+            <a:spAutoFit/>
+          </a:bodyPr>
+          <a:lstStyle/>
+          <a:p>
+            <a:pPr algn="l">
+              <a:defRPr sz="3600" b="1">
+                <a:solidFill>
+                  <a:srgbClr val="008AD1"/>
+                </a:solidFill>
+                <a:latin typeface="Century Gothic"/>
+              </a:defRPr>
+            </a:pPr>
+            <a:r>
+              <a:t>SLIDE 25: Melhorando a Confiabilidade</a:t>
+            </a:r>
+          </a:p>
+        </p:txBody>
+      </p:sp>
+      <p:sp>
+        <p:nvSpPr>
+          <p:cNvPr id="4" name="Rectangle 3"/>
           <p:cNvSpPr/>
           <p:nvPr/>
         </p:nvSpPr>
         <p:spPr>
           <a:xfrm>
-            <a:off x="457200" y="274320"/>
-            <a:ext cx="6400800" cy="914400"/>
+            <a:off x="457200" y="1371600"/>
+            <a:ext cx="8229600" cy="5212080"/>
           </a:xfrm>
           <a:prstGeom prst="rect">
             <a:avLst/>
@@ -7641,7 +6912,7 @@
           <a:solidFill>
             <a:srgbClr val="FFFFFF"/>
           </a:solidFill>
-          <a:ln w="25400">
+          <a:ln w="12700">
             <a:solidFill>
               <a:srgbClr val="008AD1"/>
             </a:solidFill>
@@ -7671,88 +6942,7 @@
       </p:sp>
       <p:sp>
         <p:nvSpPr>
-          <p:cNvPr id="5" name="Rectangle 4"/>
-          <p:cNvSpPr/>
-          <p:nvPr/>
-        </p:nvSpPr>
-        <p:spPr>
-          <a:xfrm>
-            <a:off x="457200" y="1371600"/>
-            <a:ext cx="8229600" cy="5212080"/>
-          </a:xfrm>
-          <a:prstGeom prst="rect">
-            <a:avLst/>
-          </a:prstGeom>
-          <a:solidFill>
-            <a:srgbClr val="FFFFFF"/>
-          </a:solidFill>
-          <a:ln w="12700">
-            <a:solidFill>
-              <a:srgbClr val="008AD1"/>
-            </a:solidFill>
-          </a:ln>
-        </p:spPr>
-        <p:style>
-          <a:lnRef idx="1">
-            <a:schemeClr val="accent1"/>
-          </a:lnRef>
-          <a:fillRef idx="3">
-            <a:schemeClr val="accent1"/>
-          </a:fillRef>
-          <a:effectRef idx="2">
-            <a:schemeClr val="accent1"/>
-          </a:effectRef>
-          <a:fontRef idx="minor">
-            <a:schemeClr val="lt1"/>
-          </a:fontRef>
-        </p:style>
-        <p:txBody>
-          <a:bodyPr rtlCol="0" anchor="ctr"/>
-          <a:lstStyle/>
-          <a:p>
-            <a:pPr algn="ctr"/>
-          </a:p>
-        </p:txBody>
-      </p:sp>
-      <p:sp>
-        <p:nvSpPr>
-          <p:cNvPr id="4" name="TextBox 3"/>
-          <p:cNvSpPr txBox="1"/>
-          <p:nvPr/>
-        </p:nvSpPr>
-        <p:spPr>
-          <a:xfrm>
-            <a:off x="457200" y="274320"/>
-            <a:ext cx="6400800" cy="914400"/>
-          </a:xfrm>
-          <a:prstGeom prst="rect">
-            <a:avLst/>
-          </a:prstGeom>
-          <a:noFill/>
-        </p:spPr>
-        <p:txBody>
-          <a:bodyPr wrap="square" anchor="ctr">
-            <a:spAutoFit/>
-          </a:bodyPr>
-          <a:lstStyle/>
-          <a:p>
-            <a:pPr algn="l">
-              <a:defRPr sz="3600" b="1">
-                <a:solidFill>
-                  <a:srgbClr val="008AD1"/>
-                </a:solidFill>
-                <a:latin typeface="Century Gothic"/>
-              </a:defRPr>
-            </a:pPr>
-            <a:r>
-              <a:t>SLIDE 25: Melhorando a Confiabilidade</a:t>
-            </a:r>
-          </a:p>
-        </p:txBody>
-      </p:sp>
-      <p:sp>
-        <p:nvSpPr>
-          <p:cNvPr id="6" name="TextBox 5"/>
+          <p:cNvPr id="5" name="TextBox 4"/>
           <p:cNvSpPr txBox="1"/>
           <p:nvPr/>
         </p:nvSpPr>
@@ -7928,14 +7118,50 @@
       </p:pic>
       <p:sp>
         <p:nvSpPr>
-          <p:cNvPr id="3" name="Rectangle 2"/>
+          <p:cNvPr id="3" name="TextBox 2"/>
+          <p:cNvSpPr txBox="1"/>
+          <p:nvPr/>
+        </p:nvSpPr>
+        <p:spPr>
+          <a:xfrm>
+            <a:off x="457200" y="274320"/>
+            <a:ext cx="6400800" cy="914400"/>
+          </a:xfrm>
+          <a:prstGeom prst="rect">
+            <a:avLst/>
+          </a:prstGeom>
+          <a:noFill/>
+        </p:spPr>
+        <p:txBody>
+          <a:bodyPr wrap="square" anchor="ctr">
+            <a:spAutoFit/>
+          </a:bodyPr>
+          <a:lstStyle/>
+          <a:p>
+            <a:pPr algn="l">
+              <a:defRPr sz="3600" b="1">
+                <a:solidFill>
+                  <a:srgbClr val="008AD1"/>
+                </a:solidFill>
+                <a:latin typeface="Century Gothic"/>
+              </a:defRPr>
+            </a:pPr>
+            <a:r>
+              <a:t>SLIDE 26: Atividade Prática: Criação de Prompts</a:t>
+            </a:r>
+          </a:p>
+        </p:txBody>
+      </p:sp>
+      <p:sp>
+        <p:nvSpPr>
+          <p:cNvPr id="4" name="Rectangle 3"/>
           <p:cNvSpPr/>
           <p:nvPr/>
         </p:nvSpPr>
         <p:spPr>
           <a:xfrm>
-            <a:off x="457200" y="274320"/>
-            <a:ext cx="6400800" cy="914400"/>
+            <a:off x="457200" y="1371600"/>
+            <a:ext cx="8229600" cy="5212080"/>
           </a:xfrm>
           <a:prstGeom prst="rect">
             <a:avLst/>
@@ -7943,7 +7169,7 @@
           <a:solidFill>
             <a:srgbClr val="FFFFFF"/>
           </a:solidFill>
-          <a:ln w="25400">
+          <a:ln w="12700">
             <a:solidFill>
               <a:srgbClr val="008AD1"/>
             </a:solidFill>
@@ -7973,88 +7199,7 @@
       </p:sp>
       <p:sp>
         <p:nvSpPr>
-          <p:cNvPr id="5" name="Rectangle 4"/>
-          <p:cNvSpPr/>
-          <p:nvPr/>
-        </p:nvSpPr>
-        <p:spPr>
-          <a:xfrm>
-            <a:off x="457200" y="1371600"/>
-            <a:ext cx="8229600" cy="5212080"/>
-          </a:xfrm>
-          <a:prstGeom prst="rect">
-            <a:avLst/>
-          </a:prstGeom>
-          <a:solidFill>
-            <a:srgbClr val="FFFFFF"/>
-          </a:solidFill>
-          <a:ln w="12700">
-            <a:solidFill>
-              <a:srgbClr val="008AD1"/>
-            </a:solidFill>
-          </a:ln>
-        </p:spPr>
-        <p:style>
-          <a:lnRef idx="1">
-            <a:schemeClr val="accent1"/>
-          </a:lnRef>
-          <a:fillRef idx="3">
-            <a:schemeClr val="accent1"/>
-          </a:fillRef>
-          <a:effectRef idx="2">
-            <a:schemeClr val="accent1"/>
-          </a:effectRef>
-          <a:fontRef idx="minor">
-            <a:schemeClr val="lt1"/>
-          </a:fontRef>
-        </p:style>
-        <p:txBody>
-          <a:bodyPr rtlCol="0" anchor="ctr"/>
-          <a:lstStyle/>
-          <a:p>
-            <a:pPr algn="ctr"/>
-          </a:p>
-        </p:txBody>
-      </p:sp>
-      <p:sp>
-        <p:nvSpPr>
-          <p:cNvPr id="4" name="TextBox 3"/>
-          <p:cNvSpPr txBox="1"/>
-          <p:nvPr/>
-        </p:nvSpPr>
-        <p:spPr>
-          <a:xfrm>
-            <a:off x="457200" y="274320"/>
-            <a:ext cx="6400800" cy="914400"/>
-          </a:xfrm>
-          <a:prstGeom prst="rect">
-            <a:avLst/>
-          </a:prstGeom>
-          <a:noFill/>
-        </p:spPr>
-        <p:txBody>
-          <a:bodyPr wrap="square" anchor="ctr">
-            <a:spAutoFit/>
-          </a:bodyPr>
-          <a:lstStyle/>
-          <a:p>
-            <a:pPr algn="l">
-              <a:defRPr sz="3600" b="1">
-                <a:solidFill>
-                  <a:srgbClr val="008AD1"/>
-                </a:solidFill>
-                <a:latin typeface="Century Gothic"/>
-              </a:defRPr>
-            </a:pPr>
-            <a:r>
-              <a:t>SLIDE 26: Atividade Prática: Criação de Prompts</a:t>
-            </a:r>
-          </a:p>
-        </p:txBody>
-      </p:sp>
-      <p:sp>
-        <p:nvSpPr>
-          <p:cNvPr id="6" name="TextBox 5"/>
+          <p:cNvPr id="5" name="TextBox 4"/>
           <p:cNvSpPr txBox="1"/>
           <p:nvPr/>
         </p:nvSpPr>
@@ -8392,14 +7537,50 @@
       </p:pic>
       <p:sp>
         <p:nvSpPr>
-          <p:cNvPr id="3" name="Rectangle 2"/>
+          <p:cNvPr id="3" name="TextBox 2"/>
+          <p:cNvSpPr txBox="1"/>
+          <p:nvPr/>
+        </p:nvSpPr>
+        <p:spPr>
+          <a:xfrm>
+            <a:off x="457200" y="274320"/>
+            <a:ext cx="6400800" cy="914400"/>
+          </a:xfrm>
+          <a:prstGeom prst="rect">
+            <a:avLst/>
+          </a:prstGeom>
+          <a:noFill/>
+        </p:spPr>
+        <p:txBody>
+          <a:bodyPr wrap="square" anchor="ctr">
+            <a:spAutoFit/>
+          </a:bodyPr>
+          <a:lstStyle/>
+          <a:p>
+            <a:pPr algn="l">
+              <a:defRPr sz="3600" b="1">
+                <a:solidFill>
+                  <a:srgbClr val="008AD1"/>
+                </a:solidFill>
+                <a:latin typeface="Century Gothic"/>
+              </a:defRPr>
+            </a:pPr>
+            <a:r>
+              <a:t>SLIDE 27: Exemplo:</a:t>
+            </a:r>
+          </a:p>
+        </p:txBody>
+      </p:sp>
+      <p:sp>
+        <p:nvSpPr>
+          <p:cNvPr id="4" name="Rectangle 3"/>
           <p:cNvSpPr/>
           <p:nvPr/>
         </p:nvSpPr>
         <p:spPr>
           <a:xfrm>
-            <a:off x="457200" y="274320"/>
-            <a:ext cx="6400800" cy="914400"/>
+            <a:off x="457200" y="1371600"/>
+            <a:ext cx="8229600" cy="5212080"/>
           </a:xfrm>
           <a:prstGeom prst="rect">
             <a:avLst/>
@@ -8407,7 +7588,7 @@
           <a:solidFill>
             <a:srgbClr val="FFFFFF"/>
           </a:solidFill>
-          <a:ln w="25400">
+          <a:ln w="12700">
             <a:solidFill>
               <a:srgbClr val="008AD1"/>
             </a:solidFill>
@@ -8437,88 +7618,7 @@
       </p:sp>
       <p:sp>
         <p:nvSpPr>
-          <p:cNvPr id="5" name="Rectangle 4"/>
-          <p:cNvSpPr/>
-          <p:nvPr/>
-        </p:nvSpPr>
-        <p:spPr>
-          <a:xfrm>
-            <a:off x="457200" y="1371600"/>
-            <a:ext cx="8229600" cy="5212080"/>
-          </a:xfrm>
-          <a:prstGeom prst="rect">
-            <a:avLst/>
-          </a:prstGeom>
-          <a:solidFill>
-            <a:srgbClr val="FFFFFF"/>
-          </a:solidFill>
-          <a:ln w="12700">
-            <a:solidFill>
-              <a:srgbClr val="008AD1"/>
-            </a:solidFill>
-          </a:ln>
-        </p:spPr>
-        <p:style>
-          <a:lnRef idx="1">
-            <a:schemeClr val="accent1"/>
-          </a:lnRef>
-          <a:fillRef idx="3">
-            <a:schemeClr val="accent1"/>
-          </a:fillRef>
-          <a:effectRef idx="2">
-            <a:schemeClr val="accent1"/>
-          </a:effectRef>
-          <a:fontRef idx="minor">
-            <a:schemeClr val="lt1"/>
-          </a:fontRef>
-        </p:style>
-        <p:txBody>
-          <a:bodyPr rtlCol="0" anchor="ctr"/>
-          <a:lstStyle/>
-          <a:p>
-            <a:pPr algn="ctr"/>
-          </a:p>
-        </p:txBody>
-      </p:sp>
-      <p:sp>
-        <p:nvSpPr>
-          <p:cNvPr id="4" name="TextBox 3"/>
-          <p:cNvSpPr txBox="1"/>
-          <p:nvPr/>
-        </p:nvSpPr>
-        <p:spPr>
-          <a:xfrm>
-            <a:off x="457200" y="274320"/>
-            <a:ext cx="6400800" cy="914400"/>
-          </a:xfrm>
-          <a:prstGeom prst="rect">
-            <a:avLst/>
-          </a:prstGeom>
-          <a:noFill/>
-        </p:spPr>
-        <p:txBody>
-          <a:bodyPr wrap="square" anchor="ctr">
-            <a:spAutoFit/>
-          </a:bodyPr>
-          <a:lstStyle/>
-          <a:p>
-            <a:pPr algn="l">
-              <a:defRPr sz="3600" b="1">
-                <a:solidFill>
-                  <a:srgbClr val="008AD1"/>
-                </a:solidFill>
-                <a:latin typeface="Century Gothic"/>
-              </a:defRPr>
-            </a:pPr>
-            <a:r>
-              <a:t>SLIDE 27: Exemplo:</a:t>
-            </a:r>
-          </a:p>
-        </p:txBody>
-      </p:sp>
-      <p:sp>
-        <p:nvSpPr>
-          <p:cNvPr id="6" name="TextBox 5"/>
+          <p:cNvPr id="5" name="TextBox 4"/>
           <p:cNvSpPr txBox="1"/>
           <p:nvPr/>
         </p:nvSpPr>
@@ -8850,14 +7950,50 @@
       </p:pic>
       <p:sp>
         <p:nvSpPr>
-          <p:cNvPr id="3" name="Rectangle 2"/>
+          <p:cNvPr id="3" name="TextBox 2"/>
+          <p:cNvSpPr txBox="1"/>
+          <p:nvPr/>
+        </p:nvSpPr>
+        <p:spPr>
+          <a:xfrm>
+            <a:off x="457200" y="274320"/>
+            <a:ext cx="6400800" cy="914400"/>
+          </a:xfrm>
+          <a:prstGeom prst="rect">
+            <a:avLst/>
+          </a:prstGeom>
+          <a:noFill/>
+        </p:spPr>
+        <p:txBody>
+          <a:bodyPr wrap="square" anchor="ctr">
+            <a:spAutoFit/>
+          </a:bodyPr>
+          <a:lstStyle/>
+          <a:p>
+            <a:pPr algn="l">
+              <a:defRPr sz="3600" b="1">
+                <a:solidFill>
+                  <a:srgbClr val="008AD1"/>
+                </a:solidFill>
+                <a:latin typeface="Century Gothic"/>
+              </a:defRPr>
+            </a:pPr>
+            <a:r>
+              <a:t>SLIDE 28: ---</a:t>
+            </a:r>
+          </a:p>
+        </p:txBody>
+      </p:sp>
+      <p:sp>
+        <p:nvSpPr>
+          <p:cNvPr id="4" name="Rectangle 3"/>
           <p:cNvSpPr/>
           <p:nvPr/>
         </p:nvSpPr>
         <p:spPr>
           <a:xfrm>
-            <a:off x="457200" y="274320"/>
-            <a:ext cx="6400800" cy="914400"/>
+            <a:off x="457200" y="1371600"/>
+            <a:ext cx="8229600" cy="5212080"/>
           </a:xfrm>
           <a:prstGeom prst="rect">
             <a:avLst/>
@@ -8865,7 +8001,7 @@
           <a:solidFill>
             <a:srgbClr val="FFFFFF"/>
           </a:solidFill>
-          <a:ln w="25400">
+          <a:ln w="12700">
             <a:solidFill>
               <a:srgbClr val="008AD1"/>
             </a:solidFill>
@@ -8895,88 +8031,7 @@
       </p:sp>
       <p:sp>
         <p:nvSpPr>
-          <p:cNvPr id="5" name="Rectangle 4"/>
-          <p:cNvSpPr/>
-          <p:nvPr/>
-        </p:nvSpPr>
-        <p:spPr>
-          <a:xfrm>
-            <a:off x="457200" y="1371600"/>
-            <a:ext cx="8229600" cy="5212080"/>
-          </a:xfrm>
-          <a:prstGeom prst="rect">
-            <a:avLst/>
-          </a:prstGeom>
-          <a:solidFill>
-            <a:srgbClr val="FFFFFF"/>
-          </a:solidFill>
-          <a:ln w="12700">
-            <a:solidFill>
-              <a:srgbClr val="008AD1"/>
-            </a:solidFill>
-          </a:ln>
-        </p:spPr>
-        <p:style>
-          <a:lnRef idx="1">
-            <a:schemeClr val="accent1"/>
-          </a:lnRef>
-          <a:fillRef idx="3">
-            <a:schemeClr val="accent1"/>
-          </a:fillRef>
-          <a:effectRef idx="2">
-            <a:schemeClr val="accent1"/>
-          </a:effectRef>
-          <a:fontRef idx="minor">
-            <a:schemeClr val="lt1"/>
-          </a:fontRef>
-        </p:style>
-        <p:txBody>
-          <a:bodyPr rtlCol="0" anchor="ctr"/>
-          <a:lstStyle/>
-          <a:p>
-            <a:pPr algn="ctr"/>
-          </a:p>
-        </p:txBody>
-      </p:sp>
-      <p:sp>
-        <p:nvSpPr>
-          <p:cNvPr id="4" name="TextBox 3"/>
-          <p:cNvSpPr txBox="1"/>
-          <p:nvPr/>
-        </p:nvSpPr>
-        <p:spPr>
-          <a:xfrm>
-            <a:off x="457200" y="274320"/>
-            <a:ext cx="6400800" cy="914400"/>
-          </a:xfrm>
-          <a:prstGeom prst="rect">
-            <a:avLst/>
-          </a:prstGeom>
-          <a:noFill/>
-        </p:spPr>
-        <p:txBody>
-          <a:bodyPr wrap="square" anchor="ctr">
-            <a:spAutoFit/>
-          </a:bodyPr>
-          <a:lstStyle/>
-          <a:p>
-            <a:pPr algn="l">
-              <a:defRPr sz="3600" b="1">
-                <a:solidFill>
-                  <a:srgbClr val="008AD1"/>
-                </a:solidFill>
-                <a:latin typeface="Century Gothic"/>
-              </a:defRPr>
-            </a:pPr>
-            <a:r>
-              <a:t>SLIDE 28: ---</a:t>
-            </a:r>
-          </a:p>
-        </p:txBody>
-      </p:sp>
-      <p:sp>
-        <p:nvSpPr>
-          <p:cNvPr id="6" name="TextBox 5"/>
+          <p:cNvPr id="5" name="TextBox 4"/>
           <p:cNvSpPr txBox="1"/>
           <p:nvPr/>
         </p:nvSpPr>
@@ -9042,14 +8097,50 @@
       </p:pic>
       <p:sp>
         <p:nvSpPr>
-          <p:cNvPr id="3" name="Rectangle 2"/>
+          <p:cNvPr id="3" name="TextBox 2"/>
+          <p:cNvSpPr txBox="1"/>
+          <p:nvPr/>
+        </p:nvSpPr>
+        <p:spPr>
+          <a:xfrm>
+            <a:off x="457200" y="274320"/>
+            <a:ext cx="6400800" cy="914400"/>
+          </a:xfrm>
+          <a:prstGeom prst="rect">
+            <a:avLst/>
+          </a:prstGeom>
+          <a:noFill/>
+        </p:spPr>
+        <p:txBody>
+          <a:bodyPr wrap="square" anchor="ctr">
+            <a:spAutoFit/>
+          </a:bodyPr>
+          <a:lstStyle/>
+          <a:p>
+            <a:pPr algn="l">
+              <a:defRPr sz="3600" b="1">
+                <a:solidFill>
+                  <a:srgbClr val="008AD1"/>
+                </a:solidFill>
+                <a:latin typeface="Century Gothic"/>
+              </a:defRPr>
+            </a:pPr>
+            <a:r>
+              <a:t>SLIDE 02: ---</a:t>
+            </a:r>
+          </a:p>
+        </p:txBody>
+      </p:sp>
+      <p:sp>
+        <p:nvSpPr>
+          <p:cNvPr id="4" name="Rectangle 3"/>
           <p:cNvSpPr/>
           <p:nvPr/>
         </p:nvSpPr>
         <p:spPr>
           <a:xfrm>
-            <a:off x="457200" y="274320"/>
-            <a:ext cx="6400800" cy="914400"/>
+            <a:off x="457200" y="1371600"/>
+            <a:ext cx="8229600" cy="5212080"/>
           </a:xfrm>
           <a:prstGeom prst="rect">
             <a:avLst/>
@@ -9057,7 +8148,7 @@
           <a:solidFill>
             <a:srgbClr val="FFFFFF"/>
           </a:solidFill>
-          <a:ln w="25400">
+          <a:ln w="12700">
             <a:solidFill>
               <a:srgbClr val="008AD1"/>
             </a:solidFill>
@@ -9087,88 +8178,7 @@
       </p:sp>
       <p:sp>
         <p:nvSpPr>
-          <p:cNvPr id="5" name="Rectangle 4"/>
-          <p:cNvSpPr/>
-          <p:nvPr/>
-        </p:nvSpPr>
-        <p:spPr>
-          <a:xfrm>
-            <a:off x="457200" y="1371600"/>
-            <a:ext cx="8229600" cy="5212080"/>
-          </a:xfrm>
-          <a:prstGeom prst="rect">
-            <a:avLst/>
-          </a:prstGeom>
-          <a:solidFill>
-            <a:srgbClr val="FFFFFF"/>
-          </a:solidFill>
-          <a:ln w="12700">
-            <a:solidFill>
-              <a:srgbClr val="008AD1"/>
-            </a:solidFill>
-          </a:ln>
-        </p:spPr>
-        <p:style>
-          <a:lnRef idx="1">
-            <a:schemeClr val="accent1"/>
-          </a:lnRef>
-          <a:fillRef idx="3">
-            <a:schemeClr val="accent1"/>
-          </a:fillRef>
-          <a:effectRef idx="2">
-            <a:schemeClr val="accent1"/>
-          </a:effectRef>
-          <a:fontRef idx="minor">
-            <a:schemeClr val="lt1"/>
-          </a:fontRef>
-        </p:style>
-        <p:txBody>
-          <a:bodyPr rtlCol="0" anchor="ctr"/>
-          <a:lstStyle/>
-          <a:p>
-            <a:pPr algn="ctr"/>
-          </a:p>
-        </p:txBody>
-      </p:sp>
-      <p:sp>
-        <p:nvSpPr>
-          <p:cNvPr id="4" name="TextBox 3"/>
-          <p:cNvSpPr txBox="1"/>
-          <p:nvPr/>
-        </p:nvSpPr>
-        <p:spPr>
-          <a:xfrm>
-            <a:off x="457200" y="274320"/>
-            <a:ext cx="6400800" cy="914400"/>
-          </a:xfrm>
-          <a:prstGeom prst="rect">
-            <a:avLst/>
-          </a:prstGeom>
-          <a:noFill/>
-        </p:spPr>
-        <p:txBody>
-          <a:bodyPr wrap="square" anchor="ctr">
-            <a:spAutoFit/>
-          </a:bodyPr>
-          <a:lstStyle/>
-          <a:p>
-            <a:pPr algn="l">
-              <a:defRPr sz="3600" b="1">
-                <a:solidFill>
-                  <a:srgbClr val="008AD1"/>
-                </a:solidFill>
-                <a:latin typeface="Century Gothic"/>
-              </a:defRPr>
-            </a:pPr>
-            <a:r>
-              <a:t>SLIDE 02: ---</a:t>
-            </a:r>
-          </a:p>
-        </p:txBody>
-      </p:sp>
-      <p:sp>
-        <p:nvSpPr>
-          <p:cNvPr id="6" name="TextBox 5"/>
+          <p:cNvPr id="5" name="TextBox 4"/>
           <p:cNvSpPr txBox="1"/>
           <p:nvPr/>
         </p:nvSpPr>
@@ -9234,14 +8244,50 @@
       </p:pic>
       <p:sp>
         <p:nvSpPr>
-          <p:cNvPr id="3" name="Rectangle 2"/>
+          <p:cNvPr id="3" name="TextBox 2"/>
+          <p:cNvSpPr txBox="1"/>
+          <p:nvPr/>
+        </p:nvSpPr>
+        <p:spPr>
+          <a:xfrm>
+            <a:off x="457200" y="274320"/>
+            <a:ext cx="6400800" cy="914400"/>
+          </a:xfrm>
+          <a:prstGeom prst="rect">
+            <a:avLst/>
+          </a:prstGeom>
+          <a:noFill/>
+        </p:spPr>
+        <p:txBody>
+          <a:bodyPr wrap="square" anchor="ctr">
+            <a:spAutoFit/>
+          </a:bodyPr>
+          <a:lstStyle/>
+          <a:p>
+            <a:pPr algn="l">
+              <a:defRPr sz="3600" b="1">
+                <a:solidFill>
+                  <a:srgbClr val="008AD1"/>
+                </a:solidFill>
+                <a:latin typeface="Century Gothic"/>
+              </a:defRPr>
+            </a:pPr>
+            <a:r>
+              <a:t>SLIDE 29: 10 minutos</a:t>
+            </a:r>
+          </a:p>
+        </p:txBody>
+      </p:sp>
+      <p:sp>
+        <p:nvSpPr>
+          <p:cNvPr id="4" name="Rectangle 3"/>
           <p:cNvSpPr/>
           <p:nvPr/>
         </p:nvSpPr>
         <p:spPr>
           <a:xfrm>
-            <a:off x="457200" y="274320"/>
-            <a:ext cx="6400800" cy="914400"/>
+            <a:off x="457200" y="1371600"/>
+            <a:ext cx="8229600" cy="5212080"/>
           </a:xfrm>
           <a:prstGeom prst="rect">
             <a:avLst/>
@@ -9249,7 +8295,7 @@
           <a:solidFill>
             <a:srgbClr val="FFFFFF"/>
           </a:solidFill>
-          <a:ln w="25400">
+          <a:ln w="12700">
             <a:solidFill>
               <a:srgbClr val="008AD1"/>
             </a:solidFill>
@@ -9279,88 +8325,7 @@
       </p:sp>
       <p:sp>
         <p:nvSpPr>
-          <p:cNvPr id="5" name="Rectangle 4"/>
-          <p:cNvSpPr/>
-          <p:nvPr/>
-        </p:nvSpPr>
-        <p:spPr>
-          <a:xfrm>
-            <a:off x="457200" y="1371600"/>
-            <a:ext cx="8229600" cy="5212080"/>
-          </a:xfrm>
-          <a:prstGeom prst="rect">
-            <a:avLst/>
-          </a:prstGeom>
-          <a:solidFill>
-            <a:srgbClr val="FFFFFF"/>
-          </a:solidFill>
-          <a:ln w="12700">
-            <a:solidFill>
-              <a:srgbClr val="008AD1"/>
-            </a:solidFill>
-          </a:ln>
-        </p:spPr>
-        <p:style>
-          <a:lnRef idx="1">
-            <a:schemeClr val="accent1"/>
-          </a:lnRef>
-          <a:fillRef idx="3">
-            <a:schemeClr val="accent1"/>
-          </a:fillRef>
-          <a:effectRef idx="2">
-            <a:schemeClr val="accent1"/>
-          </a:effectRef>
-          <a:fontRef idx="minor">
-            <a:schemeClr val="lt1"/>
-          </a:fontRef>
-        </p:style>
-        <p:txBody>
-          <a:bodyPr rtlCol="0" anchor="ctr"/>
-          <a:lstStyle/>
-          <a:p>
-            <a:pPr algn="ctr"/>
-          </a:p>
-        </p:txBody>
-      </p:sp>
-      <p:sp>
-        <p:nvSpPr>
-          <p:cNvPr id="4" name="TextBox 3"/>
-          <p:cNvSpPr txBox="1"/>
-          <p:nvPr/>
-        </p:nvSpPr>
-        <p:spPr>
-          <a:xfrm>
-            <a:off x="457200" y="274320"/>
-            <a:ext cx="6400800" cy="914400"/>
-          </a:xfrm>
-          <a:prstGeom prst="rect">
-            <a:avLst/>
-          </a:prstGeom>
-          <a:noFill/>
-        </p:spPr>
-        <p:txBody>
-          <a:bodyPr wrap="square" anchor="ctr">
-            <a:spAutoFit/>
-          </a:bodyPr>
-          <a:lstStyle/>
-          <a:p>
-            <a:pPr algn="l">
-              <a:defRPr sz="3600" b="1">
-                <a:solidFill>
-                  <a:srgbClr val="008AD1"/>
-                </a:solidFill>
-                <a:latin typeface="Century Gothic"/>
-              </a:defRPr>
-            </a:pPr>
-            <a:r>
-              <a:t>SLIDE 29: 10 minutos</a:t>
-            </a:r>
-          </a:p>
-        </p:txBody>
-      </p:sp>
-      <p:sp>
-        <p:nvSpPr>
-          <p:cNvPr id="6" name="TextBox 5"/>
+          <p:cNvPr id="5" name="TextBox 4"/>
           <p:cNvSpPr txBox="1"/>
           <p:nvPr/>
         </p:nvSpPr>
@@ -9444,14 +8409,50 @@
       </p:pic>
       <p:sp>
         <p:nvSpPr>
-          <p:cNvPr id="3" name="Rectangle 2"/>
+          <p:cNvPr id="3" name="TextBox 2"/>
+          <p:cNvSpPr txBox="1"/>
+          <p:nvPr/>
+        </p:nvSpPr>
+        <p:spPr>
+          <a:xfrm>
+            <a:off x="457200" y="274320"/>
+            <a:ext cx="6400800" cy="914400"/>
+          </a:xfrm>
+          <a:prstGeom prst="rect">
+            <a:avLst/>
+          </a:prstGeom>
+          <a:noFill/>
+        </p:spPr>
+        <p:txBody>
+          <a:bodyPr wrap="square" anchor="ctr">
+            <a:spAutoFit/>
+          </a:bodyPr>
+          <a:lstStyle/>
+          <a:p>
+            <a:pPr algn="l">
+              <a:defRPr sz="3600" b="1">
+                <a:solidFill>
+                  <a:srgbClr val="008AD1"/>
+                </a:solidFill>
+                <a:latin typeface="Century Gothic"/>
+              </a:defRPr>
+            </a:pPr>
+            <a:r>
+              <a:t>SLIDE 30: Resposta Esperada (similar)</a:t>
+            </a:r>
+          </a:p>
+        </p:txBody>
+      </p:sp>
+      <p:sp>
+        <p:nvSpPr>
+          <p:cNvPr id="4" name="Rectangle 3"/>
           <p:cNvSpPr/>
           <p:nvPr/>
         </p:nvSpPr>
         <p:spPr>
           <a:xfrm>
-            <a:off x="457200" y="274320"/>
-            <a:ext cx="6400800" cy="914400"/>
+            <a:off x="457200" y="1371600"/>
+            <a:ext cx="8229600" cy="5212080"/>
           </a:xfrm>
           <a:prstGeom prst="rect">
             <a:avLst/>
@@ -9459,7 +8460,7 @@
           <a:solidFill>
             <a:srgbClr val="FFFFFF"/>
           </a:solidFill>
-          <a:ln w="25400">
+          <a:ln w="12700">
             <a:solidFill>
               <a:srgbClr val="008AD1"/>
             </a:solidFill>
@@ -9489,88 +8490,7 @@
       </p:sp>
       <p:sp>
         <p:nvSpPr>
-          <p:cNvPr id="5" name="Rectangle 4"/>
-          <p:cNvSpPr/>
-          <p:nvPr/>
-        </p:nvSpPr>
-        <p:spPr>
-          <a:xfrm>
-            <a:off x="457200" y="1371600"/>
-            <a:ext cx="8229600" cy="5212080"/>
-          </a:xfrm>
-          <a:prstGeom prst="rect">
-            <a:avLst/>
-          </a:prstGeom>
-          <a:solidFill>
-            <a:srgbClr val="FFFFFF"/>
-          </a:solidFill>
-          <a:ln w="12700">
-            <a:solidFill>
-              <a:srgbClr val="008AD1"/>
-            </a:solidFill>
-          </a:ln>
-        </p:spPr>
-        <p:style>
-          <a:lnRef idx="1">
-            <a:schemeClr val="accent1"/>
-          </a:lnRef>
-          <a:fillRef idx="3">
-            <a:schemeClr val="accent1"/>
-          </a:fillRef>
-          <a:effectRef idx="2">
-            <a:schemeClr val="accent1"/>
-          </a:effectRef>
-          <a:fontRef idx="minor">
-            <a:schemeClr val="lt1"/>
-          </a:fontRef>
-        </p:style>
-        <p:txBody>
-          <a:bodyPr rtlCol="0" anchor="ctr"/>
-          <a:lstStyle/>
-          <a:p>
-            <a:pPr algn="ctr"/>
-          </a:p>
-        </p:txBody>
-      </p:sp>
-      <p:sp>
-        <p:nvSpPr>
-          <p:cNvPr id="4" name="TextBox 3"/>
-          <p:cNvSpPr txBox="1"/>
-          <p:nvPr/>
-        </p:nvSpPr>
-        <p:spPr>
-          <a:xfrm>
-            <a:off x="457200" y="274320"/>
-            <a:ext cx="6400800" cy="914400"/>
-          </a:xfrm>
-          <a:prstGeom prst="rect">
-            <a:avLst/>
-          </a:prstGeom>
-          <a:noFill/>
-        </p:spPr>
-        <p:txBody>
-          <a:bodyPr wrap="square" anchor="ctr">
-            <a:spAutoFit/>
-          </a:bodyPr>
-          <a:lstStyle/>
-          <a:p>
-            <a:pPr algn="l">
-              <a:defRPr sz="3600" b="1">
-                <a:solidFill>
-                  <a:srgbClr val="008AD1"/>
-                </a:solidFill>
-                <a:latin typeface="Century Gothic"/>
-              </a:defRPr>
-            </a:pPr>
-            <a:r>
-              <a:t>SLIDE 30: Resposta Esperada (similar)</a:t>
-            </a:r>
-          </a:p>
-        </p:txBody>
-      </p:sp>
-      <p:sp>
-        <p:nvSpPr>
-          <p:cNvPr id="6" name="TextBox 5"/>
+          <p:cNvPr id="5" name="TextBox 4"/>
           <p:cNvSpPr txBox="1"/>
           <p:nvPr/>
         </p:nvSpPr>
@@ -9689,14 +8609,50 @@
       </p:pic>
       <p:sp>
         <p:nvSpPr>
-          <p:cNvPr id="3" name="Rectangle 2"/>
+          <p:cNvPr id="3" name="TextBox 2"/>
+          <p:cNvSpPr txBox="1"/>
+          <p:nvPr/>
+        </p:nvSpPr>
+        <p:spPr>
+          <a:xfrm>
+            <a:off x="457200" y="274320"/>
+            <a:ext cx="6400800" cy="914400"/>
+          </a:xfrm>
+          <a:prstGeom prst="rect">
+            <a:avLst/>
+          </a:prstGeom>
+          <a:noFill/>
+        </p:spPr>
+        <p:txBody>
+          <a:bodyPr wrap="square" anchor="ctr">
+            <a:spAutoFit/>
+          </a:bodyPr>
+          <a:lstStyle/>
+          <a:p>
+            <a:pPr algn="l">
+              <a:defRPr sz="3600" b="1">
+                <a:solidFill>
+                  <a:srgbClr val="008AD1"/>
+                </a:solidFill>
+                <a:latin typeface="Century Gothic"/>
+              </a:defRPr>
+            </a:pPr>
+            <a:r>
+              <a:t>SLIDE 31: 15 minutos</a:t>
+            </a:r>
+          </a:p>
+        </p:txBody>
+      </p:sp>
+      <p:sp>
+        <p:nvSpPr>
+          <p:cNvPr id="4" name="Rectangle 3"/>
           <p:cNvSpPr/>
           <p:nvPr/>
         </p:nvSpPr>
         <p:spPr>
           <a:xfrm>
-            <a:off x="457200" y="274320"/>
-            <a:ext cx="6400800" cy="914400"/>
+            <a:off x="457200" y="1371600"/>
+            <a:ext cx="8229600" cy="5212080"/>
           </a:xfrm>
           <a:prstGeom prst="rect">
             <a:avLst/>
@@ -9704,7 +8660,7 @@
           <a:solidFill>
             <a:srgbClr val="FFFFFF"/>
           </a:solidFill>
-          <a:ln w="25400">
+          <a:ln w="12700">
             <a:solidFill>
               <a:srgbClr val="008AD1"/>
             </a:solidFill>
@@ -9734,88 +8690,7 @@
       </p:sp>
       <p:sp>
         <p:nvSpPr>
-          <p:cNvPr id="5" name="Rectangle 4"/>
-          <p:cNvSpPr/>
-          <p:nvPr/>
-        </p:nvSpPr>
-        <p:spPr>
-          <a:xfrm>
-            <a:off x="457200" y="1371600"/>
-            <a:ext cx="8229600" cy="5212080"/>
-          </a:xfrm>
-          <a:prstGeom prst="rect">
-            <a:avLst/>
-          </a:prstGeom>
-          <a:solidFill>
-            <a:srgbClr val="FFFFFF"/>
-          </a:solidFill>
-          <a:ln w="12700">
-            <a:solidFill>
-              <a:srgbClr val="008AD1"/>
-            </a:solidFill>
-          </a:ln>
-        </p:spPr>
-        <p:style>
-          <a:lnRef idx="1">
-            <a:schemeClr val="accent1"/>
-          </a:lnRef>
-          <a:fillRef idx="3">
-            <a:schemeClr val="accent1"/>
-          </a:fillRef>
-          <a:effectRef idx="2">
-            <a:schemeClr val="accent1"/>
-          </a:effectRef>
-          <a:fontRef idx="minor">
-            <a:schemeClr val="lt1"/>
-          </a:fontRef>
-        </p:style>
-        <p:txBody>
-          <a:bodyPr rtlCol="0" anchor="ctr"/>
-          <a:lstStyle/>
-          <a:p>
-            <a:pPr algn="ctr"/>
-          </a:p>
-        </p:txBody>
-      </p:sp>
-      <p:sp>
-        <p:nvSpPr>
-          <p:cNvPr id="4" name="TextBox 3"/>
-          <p:cNvSpPr txBox="1"/>
-          <p:nvPr/>
-        </p:nvSpPr>
-        <p:spPr>
-          <a:xfrm>
-            <a:off x="457200" y="274320"/>
-            <a:ext cx="6400800" cy="914400"/>
-          </a:xfrm>
-          <a:prstGeom prst="rect">
-            <a:avLst/>
-          </a:prstGeom>
-          <a:noFill/>
-        </p:spPr>
-        <p:txBody>
-          <a:bodyPr wrap="square" anchor="ctr">
-            <a:spAutoFit/>
-          </a:bodyPr>
-          <a:lstStyle/>
-          <a:p>
-            <a:pPr algn="l">
-              <a:defRPr sz="3600" b="1">
-                <a:solidFill>
-                  <a:srgbClr val="008AD1"/>
-                </a:solidFill>
-                <a:latin typeface="Century Gothic"/>
-              </a:defRPr>
-            </a:pPr>
-            <a:r>
-              <a:t>SLIDE 31: 15 minutos</a:t>
-            </a:r>
-          </a:p>
-        </p:txBody>
-      </p:sp>
-      <p:sp>
-        <p:nvSpPr>
-          <p:cNvPr id="6" name="TextBox 5"/>
+          <p:cNvPr id="5" name="TextBox 4"/>
           <p:cNvSpPr txBox="1"/>
           <p:nvPr/>
         </p:nvSpPr>
@@ -10045,14 +8920,50 @@
       </p:pic>
       <p:sp>
         <p:nvSpPr>
-          <p:cNvPr id="3" name="Rectangle 2"/>
+          <p:cNvPr id="3" name="TextBox 2"/>
+          <p:cNvSpPr txBox="1"/>
+          <p:nvPr/>
+        </p:nvSpPr>
+        <p:spPr>
+          <a:xfrm>
+            <a:off x="457200" y="274320"/>
+            <a:ext cx="6400800" cy="914400"/>
+          </a:xfrm>
+          <a:prstGeom prst="rect">
+            <a:avLst/>
+          </a:prstGeom>
+          <a:noFill/>
+        </p:spPr>
+        <p:txBody>
+          <a:bodyPr wrap="square" anchor="ctr">
+            <a:spAutoFit/>
+          </a:bodyPr>
+          <a:lstStyle/>
+          <a:p>
+            <a:pPr algn="l">
+              <a:defRPr sz="3600" b="1">
+                <a:solidFill>
+                  <a:srgbClr val="008AD1"/>
+                </a:solidFill>
+                <a:latin typeface="Century Gothic"/>
+              </a:defRPr>
+            </a:pPr>
+            <a:r>
+              <a:t>SLIDE 32: Resposta Esperada (similar)</a:t>
+            </a:r>
+          </a:p>
+        </p:txBody>
+      </p:sp>
+      <p:sp>
+        <p:nvSpPr>
+          <p:cNvPr id="4" name="Rectangle 3"/>
           <p:cNvSpPr/>
           <p:nvPr/>
         </p:nvSpPr>
         <p:spPr>
           <a:xfrm>
-            <a:off x="457200" y="274320"/>
-            <a:ext cx="6400800" cy="914400"/>
+            <a:off x="457200" y="1371600"/>
+            <a:ext cx="8229600" cy="5212080"/>
           </a:xfrm>
           <a:prstGeom prst="rect">
             <a:avLst/>
@@ -10060,7 +8971,7 @@
           <a:solidFill>
             <a:srgbClr val="FFFFFF"/>
           </a:solidFill>
-          <a:ln w="25400">
+          <a:ln w="12700">
             <a:solidFill>
               <a:srgbClr val="008AD1"/>
             </a:solidFill>
@@ -10090,88 +9001,7 @@
       </p:sp>
       <p:sp>
         <p:nvSpPr>
-          <p:cNvPr id="5" name="Rectangle 4"/>
-          <p:cNvSpPr/>
-          <p:nvPr/>
-        </p:nvSpPr>
-        <p:spPr>
-          <a:xfrm>
-            <a:off x="457200" y="1371600"/>
-            <a:ext cx="8229600" cy="5212080"/>
-          </a:xfrm>
-          <a:prstGeom prst="rect">
-            <a:avLst/>
-          </a:prstGeom>
-          <a:solidFill>
-            <a:srgbClr val="FFFFFF"/>
-          </a:solidFill>
-          <a:ln w="12700">
-            <a:solidFill>
-              <a:srgbClr val="008AD1"/>
-            </a:solidFill>
-          </a:ln>
-        </p:spPr>
-        <p:style>
-          <a:lnRef idx="1">
-            <a:schemeClr val="accent1"/>
-          </a:lnRef>
-          <a:fillRef idx="3">
-            <a:schemeClr val="accent1"/>
-          </a:fillRef>
-          <a:effectRef idx="2">
-            <a:schemeClr val="accent1"/>
-          </a:effectRef>
-          <a:fontRef idx="minor">
-            <a:schemeClr val="lt1"/>
-          </a:fontRef>
-        </p:style>
-        <p:txBody>
-          <a:bodyPr rtlCol="0" anchor="ctr"/>
-          <a:lstStyle/>
-          <a:p>
-            <a:pPr algn="ctr"/>
-          </a:p>
-        </p:txBody>
-      </p:sp>
-      <p:sp>
-        <p:nvSpPr>
-          <p:cNvPr id="4" name="TextBox 3"/>
-          <p:cNvSpPr txBox="1"/>
-          <p:nvPr/>
-        </p:nvSpPr>
-        <p:spPr>
-          <a:xfrm>
-            <a:off x="457200" y="274320"/>
-            <a:ext cx="6400800" cy="914400"/>
-          </a:xfrm>
-          <a:prstGeom prst="rect">
-            <a:avLst/>
-          </a:prstGeom>
-          <a:noFill/>
-        </p:spPr>
-        <p:txBody>
-          <a:bodyPr wrap="square" anchor="ctr">
-            <a:spAutoFit/>
-          </a:bodyPr>
-          <a:lstStyle/>
-          <a:p>
-            <a:pPr algn="l">
-              <a:defRPr sz="3600" b="1">
-                <a:solidFill>
-                  <a:srgbClr val="008AD1"/>
-                </a:solidFill>
-                <a:latin typeface="Century Gothic"/>
-              </a:defRPr>
-            </a:pPr>
-            <a:r>
-              <a:t>SLIDE 32: Resposta Esperada (similar)</a:t>
-            </a:r>
-          </a:p>
-        </p:txBody>
-      </p:sp>
-      <p:sp>
-        <p:nvSpPr>
-          <p:cNvPr id="6" name="TextBox 5"/>
+          <p:cNvPr id="5" name="TextBox 4"/>
           <p:cNvSpPr txBox="1"/>
           <p:nvPr/>
         </p:nvSpPr>
@@ -10290,14 +9120,50 @@
       </p:pic>
       <p:sp>
         <p:nvSpPr>
-          <p:cNvPr id="3" name="Rectangle 2"/>
+          <p:cNvPr id="3" name="TextBox 2"/>
+          <p:cNvSpPr txBox="1"/>
+          <p:nvPr/>
+        </p:nvSpPr>
+        <p:spPr>
+          <a:xfrm>
+            <a:off x="457200" y="274320"/>
+            <a:ext cx="6400800" cy="914400"/>
+          </a:xfrm>
+          <a:prstGeom prst="rect">
+            <a:avLst/>
+          </a:prstGeom>
+          <a:noFill/>
+        </p:spPr>
+        <p:txBody>
+          <a:bodyPr wrap="square" anchor="ctr">
+            <a:spAutoFit/>
+          </a:bodyPr>
+          <a:lstStyle/>
+          <a:p>
+            <a:pPr algn="l">
+              <a:defRPr sz="3600" b="1">
+                <a:solidFill>
+                  <a:srgbClr val="008AD1"/>
+                </a:solidFill>
+                <a:latin typeface="Century Gothic"/>
+              </a:defRPr>
+            </a:pPr>
+            <a:r>
+              <a:t>SLIDE 33: 15 minutos</a:t>
+            </a:r>
+          </a:p>
+        </p:txBody>
+      </p:sp>
+      <p:sp>
+        <p:nvSpPr>
+          <p:cNvPr id="4" name="Rectangle 3"/>
           <p:cNvSpPr/>
           <p:nvPr/>
         </p:nvSpPr>
         <p:spPr>
           <a:xfrm>
-            <a:off x="457200" y="274320"/>
-            <a:ext cx="6400800" cy="914400"/>
+            <a:off x="457200" y="1371600"/>
+            <a:ext cx="8229600" cy="5212080"/>
           </a:xfrm>
           <a:prstGeom prst="rect">
             <a:avLst/>
@@ -10305,7 +9171,7 @@
           <a:solidFill>
             <a:srgbClr val="FFFFFF"/>
           </a:solidFill>
-          <a:ln w="25400">
+          <a:ln w="12700">
             <a:solidFill>
               <a:srgbClr val="008AD1"/>
             </a:solidFill>
@@ -10335,88 +9201,7 @@
       </p:sp>
       <p:sp>
         <p:nvSpPr>
-          <p:cNvPr id="5" name="Rectangle 4"/>
-          <p:cNvSpPr/>
-          <p:nvPr/>
-        </p:nvSpPr>
-        <p:spPr>
-          <a:xfrm>
-            <a:off x="457200" y="1371600"/>
-            <a:ext cx="8229600" cy="5212080"/>
-          </a:xfrm>
-          <a:prstGeom prst="rect">
-            <a:avLst/>
-          </a:prstGeom>
-          <a:solidFill>
-            <a:srgbClr val="FFFFFF"/>
-          </a:solidFill>
-          <a:ln w="12700">
-            <a:solidFill>
-              <a:srgbClr val="008AD1"/>
-            </a:solidFill>
-          </a:ln>
-        </p:spPr>
-        <p:style>
-          <a:lnRef idx="1">
-            <a:schemeClr val="accent1"/>
-          </a:lnRef>
-          <a:fillRef idx="3">
-            <a:schemeClr val="accent1"/>
-          </a:fillRef>
-          <a:effectRef idx="2">
-            <a:schemeClr val="accent1"/>
-          </a:effectRef>
-          <a:fontRef idx="minor">
-            <a:schemeClr val="lt1"/>
-          </a:fontRef>
-        </p:style>
-        <p:txBody>
-          <a:bodyPr rtlCol="0" anchor="ctr"/>
-          <a:lstStyle/>
-          <a:p>
-            <a:pPr algn="ctr"/>
-          </a:p>
-        </p:txBody>
-      </p:sp>
-      <p:sp>
-        <p:nvSpPr>
-          <p:cNvPr id="4" name="TextBox 3"/>
-          <p:cNvSpPr txBox="1"/>
-          <p:nvPr/>
-        </p:nvSpPr>
-        <p:spPr>
-          <a:xfrm>
-            <a:off x="457200" y="274320"/>
-            <a:ext cx="6400800" cy="914400"/>
-          </a:xfrm>
-          <a:prstGeom prst="rect">
-            <a:avLst/>
-          </a:prstGeom>
-          <a:noFill/>
-        </p:spPr>
-        <p:txBody>
-          <a:bodyPr wrap="square" anchor="ctr">
-            <a:spAutoFit/>
-          </a:bodyPr>
-          <a:lstStyle/>
-          <a:p>
-            <a:pPr algn="l">
-              <a:defRPr sz="3600" b="1">
-                <a:solidFill>
-                  <a:srgbClr val="008AD1"/>
-                </a:solidFill>
-                <a:latin typeface="Century Gothic"/>
-              </a:defRPr>
-            </a:pPr>
-            <a:r>
-              <a:t>SLIDE 33: 15 minutos</a:t>
-            </a:r>
-          </a:p>
-        </p:txBody>
-      </p:sp>
-      <p:sp>
-        <p:nvSpPr>
-          <p:cNvPr id="6" name="TextBox 5"/>
+          <p:cNvPr id="5" name="TextBox 4"/>
           <p:cNvSpPr txBox="1"/>
           <p:nvPr/>
         </p:nvSpPr>
@@ -10877,14 +9662,50 @@
       </p:pic>
       <p:sp>
         <p:nvSpPr>
-          <p:cNvPr id="3" name="Rectangle 2"/>
+          <p:cNvPr id="3" name="TextBox 2"/>
+          <p:cNvSpPr txBox="1"/>
+          <p:nvPr/>
+        </p:nvSpPr>
+        <p:spPr>
+          <a:xfrm>
+            <a:off x="457200" y="274320"/>
+            <a:ext cx="6400800" cy="914400"/>
+          </a:xfrm>
+          <a:prstGeom prst="rect">
+            <a:avLst/>
+          </a:prstGeom>
+          <a:noFill/>
+        </p:spPr>
+        <p:txBody>
+          <a:bodyPr wrap="square" anchor="ctr">
+            <a:spAutoFit/>
+          </a:bodyPr>
+          <a:lstStyle/>
+          <a:p>
+            <a:pPr algn="l">
+              <a:defRPr sz="3600" b="1">
+                <a:solidFill>
+                  <a:srgbClr val="008AD1"/>
+                </a:solidFill>
+                <a:latin typeface="Century Gothic"/>
+              </a:defRPr>
+            </a:pPr>
+            <a:r>
+              <a:t>SLIDE 34: Resposta Esperada (similar)</a:t>
+            </a:r>
+          </a:p>
+        </p:txBody>
+      </p:sp>
+      <p:sp>
+        <p:nvSpPr>
+          <p:cNvPr id="4" name="Rectangle 3"/>
           <p:cNvSpPr/>
           <p:nvPr/>
         </p:nvSpPr>
         <p:spPr>
           <a:xfrm>
-            <a:off x="457200" y="274320"/>
-            <a:ext cx="6400800" cy="914400"/>
+            <a:off x="457200" y="1371600"/>
+            <a:ext cx="8229600" cy="5212080"/>
           </a:xfrm>
           <a:prstGeom prst="rect">
             <a:avLst/>
@@ -10892,7 +9713,7 @@
           <a:solidFill>
             <a:srgbClr val="FFFFFF"/>
           </a:solidFill>
-          <a:ln w="25400">
+          <a:ln w="12700">
             <a:solidFill>
               <a:srgbClr val="008AD1"/>
             </a:solidFill>
@@ -10922,88 +9743,7 @@
       </p:sp>
       <p:sp>
         <p:nvSpPr>
-          <p:cNvPr id="5" name="Rectangle 4"/>
-          <p:cNvSpPr/>
-          <p:nvPr/>
-        </p:nvSpPr>
-        <p:spPr>
-          <a:xfrm>
-            <a:off x="457200" y="1371600"/>
-            <a:ext cx="8229600" cy="5212080"/>
-          </a:xfrm>
-          <a:prstGeom prst="rect">
-            <a:avLst/>
-          </a:prstGeom>
-          <a:solidFill>
-            <a:srgbClr val="FFFFFF"/>
-          </a:solidFill>
-          <a:ln w="12700">
-            <a:solidFill>
-              <a:srgbClr val="008AD1"/>
-            </a:solidFill>
-          </a:ln>
-        </p:spPr>
-        <p:style>
-          <a:lnRef idx="1">
-            <a:schemeClr val="accent1"/>
-          </a:lnRef>
-          <a:fillRef idx="3">
-            <a:schemeClr val="accent1"/>
-          </a:fillRef>
-          <a:effectRef idx="2">
-            <a:schemeClr val="accent1"/>
-          </a:effectRef>
-          <a:fontRef idx="minor">
-            <a:schemeClr val="lt1"/>
-          </a:fontRef>
-        </p:style>
-        <p:txBody>
-          <a:bodyPr rtlCol="0" anchor="ctr"/>
-          <a:lstStyle/>
-          <a:p>
-            <a:pPr algn="ctr"/>
-          </a:p>
-        </p:txBody>
-      </p:sp>
-      <p:sp>
-        <p:nvSpPr>
-          <p:cNvPr id="4" name="TextBox 3"/>
-          <p:cNvSpPr txBox="1"/>
-          <p:nvPr/>
-        </p:nvSpPr>
-        <p:spPr>
-          <a:xfrm>
-            <a:off x="457200" y="274320"/>
-            <a:ext cx="6400800" cy="914400"/>
-          </a:xfrm>
-          <a:prstGeom prst="rect">
-            <a:avLst/>
-          </a:prstGeom>
-          <a:noFill/>
-        </p:spPr>
-        <p:txBody>
-          <a:bodyPr wrap="square" anchor="ctr">
-            <a:spAutoFit/>
-          </a:bodyPr>
-          <a:lstStyle/>
-          <a:p>
-            <a:pPr algn="l">
-              <a:defRPr sz="3600" b="1">
-                <a:solidFill>
-                  <a:srgbClr val="008AD1"/>
-                </a:solidFill>
-                <a:latin typeface="Century Gothic"/>
-              </a:defRPr>
-            </a:pPr>
-            <a:r>
-              <a:t>SLIDE 34: Resposta Esperada (similar)</a:t>
-            </a:r>
-          </a:p>
-        </p:txBody>
-      </p:sp>
-      <p:sp>
-        <p:nvSpPr>
-          <p:cNvPr id="6" name="TextBox 5"/>
+          <p:cNvPr id="5" name="TextBox 4"/>
           <p:cNvSpPr txBox="1"/>
           <p:nvPr/>
         </p:nvSpPr>
@@ -11122,14 +9862,50 @@
       </p:pic>
       <p:sp>
         <p:nvSpPr>
-          <p:cNvPr id="3" name="Rectangle 2"/>
+          <p:cNvPr id="3" name="TextBox 2"/>
+          <p:cNvSpPr txBox="1"/>
+          <p:nvPr/>
+        </p:nvSpPr>
+        <p:spPr>
+          <a:xfrm>
+            <a:off x="457200" y="274320"/>
+            <a:ext cx="6400800" cy="914400"/>
+          </a:xfrm>
+          <a:prstGeom prst="rect">
+            <a:avLst/>
+          </a:prstGeom>
+          <a:noFill/>
+        </p:spPr>
+        <p:txBody>
+          <a:bodyPr wrap="square" anchor="ctr">
+            <a:spAutoFit/>
+          </a:bodyPr>
+          <a:lstStyle/>
+          <a:p>
+            <a:pPr algn="l">
+              <a:defRPr sz="3600" b="1">
+                <a:solidFill>
+                  <a:srgbClr val="008AD1"/>
+                </a:solidFill>
+                <a:latin typeface="Century Gothic"/>
+              </a:defRPr>
+            </a:pPr>
+            <a:r>
+              <a:t>SLIDE 35: 15 minutos</a:t>
+            </a:r>
+          </a:p>
+        </p:txBody>
+      </p:sp>
+      <p:sp>
+        <p:nvSpPr>
+          <p:cNvPr id="4" name="Rectangle 3"/>
           <p:cNvSpPr/>
           <p:nvPr/>
         </p:nvSpPr>
         <p:spPr>
           <a:xfrm>
-            <a:off x="457200" y="274320"/>
-            <a:ext cx="6400800" cy="914400"/>
+            <a:off x="457200" y="1371600"/>
+            <a:ext cx="8229600" cy="5212080"/>
           </a:xfrm>
           <a:prstGeom prst="rect">
             <a:avLst/>
@@ -11137,7 +9913,7 @@
           <a:solidFill>
             <a:srgbClr val="FFFFFF"/>
           </a:solidFill>
-          <a:ln w="25400">
+          <a:ln w="12700">
             <a:solidFill>
               <a:srgbClr val="008AD1"/>
             </a:solidFill>
@@ -11167,88 +9943,7 @@
       </p:sp>
       <p:sp>
         <p:nvSpPr>
-          <p:cNvPr id="5" name="Rectangle 4"/>
-          <p:cNvSpPr/>
-          <p:nvPr/>
-        </p:nvSpPr>
-        <p:spPr>
-          <a:xfrm>
-            <a:off x="457200" y="1371600"/>
-            <a:ext cx="8229600" cy="5212080"/>
-          </a:xfrm>
-          <a:prstGeom prst="rect">
-            <a:avLst/>
-          </a:prstGeom>
-          <a:solidFill>
-            <a:srgbClr val="FFFFFF"/>
-          </a:solidFill>
-          <a:ln w="12700">
-            <a:solidFill>
-              <a:srgbClr val="008AD1"/>
-            </a:solidFill>
-          </a:ln>
-        </p:spPr>
-        <p:style>
-          <a:lnRef idx="1">
-            <a:schemeClr val="accent1"/>
-          </a:lnRef>
-          <a:fillRef idx="3">
-            <a:schemeClr val="accent1"/>
-          </a:fillRef>
-          <a:effectRef idx="2">
-            <a:schemeClr val="accent1"/>
-          </a:effectRef>
-          <a:fontRef idx="minor">
-            <a:schemeClr val="lt1"/>
-          </a:fontRef>
-        </p:style>
-        <p:txBody>
-          <a:bodyPr rtlCol="0" anchor="ctr"/>
-          <a:lstStyle/>
-          <a:p>
-            <a:pPr algn="ctr"/>
-          </a:p>
-        </p:txBody>
-      </p:sp>
-      <p:sp>
-        <p:nvSpPr>
-          <p:cNvPr id="4" name="TextBox 3"/>
-          <p:cNvSpPr txBox="1"/>
-          <p:nvPr/>
-        </p:nvSpPr>
-        <p:spPr>
-          <a:xfrm>
-            <a:off x="457200" y="274320"/>
-            <a:ext cx="6400800" cy="914400"/>
-          </a:xfrm>
-          <a:prstGeom prst="rect">
-            <a:avLst/>
-          </a:prstGeom>
-          <a:noFill/>
-        </p:spPr>
-        <p:txBody>
-          <a:bodyPr wrap="square" anchor="ctr">
-            <a:spAutoFit/>
-          </a:bodyPr>
-          <a:lstStyle/>
-          <a:p>
-            <a:pPr algn="l">
-              <a:defRPr sz="3600" b="1">
-                <a:solidFill>
-                  <a:srgbClr val="008AD1"/>
-                </a:solidFill>
-                <a:latin typeface="Century Gothic"/>
-              </a:defRPr>
-            </a:pPr>
-            <a:r>
-              <a:t>SLIDE 35: 15 minutos</a:t>
-            </a:r>
-          </a:p>
-        </p:txBody>
-      </p:sp>
-      <p:sp>
-        <p:nvSpPr>
-          <p:cNvPr id="6" name="TextBox 5"/>
+          <p:cNvPr id="5" name="TextBox 4"/>
           <p:cNvSpPr txBox="1"/>
           <p:nvPr/>
         </p:nvSpPr>
@@ -11332,14 +10027,50 @@
       </p:pic>
       <p:sp>
         <p:nvSpPr>
-          <p:cNvPr id="3" name="Rectangle 2"/>
+          <p:cNvPr id="3" name="TextBox 2"/>
+          <p:cNvSpPr txBox="1"/>
+          <p:nvPr/>
+        </p:nvSpPr>
+        <p:spPr>
+          <a:xfrm>
+            <a:off x="457200" y="274320"/>
+            <a:ext cx="6400800" cy="914400"/>
+          </a:xfrm>
+          <a:prstGeom prst="rect">
+            <a:avLst/>
+          </a:prstGeom>
+          <a:noFill/>
+        </p:spPr>
+        <p:txBody>
+          <a:bodyPr wrap="square" anchor="ctr">
+            <a:spAutoFit/>
+          </a:bodyPr>
+          <a:lstStyle/>
+          <a:p>
+            <a:pPr algn="l">
+              <a:defRPr sz="3600" b="1">
+                <a:solidFill>
+                  <a:srgbClr val="008AD1"/>
+                </a:solidFill>
+                <a:latin typeface="Century Gothic"/>
+              </a:defRPr>
+            </a:pPr>
+            <a:r>
+              <a:t>SLIDE 36: Resposta Esperada (similar)</a:t>
+            </a:r>
+          </a:p>
+        </p:txBody>
+      </p:sp>
+      <p:sp>
+        <p:nvSpPr>
+          <p:cNvPr id="4" name="Rectangle 3"/>
           <p:cNvSpPr/>
           <p:nvPr/>
         </p:nvSpPr>
         <p:spPr>
           <a:xfrm>
-            <a:off x="457200" y="274320"/>
-            <a:ext cx="6400800" cy="914400"/>
+            <a:off x="457200" y="1371600"/>
+            <a:ext cx="8229600" cy="5212080"/>
           </a:xfrm>
           <a:prstGeom prst="rect">
             <a:avLst/>
@@ -11347,7 +10078,7 @@
           <a:solidFill>
             <a:srgbClr val="FFFFFF"/>
           </a:solidFill>
-          <a:ln w="25400">
+          <a:ln w="12700">
             <a:solidFill>
               <a:srgbClr val="008AD1"/>
             </a:solidFill>
@@ -11377,88 +10108,7 @@
       </p:sp>
       <p:sp>
         <p:nvSpPr>
-          <p:cNvPr id="5" name="Rectangle 4"/>
-          <p:cNvSpPr/>
-          <p:nvPr/>
-        </p:nvSpPr>
-        <p:spPr>
-          <a:xfrm>
-            <a:off x="457200" y="1371600"/>
-            <a:ext cx="8229600" cy="5212080"/>
-          </a:xfrm>
-          <a:prstGeom prst="rect">
-            <a:avLst/>
-          </a:prstGeom>
-          <a:solidFill>
-            <a:srgbClr val="FFFFFF"/>
-          </a:solidFill>
-          <a:ln w="12700">
-            <a:solidFill>
-              <a:srgbClr val="008AD1"/>
-            </a:solidFill>
-          </a:ln>
-        </p:spPr>
-        <p:style>
-          <a:lnRef idx="1">
-            <a:schemeClr val="accent1"/>
-          </a:lnRef>
-          <a:fillRef idx="3">
-            <a:schemeClr val="accent1"/>
-          </a:fillRef>
-          <a:effectRef idx="2">
-            <a:schemeClr val="accent1"/>
-          </a:effectRef>
-          <a:fontRef idx="minor">
-            <a:schemeClr val="lt1"/>
-          </a:fontRef>
-        </p:style>
-        <p:txBody>
-          <a:bodyPr rtlCol="0" anchor="ctr"/>
-          <a:lstStyle/>
-          <a:p>
-            <a:pPr algn="ctr"/>
-          </a:p>
-        </p:txBody>
-      </p:sp>
-      <p:sp>
-        <p:nvSpPr>
-          <p:cNvPr id="4" name="TextBox 3"/>
-          <p:cNvSpPr txBox="1"/>
-          <p:nvPr/>
-        </p:nvSpPr>
-        <p:spPr>
-          <a:xfrm>
-            <a:off x="457200" y="274320"/>
-            <a:ext cx="6400800" cy="914400"/>
-          </a:xfrm>
-          <a:prstGeom prst="rect">
-            <a:avLst/>
-          </a:prstGeom>
-          <a:noFill/>
-        </p:spPr>
-        <p:txBody>
-          <a:bodyPr wrap="square" anchor="ctr">
-            <a:spAutoFit/>
-          </a:bodyPr>
-          <a:lstStyle/>
-          <a:p>
-            <a:pPr algn="l">
-              <a:defRPr sz="3600" b="1">
-                <a:solidFill>
-                  <a:srgbClr val="008AD1"/>
-                </a:solidFill>
-                <a:latin typeface="Century Gothic"/>
-              </a:defRPr>
-            </a:pPr>
-            <a:r>
-              <a:t>SLIDE 36: Resposta Esperada (similar)</a:t>
-            </a:r>
-          </a:p>
-        </p:txBody>
-      </p:sp>
-      <p:sp>
-        <p:nvSpPr>
-          <p:cNvPr id="6" name="TextBox 5"/>
+          <p:cNvPr id="5" name="TextBox 4"/>
           <p:cNvSpPr txBox="1"/>
           <p:nvPr/>
         </p:nvSpPr>
@@ -11672,14 +10322,50 @@
       </p:pic>
       <p:sp>
         <p:nvSpPr>
-          <p:cNvPr id="3" name="Rectangle 2"/>
+          <p:cNvPr id="3" name="TextBox 2"/>
+          <p:cNvSpPr txBox="1"/>
+          <p:nvPr/>
+        </p:nvSpPr>
+        <p:spPr>
+          <a:xfrm>
+            <a:off x="457200" y="274320"/>
+            <a:ext cx="6400800" cy="914400"/>
+          </a:xfrm>
+          <a:prstGeom prst="rect">
+            <a:avLst/>
+          </a:prstGeom>
+          <a:noFill/>
+        </p:spPr>
+        <p:txBody>
+          <a:bodyPr wrap="square" anchor="ctr">
+            <a:spAutoFit/>
+          </a:bodyPr>
+          <a:lstStyle/>
+          <a:p>
+            <a:pPr algn="l">
+              <a:defRPr sz="3600" b="1">
+                <a:solidFill>
+                  <a:srgbClr val="008AD1"/>
+                </a:solidFill>
+                <a:latin typeface="Century Gothic"/>
+              </a:defRPr>
+            </a:pPr>
+            <a:r>
+              <a:t>SLIDE 37: Resultado Gemini</a:t>
+            </a:r>
+          </a:p>
+        </p:txBody>
+      </p:sp>
+      <p:sp>
+        <p:nvSpPr>
+          <p:cNvPr id="4" name="Rectangle 3"/>
           <p:cNvSpPr/>
           <p:nvPr/>
         </p:nvSpPr>
         <p:spPr>
           <a:xfrm>
-            <a:off x="457200" y="274320"/>
-            <a:ext cx="6400800" cy="914400"/>
+            <a:off x="457200" y="1371600"/>
+            <a:ext cx="8229600" cy="5212080"/>
           </a:xfrm>
           <a:prstGeom prst="rect">
             <a:avLst/>
@@ -11687,7 +10373,7 @@
           <a:solidFill>
             <a:srgbClr val="FFFFFF"/>
           </a:solidFill>
-          <a:ln w="25400">
+          <a:ln w="12700">
             <a:solidFill>
               <a:srgbClr val="008AD1"/>
             </a:solidFill>
@@ -11717,88 +10403,7 @@
       </p:sp>
       <p:sp>
         <p:nvSpPr>
-          <p:cNvPr id="5" name="Rectangle 4"/>
-          <p:cNvSpPr/>
-          <p:nvPr/>
-        </p:nvSpPr>
-        <p:spPr>
-          <a:xfrm>
-            <a:off x="457200" y="1371600"/>
-            <a:ext cx="8229600" cy="5212080"/>
-          </a:xfrm>
-          <a:prstGeom prst="rect">
-            <a:avLst/>
-          </a:prstGeom>
-          <a:solidFill>
-            <a:srgbClr val="FFFFFF"/>
-          </a:solidFill>
-          <a:ln w="12700">
-            <a:solidFill>
-              <a:srgbClr val="008AD1"/>
-            </a:solidFill>
-          </a:ln>
-        </p:spPr>
-        <p:style>
-          <a:lnRef idx="1">
-            <a:schemeClr val="accent1"/>
-          </a:lnRef>
-          <a:fillRef idx="3">
-            <a:schemeClr val="accent1"/>
-          </a:fillRef>
-          <a:effectRef idx="2">
-            <a:schemeClr val="accent1"/>
-          </a:effectRef>
-          <a:fontRef idx="minor">
-            <a:schemeClr val="lt1"/>
-          </a:fontRef>
-        </p:style>
-        <p:txBody>
-          <a:bodyPr rtlCol="0" anchor="ctr"/>
-          <a:lstStyle/>
-          <a:p>
-            <a:pPr algn="ctr"/>
-          </a:p>
-        </p:txBody>
-      </p:sp>
-      <p:sp>
-        <p:nvSpPr>
-          <p:cNvPr id="4" name="TextBox 3"/>
-          <p:cNvSpPr txBox="1"/>
-          <p:nvPr/>
-        </p:nvSpPr>
-        <p:spPr>
-          <a:xfrm>
-            <a:off x="457200" y="274320"/>
-            <a:ext cx="6400800" cy="914400"/>
-          </a:xfrm>
-          <a:prstGeom prst="rect">
-            <a:avLst/>
-          </a:prstGeom>
-          <a:noFill/>
-        </p:spPr>
-        <p:txBody>
-          <a:bodyPr wrap="square" anchor="ctr">
-            <a:spAutoFit/>
-          </a:bodyPr>
-          <a:lstStyle/>
-          <a:p>
-            <a:pPr algn="l">
-              <a:defRPr sz="3600" b="1">
-                <a:solidFill>
-                  <a:srgbClr val="008AD1"/>
-                </a:solidFill>
-                <a:latin typeface="Century Gothic"/>
-              </a:defRPr>
-            </a:pPr>
-            <a:r>
-              <a:t>SLIDE 37: Resultado Gemini</a:t>
-            </a:r>
-          </a:p>
-        </p:txBody>
-      </p:sp>
-      <p:sp>
-        <p:nvSpPr>
-          <p:cNvPr id="6" name="TextBox 5"/>
+          <p:cNvPr id="5" name="TextBox 4"/>
           <p:cNvSpPr txBox="1"/>
           <p:nvPr/>
         </p:nvSpPr>
@@ -13249,14 +11854,50 @@
       </p:pic>
       <p:sp>
         <p:nvSpPr>
-          <p:cNvPr id="3" name="Rectangle 2"/>
+          <p:cNvPr id="3" name="TextBox 2"/>
+          <p:cNvSpPr txBox="1"/>
+          <p:nvPr/>
+        </p:nvSpPr>
+        <p:spPr>
+          <a:xfrm>
+            <a:off x="457200" y="274320"/>
+            <a:ext cx="6400800" cy="914400"/>
+          </a:xfrm>
+          <a:prstGeom prst="rect">
+            <a:avLst/>
+          </a:prstGeom>
+          <a:noFill/>
+        </p:spPr>
+        <p:txBody>
+          <a:bodyPr wrap="square" anchor="ctr">
+            <a:spAutoFit/>
+          </a:bodyPr>
+          <a:lstStyle/>
+          <a:p>
+            <a:pPr algn="l">
+              <a:defRPr sz="3600" b="1">
+                <a:solidFill>
+                  <a:srgbClr val="008AD1"/>
+                </a:solidFill>
+                <a:latin typeface="Century Gothic"/>
+              </a:defRPr>
+            </a:pPr>
+            <a:r>
+              <a:t>SLIDE 38: ChatBots</a:t>
+            </a:r>
+          </a:p>
+        </p:txBody>
+      </p:sp>
+      <p:sp>
+        <p:nvSpPr>
+          <p:cNvPr id="4" name="Rectangle 3"/>
           <p:cNvSpPr/>
           <p:nvPr/>
         </p:nvSpPr>
         <p:spPr>
           <a:xfrm>
-            <a:off x="457200" y="274320"/>
-            <a:ext cx="6400800" cy="914400"/>
+            <a:off x="457200" y="1371600"/>
+            <a:ext cx="8229600" cy="5212080"/>
           </a:xfrm>
           <a:prstGeom prst="rect">
             <a:avLst/>
@@ -13264,7 +11905,7 @@
           <a:solidFill>
             <a:srgbClr val="FFFFFF"/>
           </a:solidFill>
-          <a:ln w="25400">
+          <a:ln w="12700">
             <a:solidFill>
               <a:srgbClr val="008AD1"/>
             </a:solidFill>
@@ -13294,88 +11935,7 @@
       </p:sp>
       <p:sp>
         <p:nvSpPr>
-          <p:cNvPr id="5" name="Rectangle 4"/>
-          <p:cNvSpPr/>
-          <p:nvPr/>
-        </p:nvSpPr>
-        <p:spPr>
-          <a:xfrm>
-            <a:off x="457200" y="1371600"/>
-            <a:ext cx="8229600" cy="5212080"/>
-          </a:xfrm>
-          <a:prstGeom prst="rect">
-            <a:avLst/>
-          </a:prstGeom>
-          <a:solidFill>
-            <a:srgbClr val="FFFFFF"/>
-          </a:solidFill>
-          <a:ln w="12700">
-            <a:solidFill>
-              <a:srgbClr val="008AD1"/>
-            </a:solidFill>
-          </a:ln>
-        </p:spPr>
-        <p:style>
-          <a:lnRef idx="1">
-            <a:schemeClr val="accent1"/>
-          </a:lnRef>
-          <a:fillRef idx="3">
-            <a:schemeClr val="accent1"/>
-          </a:fillRef>
-          <a:effectRef idx="2">
-            <a:schemeClr val="accent1"/>
-          </a:effectRef>
-          <a:fontRef idx="minor">
-            <a:schemeClr val="lt1"/>
-          </a:fontRef>
-        </p:style>
-        <p:txBody>
-          <a:bodyPr rtlCol="0" anchor="ctr"/>
-          <a:lstStyle/>
-          <a:p>
-            <a:pPr algn="ctr"/>
-          </a:p>
-        </p:txBody>
-      </p:sp>
-      <p:sp>
-        <p:nvSpPr>
-          <p:cNvPr id="4" name="TextBox 3"/>
-          <p:cNvSpPr txBox="1"/>
-          <p:nvPr/>
-        </p:nvSpPr>
-        <p:spPr>
-          <a:xfrm>
-            <a:off x="457200" y="274320"/>
-            <a:ext cx="6400800" cy="914400"/>
-          </a:xfrm>
-          <a:prstGeom prst="rect">
-            <a:avLst/>
-          </a:prstGeom>
-          <a:noFill/>
-        </p:spPr>
-        <p:txBody>
-          <a:bodyPr wrap="square" anchor="ctr">
-            <a:spAutoFit/>
-          </a:bodyPr>
-          <a:lstStyle/>
-          <a:p>
-            <a:pPr algn="l">
-              <a:defRPr sz="3600" b="1">
-                <a:solidFill>
-                  <a:srgbClr val="008AD1"/>
-                </a:solidFill>
-                <a:latin typeface="Century Gothic"/>
-              </a:defRPr>
-            </a:pPr>
-            <a:r>
-              <a:t>SLIDE 38: ChatBots</a:t>
-            </a:r>
-          </a:p>
-        </p:txBody>
-      </p:sp>
-      <p:sp>
-        <p:nvSpPr>
-          <p:cNvPr id="6" name="TextBox 5"/>
+          <p:cNvPr id="5" name="TextBox 4"/>
           <p:cNvSpPr txBox="1"/>
           <p:nvPr/>
         </p:nvSpPr>
@@ -13532,14 +12092,50 @@
       </p:pic>
       <p:sp>
         <p:nvSpPr>
-          <p:cNvPr id="3" name="Rectangle 2"/>
+          <p:cNvPr id="3" name="TextBox 2"/>
+          <p:cNvSpPr txBox="1"/>
+          <p:nvPr/>
+        </p:nvSpPr>
+        <p:spPr>
+          <a:xfrm>
+            <a:off x="457200" y="274320"/>
+            <a:ext cx="6400800" cy="914400"/>
+          </a:xfrm>
+          <a:prstGeom prst="rect">
+            <a:avLst/>
+          </a:prstGeom>
+          <a:noFill/>
+        </p:spPr>
+        <p:txBody>
+          <a:bodyPr wrap="square" anchor="ctr">
+            <a:spAutoFit/>
+          </a:bodyPr>
+          <a:lstStyle/>
+          <a:p>
+            <a:pPr algn="l">
+              <a:defRPr sz="3600" b="1">
+                <a:solidFill>
+                  <a:srgbClr val="008AD1"/>
+                </a:solidFill>
+                <a:latin typeface="Century Gothic"/>
+              </a:defRPr>
+            </a:pPr>
+            <a:r>
+              <a:t>SLIDE 03: Digital Skills: Inteligência Artificial e ChatGPT</a:t>
+            </a:r>
+          </a:p>
+        </p:txBody>
+      </p:sp>
+      <p:sp>
+        <p:nvSpPr>
+          <p:cNvPr id="4" name="Rectangle 3"/>
           <p:cNvSpPr/>
           <p:nvPr/>
         </p:nvSpPr>
         <p:spPr>
           <a:xfrm>
-            <a:off x="457200" y="274320"/>
-            <a:ext cx="6400800" cy="914400"/>
+            <a:off x="457200" y="1371600"/>
+            <a:ext cx="8229600" cy="5212080"/>
           </a:xfrm>
           <a:prstGeom prst="rect">
             <a:avLst/>
@@ -13547,7 +12143,7 @@
           <a:solidFill>
             <a:srgbClr val="FFFFFF"/>
           </a:solidFill>
-          <a:ln w="25400">
+          <a:ln w="12700">
             <a:solidFill>
               <a:srgbClr val="008AD1"/>
             </a:solidFill>
@@ -13577,88 +12173,7 @@
       </p:sp>
       <p:sp>
         <p:nvSpPr>
-          <p:cNvPr id="5" name="Rectangle 4"/>
-          <p:cNvSpPr/>
-          <p:nvPr/>
-        </p:nvSpPr>
-        <p:spPr>
-          <a:xfrm>
-            <a:off x="457200" y="1371600"/>
-            <a:ext cx="8229600" cy="5212080"/>
-          </a:xfrm>
-          <a:prstGeom prst="rect">
-            <a:avLst/>
-          </a:prstGeom>
-          <a:solidFill>
-            <a:srgbClr val="FFFFFF"/>
-          </a:solidFill>
-          <a:ln w="12700">
-            <a:solidFill>
-              <a:srgbClr val="008AD1"/>
-            </a:solidFill>
-          </a:ln>
-        </p:spPr>
-        <p:style>
-          <a:lnRef idx="1">
-            <a:schemeClr val="accent1"/>
-          </a:lnRef>
-          <a:fillRef idx="3">
-            <a:schemeClr val="accent1"/>
-          </a:fillRef>
-          <a:effectRef idx="2">
-            <a:schemeClr val="accent1"/>
-          </a:effectRef>
-          <a:fontRef idx="minor">
-            <a:schemeClr val="lt1"/>
-          </a:fontRef>
-        </p:style>
-        <p:txBody>
-          <a:bodyPr rtlCol="0" anchor="ctr"/>
-          <a:lstStyle/>
-          <a:p>
-            <a:pPr algn="ctr"/>
-          </a:p>
-        </p:txBody>
-      </p:sp>
-      <p:sp>
-        <p:nvSpPr>
-          <p:cNvPr id="4" name="TextBox 3"/>
-          <p:cNvSpPr txBox="1"/>
-          <p:nvPr/>
-        </p:nvSpPr>
-        <p:spPr>
-          <a:xfrm>
-            <a:off x="457200" y="274320"/>
-            <a:ext cx="6400800" cy="914400"/>
-          </a:xfrm>
-          <a:prstGeom prst="rect">
-            <a:avLst/>
-          </a:prstGeom>
-          <a:noFill/>
-        </p:spPr>
-        <p:txBody>
-          <a:bodyPr wrap="square" anchor="ctr">
-            <a:spAutoFit/>
-          </a:bodyPr>
-          <a:lstStyle/>
-          <a:p>
-            <a:pPr algn="l">
-              <a:defRPr sz="3600" b="1">
-                <a:solidFill>
-                  <a:srgbClr val="008AD1"/>
-                </a:solidFill>
-                <a:latin typeface="Century Gothic"/>
-              </a:defRPr>
-            </a:pPr>
-            <a:r>
-              <a:t>SLIDE 03: Digital Skills: Inteligência Artificial e ChatGPT</a:t>
-            </a:r>
-          </a:p>
-        </p:txBody>
-      </p:sp>
-      <p:sp>
-        <p:nvSpPr>
-          <p:cNvPr id="6" name="TextBox 5"/>
+          <p:cNvPr id="5" name="TextBox 4"/>
           <p:cNvSpPr txBox="1"/>
           <p:nvPr/>
         </p:nvSpPr>
@@ -13742,14 +12257,50 @@
       </p:pic>
       <p:sp>
         <p:nvSpPr>
-          <p:cNvPr id="3" name="Rectangle 2"/>
+          <p:cNvPr id="3" name="TextBox 2"/>
+          <p:cNvSpPr txBox="1"/>
+          <p:nvPr/>
+        </p:nvSpPr>
+        <p:spPr>
+          <a:xfrm>
+            <a:off x="457200" y="274320"/>
+            <a:ext cx="6400800" cy="914400"/>
+          </a:xfrm>
+          <a:prstGeom prst="rect">
+            <a:avLst/>
+          </a:prstGeom>
+          <a:noFill/>
+        </p:spPr>
+        <p:txBody>
+          <a:bodyPr wrap="square" anchor="ctr">
+            <a:spAutoFit/>
+          </a:bodyPr>
+          <a:lstStyle/>
+          <a:p>
+            <a:pPr algn="l">
+              <a:defRPr sz="3600" b="1">
+                <a:solidFill>
+                  <a:srgbClr val="008AD1"/>
+                </a:solidFill>
+                <a:latin typeface="Century Gothic"/>
+              </a:defRPr>
+            </a:pPr>
+            <a:r>
+              <a:t>SLIDE 39: Essencial para um bom Prompt</a:t>
+            </a:r>
+          </a:p>
+        </p:txBody>
+      </p:sp>
+      <p:sp>
+        <p:nvSpPr>
+          <p:cNvPr id="4" name="Rectangle 3"/>
           <p:cNvSpPr/>
           <p:nvPr/>
         </p:nvSpPr>
         <p:spPr>
           <a:xfrm>
-            <a:off x="457200" y="274320"/>
-            <a:ext cx="6400800" cy="914400"/>
+            <a:off x="457200" y="1371600"/>
+            <a:ext cx="8229600" cy="5212080"/>
           </a:xfrm>
           <a:prstGeom prst="rect">
             <a:avLst/>
@@ -13757,7 +12308,7 @@
           <a:solidFill>
             <a:srgbClr val="FFFFFF"/>
           </a:solidFill>
-          <a:ln w="25400">
+          <a:ln w="12700">
             <a:solidFill>
               <a:srgbClr val="008AD1"/>
             </a:solidFill>
@@ -13787,88 +12338,7 @@
       </p:sp>
       <p:sp>
         <p:nvSpPr>
-          <p:cNvPr id="5" name="Rectangle 4"/>
-          <p:cNvSpPr/>
-          <p:nvPr/>
-        </p:nvSpPr>
-        <p:spPr>
-          <a:xfrm>
-            <a:off x="457200" y="1371600"/>
-            <a:ext cx="8229600" cy="5212080"/>
-          </a:xfrm>
-          <a:prstGeom prst="rect">
-            <a:avLst/>
-          </a:prstGeom>
-          <a:solidFill>
-            <a:srgbClr val="FFFFFF"/>
-          </a:solidFill>
-          <a:ln w="12700">
-            <a:solidFill>
-              <a:srgbClr val="008AD1"/>
-            </a:solidFill>
-          </a:ln>
-        </p:spPr>
-        <p:style>
-          <a:lnRef idx="1">
-            <a:schemeClr val="accent1"/>
-          </a:lnRef>
-          <a:fillRef idx="3">
-            <a:schemeClr val="accent1"/>
-          </a:fillRef>
-          <a:effectRef idx="2">
-            <a:schemeClr val="accent1"/>
-          </a:effectRef>
-          <a:fontRef idx="minor">
-            <a:schemeClr val="lt1"/>
-          </a:fontRef>
-        </p:style>
-        <p:txBody>
-          <a:bodyPr rtlCol="0" anchor="ctr"/>
-          <a:lstStyle/>
-          <a:p>
-            <a:pPr algn="ctr"/>
-          </a:p>
-        </p:txBody>
-      </p:sp>
-      <p:sp>
-        <p:nvSpPr>
-          <p:cNvPr id="4" name="TextBox 3"/>
-          <p:cNvSpPr txBox="1"/>
-          <p:nvPr/>
-        </p:nvSpPr>
-        <p:spPr>
-          <a:xfrm>
-            <a:off x="457200" y="274320"/>
-            <a:ext cx="6400800" cy="914400"/>
-          </a:xfrm>
-          <a:prstGeom prst="rect">
-            <a:avLst/>
-          </a:prstGeom>
-          <a:noFill/>
-        </p:spPr>
-        <p:txBody>
-          <a:bodyPr wrap="square" anchor="ctr">
-            <a:spAutoFit/>
-          </a:bodyPr>
-          <a:lstStyle/>
-          <a:p>
-            <a:pPr algn="l">
-              <a:defRPr sz="3600" b="1">
-                <a:solidFill>
-                  <a:srgbClr val="008AD1"/>
-                </a:solidFill>
-                <a:latin typeface="Century Gothic"/>
-              </a:defRPr>
-            </a:pPr>
-            <a:r>
-              <a:t>SLIDE 39: Essencial para um bom Prompt</a:t>
-            </a:r>
-          </a:p>
-        </p:txBody>
-      </p:sp>
-      <p:sp>
-        <p:nvSpPr>
-          <p:cNvPr id="6" name="TextBox 5"/>
+          <p:cNvPr id="5" name="TextBox 4"/>
           <p:cNvSpPr txBox="1"/>
           <p:nvPr/>
         </p:nvSpPr>
@@ -14120,14 +12590,50 @@
       </p:pic>
       <p:sp>
         <p:nvSpPr>
-          <p:cNvPr id="3" name="Rectangle 2"/>
+          <p:cNvPr id="3" name="TextBox 2"/>
+          <p:cNvSpPr txBox="1"/>
+          <p:nvPr/>
+        </p:nvSpPr>
+        <p:spPr>
+          <a:xfrm>
+            <a:off x="457200" y="274320"/>
+            <a:ext cx="6400800" cy="914400"/>
+          </a:xfrm>
+          <a:prstGeom prst="rect">
+            <a:avLst/>
+          </a:prstGeom>
+          <a:noFill/>
+        </p:spPr>
+        <p:txBody>
+          <a:bodyPr wrap="square" anchor="ctr">
+            <a:spAutoFit/>
+          </a:bodyPr>
+          <a:lstStyle/>
+          <a:p>
+            <a:pPr algn="l">
+              <a:defRPr sz="3600" b="1">
+                <a:solidFill>
+                  <a:srgbClr val="008AD1"/>
+                </a:solidFill>
+                <a:latin typeface="Century Gothic"/>
+              </a:defRPr>
+            </a:pPr>
+            <a:r>
+              <a:t>SLIDE 40: Exemplo</a:t>
+            </a:r>
+          </a:p>
+        </p:txBody>
+      </p:sp>
+      <p:sp>
+        <p:nvSpPr>
+          <p:cNvPr id="4" name="Rectangle 3"/>
           <p:cNvSpPr/>
           <p:nvPr/>
         </p:nvSpPr>
         <p:spPr>
           <a:xfrm>
-            <a:off x="457200" y="274320"/>
-            <a:ext cx="6400800" cy="914400"/>
+            <a:off x="457200" y="1371600"/>
+            <a:ext cx="8229600" cy="5212080"/>
           </a:xfrm>
           <a:prstGeom prst="rect">
             <a:avLst/>
@@ -14135,7 +12641,7 @@
           <a:solidFill>
             <a:srgbClr val="FFFFFF"/>
           </a:solidFill>
-          <a:ln w="25400">
+          <a:ln w="12700">
             <a:solidFill>
               <a:srgbClr val="008AD1"/>
             </a:solidFill>
@@ -14165,88 +12671,7 @@
       </p:sp>
       <p:sp>
         <p:nvSpPr>
-          <p:cNvPr id="5" name="Rectangle 4"/>
-          <p:cNvSpPr/>
-          <p:nvPr/>
-        </p:nvSpPr>
-        <p:spPr>
-          <a:xfrm>
-            <a:off x="457200" y="1371600"/>
-            <a:ext cx="8229600" cy="5212080"/>
-          </a:xfrm>
-          <a:prstGeom prst="rect">
-            <a:avLst/>
-          </a:prstGeom>
-          <a:solidFill>
-            <a:srgbClr val="FFFFFF"/>
-          </a:solidFill>
-          <a:ln w="12700">
-            <a:solidFill>
-              <a:srgbClr val="008AD1"/>
-            </a:solidFill>
-          </a:ln>
-        </p:spPr>
-        <p:style>
-          <a:lnRef idx="1">
-            <a:schemeClr val="accent1"/>
-          </a:lnRef>
-          <a:fillRef idx="3">
-            <a:schemeClr val="accent1"/>
-          </a:fillRef>
-          <a:effectRef idx="2">
-            <a:schemeClr val="accent1"/>
-          </a:effectRef>
-          <a:fontRef idx="minor">
-            <a:schemeClr val="lt1"/>
-          </a:fontRef>
-        </p:style>
-        <p:txBody>
-          <a:bodyPr rtlCol="0" anchor="ctr"/>
-          <a:lstStyle/>
-          <a:p>
-            <a:pPr algn="ctr"/>
-          </a:p>
-        </p:txBody>
-      </p:sp>
-      <p:sp>
-        <p:nvSpPr>
-          <p:cNvPr id="4" name="TextBox 3"/>
-          <p:cNvSpPr txBox="1"/>
-          <p:nvPr/>
-        </p:nvSpPr>
-        <p:spPr>
-          <a:xfrm>
-            <a:off x="457200" y="274320"/>
-            <a:ext cx="6400800" cy="914400"/>
-          </a:xfrm>
-          <a:prstGeom prst="rect">
-            <a:avLst/>
-          </a:prstGeom>
-          <a:noFill/>
-        </p:spPr>
-        <p:txBody>
-          <a:bodyPr wrap="square" anchor="ctr">
-            <a:spAutoFit/>
-          </a:bodyPr>
-          <a:lstStyle/>
-          <a:p>
-            <a:pPr algn="l">
-              <a:defRPr sz="3600" b="1">
-                <a:solidFill>
-                  <a:srgbClr val="008AD1"/>
-                </a:solidFill>
-                <a:latin typeface="Century Gothic"/>
-              </a:defRPr>
-            </a:pPr>
-            <a:r>
-              <a:t>SLIDE 40: Exemplo</a:t>
-            </a:r>
-          </a:p>
-        </p:txBody>
-      </p:sp>
-      <p:sp>
-        <p:nvSpPr>
-          <p:cNvPr id="6" name="TextBox 5"/>
+          <p:cNvPr id="5" name="TextBox 4"/>
           <p:cNvSpPr txBox="1"/>
           <p:nvPr/>
         </p:nvSpPr>
@@ -15779,14 +14204,50 @@
       </p:pic>
       <p:sp>
         <p:nvSpPr>
-          <p:cNvPr id="3" name="Rectangle 2"/>
+          <p:cNvPr id="3" name="TextBox 2"/>
+          <p:cNvSpPr txBox="1"/>
+          <p:nvPr/>
+        </p:nvSpPr>
+        <p:spPr>
+          <a:xfrm>
+            <a:off x="457200" y="274320"/>
+            <a:ext cx="6400800" cy="914400"/>
+          </a:xfrm>
+          <a:prstGeom prst="rect">
+            <a:avLst/>
+          </a:prstGeom>
+          <a:noFill/>
+        </p:spPr>
+        <p:txBody>
+          <a:bodyPr wrap="square" anchor="ctr">
+            <a:spAutoFit/>
+          </a:bodyPr>
+          <a:lstStyle/>
+          <a:p>
+            <a:pPr algn="l">
+              <a:defRPr sz="3600" b="1">
+                <a:solidFill>
+                  <a:srgbClr val="008AD1"/>
+                </a:solidFill>
+                <a:latin typeface="Century Gothic"/>
+              </a:defRPr>
+            </a:pPr>
+            <a:r>
+              <a:t>SLIDE 41: CONTEÚDO (USE COMO BASE):</a:t>
+            </a:r>
+          </a:p>
+        </p:txBody>
+      </p:sp>
+      <p:sp>
+        <p:nvSpPr>
+          <p:cNvPr id="4" name="Rectangle 3"/>
           <p:cNvSpPr/>
           <p:nvPr/>
         </p:nvSpPr>
         <p:spPr>
           <a:xfrm>
-            <a:off x="457200" y="274320"/>
-            <a:ext cx="6400800" cy="914400"/>
+            <a:off x="457200" y="1371600"/>
+            <a:ext cx="8229600" cy="5212080"/>
           </a:xfrm>
           <a:prstGeom prst="rect">
             <a:avLst/>
@@ -15794,7 +14255,7 @@
           <a:solidFill>
             <a:srgbClr val="FFFFFF"/>
           </a:solidFill>
-          <a:ln w="25400">
+          <a:ln w="12700">
             <a:solidFill>
               <a:srgbClr val="008AD1"/>
             </a:solidFill>
@@ -15824,88 +14285,7 @@
       </p:sp>
       <p:sp>
         <p:nvSpPr>
-          <p:cNvPr id="5" name="Rectangle 4"/>
-          <p:cNvSpPr/>
-          <p:nvPr/>
-        </p:nvSpPr>
-        <p:spPr>
-          <a:xfrm>
-            <a:off x="457200" y="1371600"/>
-            <a:ext cx="8229600" cy="5212080"/>
-          </a:xfrm>
-          <a:prstGeom prst="rect">
-            <a:avLst/>
-          </a:prstGeom>
-          <a:solidFill>
-            <a:srgbClr val="FFFFFF"/>
-          </a:solidFill>
-          <a:ln w="12700">
-            <a:solidFill>
-              <a:srgbClr val="008AD1"/>
-            </a:solidFill>
-          </a:ln>
-        </p:spPr>
-        <p:style>
-          <a:lnRef idx="1">
-            <a:schemeClr val="accent1"/>
-          </a:lnRef>
-          <a:fillRef idx="3">
-            <a:schemeClr val="accent1"/>
-          </a:fillRef>
-          <a:effectRef idx="2">
-            <a:schemeClr val="accent1"/>
-          </a:effectRef>
-          <a:fontRef idx="minor">
-            <a:schemeClr val="lt1"/>
-          </a:fontRef>
-        </p:style>
-        <p:txBody>
-          <a:bodyPr rtlCol="0" anchor="ctr"/>
-          <a:lstStyle/>
-          <a:p>
-            <a:pPr algn="ctr"/>
-          </a:p>
-        </p:txBody>
-      </p:sp>
-      <p:sp>
-        <p:nvSpPr>
-          <p:cNvPr id="4" name="TextBox 3"/>
-          <p:cNvSpPr txBox="1"/>
-          <p:nvPr/>
-        </p:nvSpPr>
-        <p:spPr>
-          <a:xfrm>
-            <a:off x="457200" y="274320"/>
-            <a:ext cx="6400800" cy="914400"/>
-          </a:xfrm>
-          <a:prstGeom prst="rect">
-            <a:avLst/>
-          </a:prstGeom>
-          <a:noFill/>
-        </p:spPr>
-        <p:txBody>
-          <a:bodyPr wrap="square" anchor="ctr">
-            <a:spAutoFit/>
-          </a:bodyPr>
-          <a:lstStyle/>
-          <a:p>
-            <a:pPr algn="l">
-              <a:defRPr sz="3600" b="1">
-                <a:solidFill>
-                  <a:srgbClr val="008AD1"/>
-                </a:solidFill>
-                <a:latin typeface="Century Gothic"/>
-              </a:defRPr>
-            </a:pPr>
-            <a:r>
-              <a:t>SLIDE 41: CONTEÚDO (USE COMO BASE):</a:t>
-            </a:r>
-          </a:p>
-        </p:txBody>
-      </p:sp>
-      <p:sp>
-        <p:nvSpPr>
-          <p:cNvPr id="6" name="TextBox 5"/>
+          <p:cNvPr id="5" name="TextBox 4"/>
           <p:cNvSpPr txBox="1"/>
           <p:nvPr/>
         </p:nvSpPr>
@@ -16154,14 +14534,50 @@
       </p:pic>
       <p:sp>
         <p:nvSpPr>
-          <p:cNvPr id="3" name="Rectangle 2"/>
+          <p:cNvPr id="3" name="TextBox 2"/>
+          <p:cNvSpPr txBox="1"/>
+          <p:nvPr/>
+        </p:nvSpPr>
+        <p:spPr>
+          <a:xfrm>
+            <a:off x="457200" y="274320"/>
+            <a:ext cx="6400800" cy="914400"/>
+          </a:xfrm>
+          <a:prstGeom prst="rect">
+            <a:avLst/>
+          </a:prstGeom>
+          <a:noFill/>
+        </p:spPr>
+        <p:txBody>
+          <a:bodyPr wrap="square" anchor="ctr">
+            <a:spAutoFit/>
+          </a:bodyPr>
+          <a:lstStyle/>
+          <a:p>
+            <a:pPr algn="l">
+              <a:defRPr sz="3600" b="1">
+                <a:solidFill>
+                  <a:srgbClr val="008AD1"/>
+                </a:solidFill>
+                <a:latin typeface="Century Gothic"/>
+              </a:defRPr>
+            </a:pPr>
+            <a:r>
+              <a:t>SLIDE 42: REGRAS DE RESPOSTA:</a:t>
+            </a:r>
+          </a:p>
+        </p:txBody>
+      </p:sp>
+      <p:sp>
+        <p:nvSpPr>
+          <p:cNvPr id="4" name="Rectangle 3"/>
           <p:cNvSpPr/>
           <p:nvPr/>
         </p:nvSpPr>
         <p:spPr>
           <a:xfrm>
-            <a:off x="457200" y="274320"/>
-            <a:ext cx="6400800" cy="914400"/>
+            <a:off x="457200" y="1371600"/>
+            <a:ext cx="8229600" cy="5212080"/>
           </a:xfrm>
           <a:prstGeom prst="rect">
             <a:avLst/>
@@ -16169,7 +14585,7 @@
           <a:solidFill>
             <a:srgbClr val="FFFFFF"/>
           </a:solidFill>
-          <a:ln w="25400">
+          <a:ln w="12700">
             <a:solidFill>
               <a:srgbClr val="008AD1"/>
             </a:solidFill>
@@ -16199,88 +14615,7 @@
       </p:sp>
       <p:sp>
         <p:nvSpPr>
-          <p:cNvPr id="5" name="Rectangle 4"/>
-          <p:cNvSpPr/>
-          <p:nvPr/>
-        </p:nvSpPr>
-        <p:spPr>
-          <a:xfrm>
-            <a:off x="457200" y="1371600"/>
-            <a:ext cx="8229600" cy="5212080"/>
-          </a:xfrm>
-          <a:prstGeom prst="rect">
-            <a:avLst/>
-          </a:prstGeom>
-          <a:solidFill>
-            <a:srgbClr val="FFFFFF"/>
-          </a:solidFill>
-          <a:ln w="12700">
-            <a:solidFill>
-              <a:srgbClr val="008AD1"/>
-            </a:solidFill>
-          </a:ln>
-        </p:spPr>
-        <p:style>
-          <a:lnRef idx="1">
-            <a:schemeClr val="accent1"/>
-          </a:lnRef>
-          <a:fillRef idx="3">
-            <a:schemeClr val="accent1"/>
-          </a:fillRef>
-          <a:effectRef idx="2">
-            <a:schemeClr val="accent1"/>
-          </a:effectRef>
-          <a:fontRef idx="minor">
-            <a:schemeClr val="lt1"/>
-          </a:fontRef>
-        </p:style>
-        <p:txBody>
-          <a:bodyPr rtlCol="0" anchor="ctr"/>
-          <a:lstStyle/>
-          <a:p>
-            <a:pPr algn="ctr"/>
-          </a:p>
-        </p:txBody>
-      </p:sp>
-      <p:sp>
-        <p:nvSpPr>
-          <p:cNvPr id="4" name="TextBox 3"/>
-          <p:cNvSpPr txBox="1"/>
-          <p:nvPr/>
-        </p:nvSpPr>
-        <p:spPr>
-          <a:xfrm>
-            <a:off x="457200" y="274320"/>
-            <a:ext cx="6400800" cy="914400"/>
-          </a:xfrm>
-          <a:prstGeom prst="rect">
-            <a:avLst/>
-          </a:prstGeom>
-          <a:noFill/>
-        </p:spPr>
-        <p:txBody>
-          <a:bodyPr wrap="square" anchor="ctr">
-            <a:spAutoFit/>
-          </a:bodyPr>
-          <a:lstStyle/>
-          <a:p>
-            <a:pPr algn="l">
-              <a:defRPr sz="3600" b="1">
-                <a:solidFill>
-                  <a:srgbClr val="008AD1"/>
-                </a:solidFill>
-                <a:latin typeface="Century Gothic"/>
-              </a:defRPr>
-            </a:pPr>
-            <a:r>
-              <a:t>SLIDE 42: REGRAS DE RESPOSTA:</a:t>
-            </a:r>
-          </a:p>
-        </p:txBody>
-      </p:sp>
-      <p:sp>
-        <p:nvSpPr>
-          <p:cNvPr id="6" name="TextBox 5"/>
+          <p:cNvPr id="5" name="TextBox 4"/>
           <p:cNvSpPr txBox="1"/>
           <p:nvPr/>
         </p:nvSpPr>
@@ -16767,14 +15102,50 @@
       </p:pic>
       <p:sp>
         <p:nvSpPr>
-          <p:cNvPr id="3" name="Rectangle 2"/>
+          <p:cNvPr id="3" name="TextBox 2"/>
+          <p:cNvSpPr txBox="1"/>
+          <p:nvPr/>
+        </p:nvSpPr>
+        <p:spPr>
+          <a:xfrm>
+            <a:off x="457200" y="274320"/>
+            <a:ext cx="6400800" cy="914400"/>
+          </a:xfrm>
+          <a:prstGeom prst="rect">
+            <a:avLst/>
+          </a:prstGeom>
+          <a:noFill/>
+        </p:spPr>
+        <p:txBody>
+          <a:bodyPr wrap="square" anchor="ctr">
+            <a:spAutoFit/>
+          </a:bodyPr>
+          <a:lstStyle/>
+          <a:p>
+            <a:pPr algn="l">
+              <a:defRPr sz="3600" b="1">
+                <a:solidFill>
+                  <a:srgbClr val="008AD1"/>
+                </a:solidFill>
+                <a:latin typeface="Century Gothic"/>
+              </a:defRPr>
+            </a:pPr>
+            <a:r>
+              <a:t>SLIDE 43: Próximos Passos</a:t>
+            </a:r>
+          </a:p>
+        </p:txBody>
+      </p:sp>
+      <p:sp>
+        <p:nvSpPr>
+          <p:cNvPr id="4" name="Rectangle 3"/>
           <p:cNvSpPr/>
           <p:nvPr/>
         </p:nvSpPr>
         <p:spPr>
           <a:xfrm>
-            <a:off x="457200" y="274320"/>
-            <a:ext cx="6400800" cy="914400"/>
+            <a:off x="457200" y="1371600"/>
+            <a:ext cx="8229600" cy="5212080"/>
           </a:xfrm>
           <a:prstGeom prst="rect">
             <a:avLst/>
@@ -16782,7 +15153,7 @@
           <a:solidFill>
             <a:srgbClr val="FFFFFF"/>
           </a:solidFill>
-          <a:ln w="25400">
+          <a:ln w="12700">
             <a:solidFill>
               <a:srgbClr val="008AD1"/>
             </a:solidFill>
@@ -16812,88 +15183,7 @@
       </p:sp>
       <p:sp>
         <p:nvSpPr>
-          <p:cNvPr id="5" name="Rectangle 4"/>
-          <p:cNvSpPr/>
-          <p:nvPr/>
-        </p:nvSpPr>
-        <p:spPr>
-          <a:xfrm>
-            <a:off x="457200" y="1371600"/>
-            <a:ext cx="8229600" cy="5212080"/>
-          </a:xfrm>
-          <a:prstGeom prst="rect">
-            <a:avLst/>
-          </a:prstGeom>
-          <a:solidFill>
-            <a:srgbClr val="FFFFFF"/>
-          </a:solidFill>
-          <a:ln w="12700">
-            <a:solidFill>
-              <a:srgbClr val="008AD1"/>
-            </a:solidFill>
-          </a:ln>
-        </p:spPr>
-        <p:style>
-          <a:lnRef idx="1">
-            <a:schemeClr val="accent1"/>
-          </a:lnRef>
-          <a:fillRef idx="3">
-            <a:schemeClr val="accent1"/>
-          </a:fillRef>
-          <a:effectRef idx="2">
-            <a:schemeClr val="accent1"/>
-          </a:effectRef>
-          <a:fontRef idx="minor">
-            <a:schemeClr val="lt1"/>
-          </a:fontRef>
-        </p:style>
-        <p:txBody>
-          <a:bodyPr rtlCol="0" anchor="ctr"/>
-          <a:lstStyle/>
-          <a:p>
-            <a:pPr algn="ctr"/>
-          </a:p>
-        </p:txBody>
-      </p:sp>
-      <p:sp>
-        <p:nvSpPr>
-          <p:cNvPr id="4" name="TextBox 3"/>
-          <p:cNvSpPr txBox="1"/>
-          <p:nvPr/>
-        </p:nvSpPr>
-        <p:spPr>
-          <a:xfrm>
-            <a:off x="457200" y="274320"/>
-            <a:ext cx="6400800" cy="914400"/>
-          </a:xfrm>
-          <a:prstGeom prst="rect">
-            <a:avLst/>
-          </a:prstGeom>
-          <a:noFill/>
-        </p:spPr>
-        <p:txBody>
-          <a:bodyPr wrap="square" anchor="ctr">
-            <a:spAutoFit/>
-          </a:bodyPr>
-          <a:lstStyle/>
-          <a:p>
-            <a:pPr algn="l">
-              <a:defRPr sz="3600" b="1">
-                <a:solidFill>
-                  <a:srgbClr val="008AD1"/>
-                </a:solidFill>
-                <a:latin typeface="Century Gothic"/>
-              </a:defRPr>
-            </a:pPr>
-            <a:r>
-              <a:t>SLIDE 43: Próximos Passos</a:t>
-            </a:r>
-          </a:p>
-        </p:txBody>
-      </p:sp>
-      <p:sp>
-        <p:nvSpPr>
-          <p:cNvPr id="6" name="TextBox 5"/>
+          <p:cNvPr id="5" name="TextBox 4"/>
           <p:cNvSpPr txBox="1"/>
           <p:nvPr/>
         </p:nvSpPr>
@@ -18311,14 +16601,50 @@
       </p:pic>
       <p:sp>
         <p:nvSpPr>
-          <p:cNvPr id="3" name="Rectangle 2"/>
+          <p:cNvPr id="3" name="TextBox 2"/>
+          <p:cNvSpPr txBox="1"/>
+          <p:nvPr/>
+        </p:nvSpPr>
+        <p:spPr>
+          <a:xfrm>
+            <a:off x="457200" y="274320"/>
+            <a:ext cx="6400800" cy="914400"/>
+          </a:xfrm>
+          <a:prstGeom prst="rect">
+            <a:avLst/>
+          </a:prstGeom>
+          <a:noFill/>
+        </p:spPr>
+        <p:txBody>
+          <a:bodyPr wrap="square" anchor="ctr">
+            <a:spAutoFit/>
+          </a:bodyPr>
+          <a:lstStyle/>
+          <a:p>
+            <a:pPr algn="l">
+              <a:defRPr sz="3600" b="1">
+                <a:solidFill>
+                  <a:srgbClr val="008AD1"/>
+                </a:solidFill>
+                <a:latin typeface="Century Gothic"/>
+              </a:defRPr>
+            </a:pPr>
+            <a:r>
+              <a:t>SLIDE 44: ---</a:t>
+            </a:r>
+          </a:p>
+        </p:txBody>
+      </p:sp>
+      <p:sp>
+        <p:nvSpPr>
+          <p:cNvPr id="4" name="Rectangle 3"/>
           <p:cNvSpPr/>
           <p:nvPr/>
         </p:nvSpPr>
         <p:spPr>
           <a:xfrm>
-            <a:off x="457200" y="274320"/>
-            <a:ext cx="6400800" cy="914400"/>
+            <a:off x="457200" y="1371600"/>
+            <a:ext cx="8229600" cy="5212080"/>
           </a:xfrm>
           <a:prstGeom prst="rect">
             <a:avLst/>
@@ -18326,7 +16652,7 @@
           <a:solidFill>
             <a:srgbClr val="FFFFFF"/>
           </a:solidFill>
-          <a:ln w="25400">
+          <a:ln w="12700">
             <a:solidFill>
               <a:srgbClr val="008AD1"/>
             </a:solidFill>
@@ -18356,88 +16682,7 @@
       </p:sp>
       <p:sp>
         <p:nvSpPr>
-          <p:cNvPr id="5" name="Rectangle 4"/>
-          <p:cNvSpPr/>
-          <p:nvPr/>
-        </p:nvSpPr>
-        <p:spPr>
-          <a:xfrm>
-            <a:off x="457200" y="1371600"/>
-            <a:ext cx="8229600" cy="5212080"/>
-          </a:xfrm>
-          <a:prstGeom prst="rect">
-            <a:avLst/>
-          </a:prstGeom>
-          <a:solidFill>
-            <a:srgbClr val="FFFFFF"/>
-          </a:solidFill>
-          <a:ln w="12700">
-            <a:solidFill>
-              <a:srgbClr val="008AD1"/>
-            </a:solidFill>
-          </a:ln>
-        </p:spPr>
-        <p:style>
-          <a:lnRef idx="1">
-            <a:schemeClr val="accent1"/>
-          </a:lnRef>
-          <a:fillRef idx="3">
-            <a:schemeClr val="accent1"/>
-          </a:fillRef>
-          <a:effectRef idx="2">
-            <a:schemeClr val="accent1"/>
-          </a:effectRef>
-          <a:fontRef idx="minor">
-            <a:schemeClr val="lt1"/>
-          </a:fontRef>
-        </p:style>
-        <p:txBody>
-          <a:bodyPr rtlCol="0" anchor="ctr"/>
-          <a:lstStyle/>
-          <a:p>
-            <a:pPr algn="ctr"/>
-          </a:p>
-        </p:txBody>
-      </p:sp>
-      <p:sp>
-        <p:nvSpPr>
-          <p:cNvPr id="4" name="TextBox 3"/>
-          <p:cNvSpPr txBox="1"/>
-          <p:nvPr/>
-        </p:nvSpPr>
-        <p:spPr>
-          <a:xfrm>
-            <a:off x="457200" y="274320"/>
-            <a:ext cx="6400800" cy="914400"/>
-          </a:xfrm>
-          <a:prstGeom prst="rect">
-            <a:avLst/>
-          </a:prstGeom>
-          <a:noFill/>
-        </p:spPr>
-        <p:txBody>
-          <a:bodyPr wrap="square" anchor="ctr">
-            <a:spAutoFit/>
-          </a:bodyPr>
-          <a:lstStyle/>
-          <a:p>
-            <a:pPr algn="l">
-              <a:defRPr sz="3600" b="1">
-                <a:solidFill>
-                  <a:srgbClr val="008AD1"/>
-                </a:solidFill>
-                <a:latin typeface="Century Gothic"/>
-              </a:defRPr>
-            </a:pPr>
-            <a:r>
-              <a:t>SLIDE 44: ---</a:t>
-            </a:r>
-          </a:p>
-        </p:txBody>
-      </p:sp>
-      <p:sp>
-        <p:nvSpPr>
-          <p:cNvPr id="6" name="TextBox 5"/>
+          <p:cNvPr id="5" name="TextBox 4"/>
           <p:cNvSpPr txBox="1"/>
           <p:nvPr/>
         </p:nvSpPr>
@@ -18503,14 +16748,50 @@
       </p:pic>
       <p:sp>
         <p:nvSpPr>
-          <p:cNvPr id="3" name="Rectangle 2"/>
+          <p:cNvPr id="3" name="TextBox 2"/>
+          <p:cNvSpPr txBox="1"/>
+          <p:nvPr/>
+        </p:nvSpPr>
+        <p:spPr>
+          <a:xfrm>
+            <a:off x="457200" y="274320"/>
+            <a:ext cx="6400800" cy="914400"/>
+          </a:xfrm>
+          <a:prstGeom prst="rect">
+            <a:avLst/>
+          </a:prstGeom>
+          <a:noFill/>
+        </p:spPr>
+        <p:txBody>
+          <a:bodyPr wrap="square" anchor="ctr">
+            <a:spAutoFit/>
+          </a:bodyPr>
+          <a:lstStyle/>
+          <a:p>
+            <a:pPr algn="l">
+              <a:defRPr sz="3600" b="1">
+                <a:solidFill>
+                  <a:srgbClr val="008AD1"/>
+                </a:solidFill>
+                <a:latin typeface="Century Gothic"/>
+              </a:defRPr>
+            </a:pPr>
+            <a:r>
+              <a:t>SLIDE 45: ---</a:t>
+            </a:r>
+          </a:p>
+        </p:txBody>
+      </p:sp>
+      <p:sp>
+        <p:nvSpPr>
+          <p:cNvPr id="4" name="Rectangle 3"/>
           <p:cNvSpPr/>
           <p:nvPr/>
         </p:nvSpPr>
         <p:spPr>
           <a:xfrm>
-            <a:off x="457200" y="274320"/>
-            <a:ext cx="6400800" cy="914400"/>
+            <a:off x="457200" y="1371600"/>
+            <a:ext cx="8229600" cy="5212080"/>
           </a:xfrm>
           <a:prstGeom prst="rect">
             <a:avLst/>
@@ -18518,7 +16799,7 @@
           <a:solidFill>
             <a:srgbClr val="FFFFFF"/>
           </a:solidFill>
-          <a:ln w="25400">
+          <a:ln w="12700">
             <a:solidFill>
               <a:srgbClr val="008AD1"/>
             </a:solidFill>
@@ -18548,88 +16829,7 @@
       </p:sp>
       <p:sp>
         <p:nvSpPr>
-          <p:cNvPr id="5" name="Rectangle 4"/>
-          <p:cNvSpPr/>
-          <p:nvPr/>
-        </p:nvSpPr>
-        <p:spPr>
-          <a:xfrm>
-            <a:off x="457200" y="1371600"/>
-            <a:ext cx="8229600" cy="5212080"/>
-          </a:xfrm>
-          <a:prstGeom prst="rect">
-            <a:avLst/>
-          </a:prstGeom>
-          <a:solidFill>
-            <a:srgbClr val="FFFFFF"/>
-          </a:solidFill>
-          <a:ln w="12700">
-            <a:solidFill>
-              <a:srgbClr val="008AD1"/>
-            </a:solidFill>
-          </a:ln>
-        </p:spPr>
-        <p:style>
-          <a:lnRef idx="1">
-            <a:schemeClr val="accent1"/>
-          </a:lnRef>
-          <a:fillRef idx="3">
-            <a:schemeClr val="accent1"/>
-          </a:fillRef>
-          <a:effectRef idx="2">
-            <a:schemeClr val="accent1"/>
-          </a:effectRef>
-          <a:fontRef idx="minor">
-            <a:schemeClr val="lt1"/>
-          </a:fontRef>
-        </p:style>
-        <p:txBody>
-          <a:bodyPr rtlCol="0" anchor="ctr"/>
-          <a:lstStyle/>
-          <a:p>
-            <a:pPr algn="ctr"/>
-          </a:p>
-        </p:txBody>
-      </p:sp>
-      <p:sp>
-        <p:nvSpPr>
-          <p:cNvPr id="4" name="TextBox 3"/>
-          <p:cNvSpPr txBox="1"/>
-          <p:nvPr/>
-        </p:nvSpPr>
-        <p:spPr>
-          <a:xfrm>
-            <a:off x="457200" y="274320"/>
-            <a:ext cx="6400800" cy="914400"/>
-          </a:xfrm>
-          <a:prstGeom prst="rect">
-            <a:avLst/>
-          </a:prstGeom>
-          <a:noFill/>
-        </p:spPr>
-        <p:txBody>
-          <a:bodyPr wrap="square" anchor="ctr">
-            <a:spAutoFit/>
-          </a:bodyPr>
-          <a:lstStyle/>
-          <a:p>
-            <a:pPr algn="l">
-              <a:defRPr sz="3600" b="1">
-                <a:solidFill>
-                  <a:srgbClr val="008AD1"/>
-                </a:solidFill>
-                <a:latin typeface="Century Gothic"/>
-              </a:defRPr>
-            </a:pPr>
-            <a:r>
-              <a:t>SLIDE 45: ---</a:t>
-            </a:r>
-          </a:p>
-        </p:txBody>
-      </p:sp>
-      <p:sp>
-        <p:nvSpPr>
-          <p:cNvPr id="6" name="TextBox 5"/>
+          <p:cNvPr id="5" name="TextBox 4"/>
           <p:cNvSpPr txBox="1"/>
           <p:nvPr/>
         </p:nvSpPr>
@@ -18695,14 +16895,50 @@
       </p:pic>
       <p:sp>
         <p:nvSpPr>
-          <p:cNvPr id="3" name="Rectangle 2"/>
+          <p:cNvPr id="3" name="TextBox 2"/>
+          <p:cNvSpPr txBox="1"/>
+          <p:nvPr/>
+        </p:nvSpPr>
+        <p:spPr>
+          <a:xfrm>
+            <a:off x="457200" y="274320"/>
+            <a:ext cx="6400800" cy="914400"/>
+          </a:xfrm>
+          <a:prstGeom prst="rect">
+            <a:avLst/>
+          </a:prstGeom>
+          <a:noFill/>
+        </p:spPr>
+        <p:txBody>
+          <a:bodyPr wrap="square" anchor="ctr">
+            <a:spAutoFit/>
+          </a:bodyPr>
+          <a:lstStyle/>
+          <a:p>
+            <a:pPr algn="l">
+              <a:defRPr sz="3600" b="1">
+                <a:solidFill>
+                  <a:srgbClr val="008AD1"/>
+                </a:solidFill>
+                <a:latin typeface="Century Gothic"/>
+              </a:defRPr>
+            </a:pPr>
+            <a:r>
+              <a:t>SLIDE 46: ---</a:t>
+            </a:r>
+          </a:p>
+        </p:txBody>
+      </p:sp>
+      <p:sp>
+        <p:nvSpPr>
+          <p:cNvPr id="4" name="Rectangle 3"/>
           <p:cNvSpPr/>
           <p:nvPr/>
         </p:nvSpPr>
         <p:spPr>
           <a:xfrm>
-            <a:off x="457200" y="274320"/>
-            <a:ext cx="6400800" cy="914400"/>
+            <a:off x="457200" y="1371600"/>
+            <a:ext cx="8229600" cy="5212080"/>
           </a:xfrm>
           <a:prstGeom prst="rect">
             <a:avLst/>
@@ -18710,7 +16946,7 @@
           <a:solidFill>
             <a:srgbClr val="FFFFFF"/>
           </a:solidFill>
-          <a:ln w="25400">
+          <a:ln w="12700">
             <a:solidFill>
               <a:srgbClr val="008AD1"/>
             </a:solidFill>
@@ -18740,88 +16976,7 @@
       </p:sp>
       <p:sp>
         <p:nvSpPr>
-          <p:cNvPr id="5" name="Rectangle 4"/>
-          <p:cNvSpPr/>
-          <p:nvPr/>
-        </p:nvSpPr>
-        <p:spPr>
-          <a:xfrm>
-            <a:off x="457200" y="1371600"/>
-            <a:ext cx="8229600" cy="5212080"/>
-          </a:xfrm>
-          <a:prstGeom prst="rect">
-            <a:avLst/>
-          </a:prstGeom>
-          <a:solidFill>
-            <a:srgbClr val="FFFFFF"/>
-          </a:solidFill>
-          <a:ln w="12700">
-            <a:solidFill>
-              <a:srgbClr val="008AD1"/>
-            </a:solidFill>
-          </a:ln>
-        </p:spPr>
-        <p:style>
-          <a:lnRef idx="1">
-            <a:schemeClr val="accent1"/>
-          </a:lnRef>
-          <a:fillRef idx="3">
-            <a:schemeClr val="accent1"/>
-          </a:fillRef>
-          <a:effectRef idx="2">
-            <a:schemeClr val="accent1"/>
-          </a:effectRef>
-          <a:fontRef idx="minor">
-            <a:schemeClr val="lt1"/>
-          </a:fontRef>
-        </p:style>
-        <p:txBody>
-          <a:bodyPr rtlCol="0" anchor="ctr"/>
-          <a:lstStyle/>
-          <a:p>
-            <a:pPr algn="ctr"/>
-          </a:p>
-        </p:txBody>
-      </p:sp>
-      <p:sp>
-        <p:nvSpPr>
-          <p:cNvPr id="4" name="TextBox 3"/>
-          <p:cNvSpPr txBox="1"/>
-          <p:nvPr/>
-        </p:nvSpPr>
-        <p:spPr>
-          <a:xfrm>
-            <a:off x="457200" y="274320"/>
-            <a:ext cx="6400800" cy="914400"/>
-          </a:xfrm>
-          <a:prstGeom prst="rect">
-            <a:avLst/>
-          </a:prstGeom>
-          <a:noFill/>
-        </p:spPr>
-        <p:txBody>
-          <a:bodyPr wrap="square" anchor="ctr">
-            <a:spAutoFit/>
-          </a:bodyPr>
-          <a:lstStyle/>
-          <a:p>
-            <a:pPr algn="l">
-              <a:defRPr sz="3600" b="1">
-                <a:solidFill>
-                  <a:srgbClr val="008AD1"/>
-                </a:solidFill>
-                <a:latin typeface="Century Gothic"/>
-              </a:defRPr>
-            </a:pPr>
-            <a:r>
-              <a:t>SLIDE 46: ---</a:t>
-            </a:r>
-          </a:p>
-        </p:txBody>
-      </p:sp>
-      <p:sp>
-        <p:nvSpPr>
-          <p:cNvPr id="6" name="TextBox 5"/>
+          <p:cNvPr id="5" name="TextBox 4"/>
           <p:cNvSpPr txBox="1"/>
           <p:nvPr/>
         </p:nvSpPr>
@@ -18887,14 +17042,50 @@
       </p:pic>
       <p:sp>
         <p:nvSpPr>
-          <p:cNvPr id="3" name="Rectangle 2"/>
+          <p:cNvPr id="3" name="TextBox 2"/>
+          <p:cNvSpPr txBox="1"/>
+          <p:nvPr/>
+        </p:nvSpPr>
+        <p:spPr>
+          <a:xfrm>
+            <a:off x="457200" y="274320"/>
+            <a:ext cx="6400800" cy="914400"/>
+          </a:xfrm>
+          <a:prstGeom prst="rect">
+            <a:avLst/>
+          </a:prstGeom>
+          <a:noFill/>
+        </p:spPr>
+        <p:txBody>
+          <a:bodyPr wrap="square" anchor="ctr">
+            <a:spAutoFit/>
+          </a:bodyPr>
+          <a:lstStyle/>
+          <a:p>
+            <a:pPr algn="l">
+              <a:defRPr sz="3600" b="1">
+                <a:solidFill>
+                  <a:srgbClr val="008AD1"/>
+                </a:solidFill>
+                <a:latin typeface="Century Gothic"/>
+              </a:defRPr>
+            </a:pPr>
+            <a:r>
+              <a:t>SLIDE 47: Atividade Prática: Criação de Gems (Google)</a:t>
+            </a:r>
+          </a:p>
+        </p:txBody>
+      </p:sp>
+      <p:sp>
+        <p:nvSpPr>
+          <p:cNvPr id="4" name="Rectangle 3"/>
           <p:cNvSpPr/>
           <p:nvPr/>
         </p:nvSpPr>
         <p:spPr>
           <a:xfrm>
-            <a:off x="457200" y="274320"/>
-            <a:ext cx="6400800" cy="914400"/>
+            <a:off x="457200" y="1371600"/>
+            <a:ext cx="8229600" cy="5212080"/>
           </a:xfrm>
           <a:prstGeom prst="rect">
             <a:avLst/>
@@ -18902,7 +17093,7 @@
           <a:solidFill>
             <a:srgbClr val="FFFFFF"/>
           </a:solidFill>
-          <a:ln w="25400">
+          <a:ln w="12700">
             <a:solidFill>
               <a:srgbClr val="008AD1"/>
             </a:solidFill>
@@ -18932,88 +17123,7 @@
       </p:sp>
       <p:sp>
         <p:nvSpPr>
-          <p:cNvPr id="5" name="Rectangle 4"/>
-          <p:cNvSpPr/>
-          <p:nvPr/>
-        </p:nvSpPr>
-        <p:spPr>
-          <a:xfrm>
-            <a:off x="457200" y="1371600"/>
-            <a:ext cx="8229600" cy="5212080"/>
-          </a:xfrm>
-          <a:prstGeom prst="rect">
-            <a:avLst/>
-          </a:prstGeom>
-          <a:solidFill>
-            <a:srgbClr val="FFFFFF"/>
-          </a:solidFill>
-          <a:ln w="12700">
-            <a:solidFill>
-              <a:srgbClr val="008AD1"/>
-            </a:solidFill>
-          </a:ln>
-        </p:spPr>
-        <p:style>
-          <a:lnRef idx="1">
-            <a:schemeClr val="accent1"/>
-          </a:lnRef>
-          <a:fillRef idx="3">
-            <a:schemeClr val="accent1"/>
-          </a:fillRef>
-          <a:effectRef idx="2">
-            <a:schemeClr val="accent1"/>
-          </a:effectRef>
-          <a:fontRef idx="minor">
-            <a:schemeClr val="lt1"/>
-          </a:fontRef>
-        </p:style>
-        <p:txBody>
-          <a:bodyPr rtlCol="0" anchor="ctr"/>
-          <a:lstStyle/>
-          <a:p>
-            <a:pPr algn="ctr"/>
-          </a:p>
-        </p:txBody>
-      </p:sp>
-      <p:sp>
-        <p:nvSpPr>
-          <p:cNvPr id="4" name="TextBox 3"/>
-          <p:cNvSpPr txBox="1"/>
-          <p:nvPr/>
-        </p:nvSpPr>
-        <p:spPr>
-          <a:xfrm>
-            <a:off x="457200" y="274320"/>
-            <a:ext cx="6400800" cy="914400"/>
-          </a:xfrm>
-          <a:prstGeom prst="rect">
-            <a:avLst/>
-          </a:prstGeom>
-          <a:noFill/>
-        </p:spPr>
-        <p:txBody>
-          <a:bodyPr wrap="square" anchor="ctr">
-            <a:spAutoFit/>
-          </a:bodyPr>
-          <a:lstStyle/>
-          <a:p>
-            <a:pPr algn="l">
-              <a:defRPr sz="3600" b="1">
-                <a:solidFill>
-                  <a:srgbClr val="008AD1"/>
-                </a:solidFill>
-                <a:latin typeface="Century Gothic"/>
-              </a:defRPr>
-            </a:pPr>
-            <a:r>
-              <a:t>SLIDE 47: Atividade Prática: Criação de Gems (Google)</a:t>
-            </a:r>
-          </a:p>
-        </p:txBody>
-      </p:sp>
-      <p:sp>
-        <p:nvSpPr>
-          <p:cNvPr id="6" name="TextBox 5"/>
+          <p:cNvPr id="5" name="TextBox 4"/>
           <p:cNvSpPr txBox="1"/>
           <p:nvPr/>
         </p:nvSpPr>
@@ -20003,14 +18113,50 @@
       </p:pic>
       <p:sp>
         <p:nvSpPr>
-          <p:cNvPr id="3" name="Rectangle 2"/>
+          <p:cNvPr id="3" name="TextBox 2"/>
+          <p:cNvSpPr txBox="1"/>
+          <p:nvPr/>
+        </p:nvSpPr>
+        <p:spPr>
+          <a:xfrm>
+            <a:off x="457200" y="274320"/>
+            <a:ext cx="6400800" cy="914400"/>
+          </a:xfrm>
+          <a:prstGeom prst="rect">
+            <a:avLst/>
+          </a:prstGeom>
+          <a:noFill/>
+        </p:spPr>
+        <p:txBody>
+          <a:bodyPr wrap="square" anchor="ctr">
+            <a:spAutoFit/>
+          </a:bodyPr>
+          <a:lstStyle/>
+          <a:p>
+            <a:pPr algn="l">
+              <a:defRPr sz="3600" b="1">
+                <a:solidFill>
+                  <a:srgbClr val="008AD1"/>
+                </a:solidFill>
+                <a:latin typeface="Century Gothic"/>
+              </a:defRPr>
+            </a:pPr>
+            <a:r>
+              <a:t>SLIDE 48: Encerramento!</a:t>
+            </a:r>
+          </a:p>
+        </p:txBody>
+      </p:sp>
+      <p:sp>
+        <p:nvSpPr>
+          <p:cNvPr id="4" name="Rectangle 3"/>
           <p:cNvSpPr/>
           <p:nvPr/>
         </p:nvSpPr>
         <p:spPr>
           <a:xfrm>
-            <a:off x="457200" y="274320"/>
-            <a:ext cx="6400800" cy="914400"/>
+            <a:off x="457200" y="1371600"/>
+            <a:ext cx="8229600" cy="5212080"/>
           </a:xfrm>
           <a:prstGeom prst="rect">
             <a:avLst/>
@@ -20018,7 +18164,7 @@
           <a:solidFill>
             <a:srgbClr val="FFFFFF"/>
           </a:solidFill>
-          <a:ln w="25400">
+          <a:ln w="12700">
             <a:solidFill>
               <a:srgbClr val="008AD1"/>
             </a:solidFill>
@@ -20048,88 +18194,7 @@
       </p:sp>
       <p:sp>
         <p:nvSpPr>
-          <p:cNvPr id="5" name="Rectangle 4"/>
-          <p:cNvSpPr/>
-          <p:nvPr/>
-        </p:nvSpPr>
-        <p:spPr>
-          <a:xfrm>
-            <a:off x="457200" y="1371600"/>
-            <a:ext cx="8229600" cy="5212080"/>
-          </a:xfrm>
-          <a:prstGeom prst="rect">
-            <a:avLst/>
-          </a:prstGeom>
-          <a:solidFill>
-            <a:srgbClr val="FFFFFF"/>
-          </a:solidFill>
-          <a:ln w="12700">
-            <a:solidFill>
-              <a:srgbClr val="008AD1"/>
-            </a:solidFill>
-          </a:ln>
-        </p:spPr>
-        <p:style>
-          <a:lnRef idx="1">
-            <a:schemeClr val="accent1"/>
-          </a:lnRef>
-          <a:fillRef idx="3">
-            <a:schemeClr val="accent1"/>
-          </a:fillRef>
-          <a:effectRef idx="2">
-            <a:schemeClr val="accent1"/>
-          </a:effectRef>
-          <a:fontRef idx="minor">
-            <a:schemeClr val="lt1"/>
-          </a:fontRef>
-        </p:style>
-        <p:txBody>
-          <a:bodyPr rtlCol="0" anchor="ctr"/>
-          <a:lstStyle/>
-          <a:p>
-            <a:pPr algn="ctr"/>
-          </a:p>
-        </p:txBody>
-      </p:sp>
-      <p:sp>
-        <p:nvSpPr>
-          <p:cNvPr id="4" name="TextBox 3"/>
-          <p:cNvSpPr txBox="1"/>
-          <p:nvPr/>
-        </p:nvSpPr>
-        <p:spPr>
-          <a:xfrm>
-            <a:off x="457200" y="274320"/>
-            <a:ext cx="6400800" cy="914400"/>
-          </a:xfrm>
-          <a:prstGeom prst="rect">
-            <a:avLst/>
-          </a:prstGeom>
-          <a:noFill/>
-        </p:spPr>
-        <p:txBody>
-          <a:bodyPr wrap="square" anchor="ctr">
-            <a:spAutoFit/>
-          </a:bodyPr>
-          <a:lstStyle/>
-          <a:p>
-            <a:pPr algn="l">
-              <a:defRPr sz="3600" b="1">
-                <a:solidFill>
-                  <a:srgbClr val="008AD1"/>
-                </a:solidFill>
-                <a:latin typeface="Century Gothic"/>
-              </a:defRPr>
-            </a:pPr>
-            <a:r>
-              <a:t>SLIDE 48: Encerramento!</a:t>
-            </a:r>
-          </a:p>
-        </p:txBody>
-      </p:sp>
-      <p:sp>
-        <p:nvSpPr>
-          <p:cNvPr id="6" name="TextBox 5"/>
+          <p:cNvPr id="5" name="TextBox 4"/>
           <p:cNvSpPr txBox="1"/>
           <p:nvPr/>
         </p:nvSpPr>
@@ -20248,14 +18313,50 @@
       </p:pic>
       <p:sp>
         <p:nvSpPr>
-          <p:cNvPr id="3" name="Rectangle 2"/>
+          <p:cNvPr id="3" name="TextBox 2"/>
+          <p:cNvSpPr txBox="1"/>
+          <p:nvPr/>
+        </p:nvSpPr>
+        <p:spPr>
+          <a:xfrm>
+            <a:off x="457200" y="274320"/>
+            <a:ext cx="6400800" cy="914400"/>
+          </a:xfrm>
+          <a:prstGeom prst="rect">
+            <a:avLst/>
+          </a:prstGeom>
+          <a:noFill/>
+        </p:spPr>
+        <p:txBody>
+          <a:bodyPr wrap="square" anchor="ctr">
+            <a:spAutoFit/>
+          </a:bodyPr>
+          <a:lstStyle/>
+          <a:p>
+            <a:pPr algn="l">
+              <a:defRPr sz="3600" b="1">
+                <a:solidFill>
+                  <a:srgbClr val="008AD1"/>
+                </a:solidFill>
+                <a:latin typeface="Century Gothic"/>
+              </a:defRPr>
+            </a:pPr>
+            <a:r>
+              <a:t>SLIDE 04: Apresentação</a:t>
+            </a:r>
+          </a:p>
+        </p:txBody>
+      </p:sp>
+      <p:sp>
+        <p:nvSpPr>
+          <p:cNvPr id="4" name="Rectangle 3"/>
           <p:cNvSpPr/>
           <p:nvPr/>
         </p:nvSpPr>
         <p:spPr>
           <a:xfrm>
-            <a:off x="457200" y="274320"/>
-            <a:ext cx="6400800" cy="914400"/>
+            <a:off x="457200" y="1371600"/>
+            <a:ext cx="8229600" cy="5212080"/>
           </a:xfrm>
           <a:prstGeom prst="rect">
             <a:avLst/>
@@ -20263,7 +18364,7 @@
           <a:solidFill>
             <a:srgbClr val="FFFFFF"/>
           </a:solidFill>
-          <a:ln w="25400">
+          <a:ln w="12700">
             <a:solidFill>
               <a:srgbClr val="008AD1"/>
             </a:solidFill>
@@ -20293,88 +18394,7 @@
       </p:sp>
       <p:sp>
         <p:nvSpPr>
-          <p:cNvPr id="5" name="Rectangle 4"/>
-          <p:cNvSpPr/>
-          <p:nvPr/>
-        </p:nvSpPr>
-        <p:spPr>
-          <a:xfrm>
-            <a:off x="457200" y="1371600"/>
-            <a:ext cx="8229600" cy="5212080"/>
-          </a:xfrm>
-          <a:prstGeom prst="rect">
-            <a:avLst/>
-          </a:prstGeom>
-          <a:solidFill>
-            <a:srgbClr val="FFFFFF"/>
-          </a:solidFill>
-          <a:ln w="12700">
-            <a:solidFill>
-              <a:srgbClr val="008AD1"/>
-            </a:solidFill>
-          </a:ln>
-        </p:spPr>
-        <p:style>
-          <a:lnRef idx="1">
-            <a:schemeClr val="accent1"/>
-          </a:lnRef>
-          <a:fillRef idx="3">
-            <a:schemeClr val="accent1"/>
-          </a:fillRef>
-          <a:effectRef idx="2">
-            <a:schemeClr val="accent1"/>
-          </a:effectRef>
-          <a:fontRef idx="minor">
-            <a:schemeClr val="lt1"/>
-          </a:fontRef>
-        </p:style>
-        <p:txBody>
-          <a:bodyPr rtlCol="0" anchor="ctr"/>
-          <a:lstStyle/>
-          <a:p>
-            <a:pPr algn="ctr"/>
-          </a:p>
-        </p:txBody>
-      </p:sp>
-      <p:sp>
-        <p:nvSpPr>
-          <p:cNvPr id="4" name="TextBox 3"/>
-          <p:cNvSpPr txBox="1"/>
-          <p:nvPr/>
-        </p:nvSpPr>
-        <p:spPr>
-          <a:xfrm>
-            <a:off x="457200" y="274320"/>
-            <a:ext cx="6400800" cy="914400"/>
-          </a:xfrm>
-          <a:prstGeom prst="rect">
-            <a:avLst/>
-          </a:prstGeom>
-          <a:noFill/>
-        </p:spPr>
-        <p:txBody>
-          <a:bodyPr wrap="square" anchor="ctr">
-            <a:spAutoFit/>
-          </a:bodyPr>
-          <a:lstStyle/>
-          <a:p>
-            <a:pPr algn="l">
-              <a:defRPr sz="3600" b="1">
-                <a:solidFill>
-                  <a:srgbClr val="008AD1"/>
-                </a:solidFill>
-                <a:latin typeface="Century Gothic"/>
-              </a:defRPr>
-            </a:pPr>
-            <a:r>
-              <a:t>SLIDE 04: Apresentação</a:t>
-            </a:r>
-          </a:p>
-        </p:txBody>
-      </p:sp>
-      <p:sp>
-        <p:nvSpPr>
-          <p:cNvPr id="6" name="TextBox 5"/>
+          <p:cNvPr id="5" name="TextBox 4"/>
           <p:cNvSpPr txBox="1"/>
           <p:nvPr/>
         </p:nvSpPr>
@@ -20735,14 +18755,50 @@
       </p:pic>
       <p:sp>
         <p:nvSpPr>
-          <p:cNvPr id="3" name="Rectangle 2"/>
+          <p:cNvPr id="3" name="TextBox 2"/>
+          <p:cNvSpPr txBox="1"/>
+          <p:nvPr/>
+        </p:nvSpPr>
+        <p:spPr>
+          <a:xfrm>
+            <a:off x="457200" y="274320"/>
+            <a:ext cx="6400800" cy="914400"/>
+          </a:xfrm>
+          <a:prstGeom prst="rect">
+            <a:avLst/>
+          </a:prstGeom>
+          <a:noFill/>
+        </p:spPr>
+        <p:txBody>
+          <a:bodyPr wrap="square" anchor="ctr">
+            <a:spAutoFit/>
+          </a:bodyPr>
+          <a:lstStyle/>
+          <a:p>
+            <a:pPr algn="l">
+              <a:defRPr sz="3600" b="1">
+                <a:solidFill>
+                  <a:srgbClr val="008AD1"/>
+                </a:solidFill>
+                <a:latin typeface="Century Gothic"/>
+              </a:defRPr>
+            </a:pPr>
+            <a:r>
+              <a:t>SLIDE 49: ---</a:t>
+            </a:r>
+          </a:p>
+        </p:txBody>
+      </p:sp>
+      <p:sp>
+        <p:nvSpPr>
+          <p:cNvPr id="4" name="Rectangle 3"/>
           <p:cNvSpPr/>
           <p:nvPr/>
         </p:nvSpPr>
         <p:spPr>
           <a:xfrm>
-            <a:off x="457200" y="274320"/>
-            <a:ext cx="6400800" cy="914400"/>
+            <a:off x="457200" y="1371600"/>
+            <a:ext cx="8229600" cy="5212080"/>
           </a:xfrm>
           <a:prstGeom prst="rect">
             <a:avLst/>
@@ -20750,7 +18806,7 @@
           <a:solidFill>
             <a:srgbClr val="FFFFFF"/>
           </a:solidFill>
-          <a:ln w="25400">
+          <a:ln w="12700">
             <a:solidFill>
               <a:srgbClr val="008AD1"/>
             </a:solidFill>
@@ -20780,88 +18836,7 @@
       </p:sp>
       <p:sp>
         <p:nvSpPr>
-          <p:cNvPr id="5" name="Rectangle 4"/>
-          <p:cNvSpPr/>
-          <p:nvPr/>
-        </p:nvSpPr>
-        <p:spPr>
-          <a:xfrm>
-            <a:off x="457200" y="1371600"/>
-            <a:ext cx="8229600" cy="5212080"/>
-          </a:xfrm>
-          <a:prstGeom prst="rect">
-            <a:avLst/>
-          </a:prstGeom>
-          <a:solidFill>
-            <a:srgbClr val="FFFFFF"/>
-          </a:solidFill>
-          <a:ln w="12700">
-            <a:solidFill>
-              <a:srgbClr val="008AD1"/>
-            </a:solidFill>
-          </a:ln>
-        </p:spPr>
-        <p:style>
-          <a:lnRef idx="1">
-            <a:schemeClr val="accent1"/>
-          </a:lnRef>
-          <a:fillRef idx="3">
-            <a:schemeClr val="accent1"/>
-          </a:fillRef>
-          <a:effectRef idx="2">
-            <a:schemeClr val="accent1"/>
-          </a:effectRef>
-          <a:fontRef idx="minor">
-            <a:schemeClr val="lt1"/>
-          </a:fontRef>
-        </p:style>
-        <p:txBody>
-          <a:bodyPr rtlCol="0" anchor="ctr"/>
-          <a:lstStyle/>
-          <a:p>
-            <a:pPr algn="ctr"/>
-          </a:p>
-        </p:txBody>
-      </p:sp>
-      <p:sp>
-        <p:nvSpPr>
-          <p:cNvPr id="4" name="TextBox 3"/>
-          <p:cNvSpPr txBox="1"/>
-          <p:nvPr/>
-        </p:nvSpPr>
-        <p:spPr>
-          <a:xfrm>
-            <a:off x="457200" y="274320"/>
-            <a:ext cx="6400800" cy="914400"/>
-          </a:xfrm>
-          <a:prstGeom prst="rect">
-            <a:avLst/>
-          </a:prstGeom>
-          <a:noFill/>
-        </p:spPr>
-        <p:txBody>
-          <a:bodyPr wrap="square" anchor="ctr">
-            <a:spAutoFit/>
-          </a:bodyPr>
-          <a:lstStyle/>
-          <a:p>
-            <a:pPr algn="l">
-              <a:defRPr sz="3600" b="1">
-                <a:solidFill>
-                  <a:srgbClr val="008AD1"/>
-                </a:solidFill>
-                <a:latin typeface="Century Gothic"/>
-              </a:defRPr>
-            </a:pPr>
-            <a:r>
-              <a:t>SLIDE 49: ---</a:t>
-            </a:r>
-          </a:p>
-        </p:txBody>
-      </p:sp>
-      <p:sp>
-        <p:nvSpPr>
-          <p:cNvPr id="6" name="TextBox 5"/>
+          <p:cNvPr id="5" name="TextBox 4"/>
           <p:cNvSpPr txBox="1"/>
           <p:nvPr/>
         </p:nvSpPr>
@@ -20927,14 +18902,50 @@
       </p:pic>
       <p:sp>
         <p:nvSpPr>
-          <p:cNvPr id="3" name="Rectangle 2"/>
+          <p:cNvPr id="3" name="TextBox 2"/>
+          <p:cNvSpPr txBox="1"/>
+          <p:nvPr/>
+        </p:nvSpPr>
+        <p:spPr>
+          <a:xfrm>
+            <a:off x="457200" y="274320"/>
+            <a:ext cx="6400800" cy="914400"/>
+          </a:xfrm>
+          <a:prstGeom prst="rect">
+            <a:avLst/>
+          </a:prstGeom>
+          <a:noFill/>
+        </p:spPr>
+        <p:txBody>
+          <a:bodyPr wrap="square" anchor="ctr">
+            <a:spAutoFit/>
+          </a:bodyPr>
+          <a:lstStyle/>
+          <a:p>
+            <a:pPr algn="l">
+              <a:defRPr sz="3600" b="1">
+                <a:solidFill>
+                  <a:srgbClr val="008AD1"/>
+                </a:solidFill>
+                <a:latin typeface="Century Gothic"/>
+              </a:defRPr>
+            </a:pPr>
+            <a:r>
+              <a:t>SLIDE 50: Referências Finais — Próximos Passos</a:t>
+            </a:r>
+          </a:p>
+        </p:txBody>
+      </p:sp>
+      <p:sp>
+        <p:nvSpPr>
+          <p:cNvPr id="4" name="Rectangle 3"/>
           <p:cNvSpPr/>
           <p:nvPr/>
         </p:nvSpPr>
         <p:spPr>
           <a:xfrm>
-            <a:off x="457200" y="274320"/>
-            <a:ext cx="6400800" cy="914400"/>
+            <a:off x="457200" y="1371600"/>
+            <a:ext cx="8229600" cy="5212080"/>
           </a:xfrm>
           <a:prstGeom prst="rect">
             <a:avLst/>
@@ -20942,7 +18953,7 @@
           <a:solidFill>
             <a:srgbClr val="FFFFFF"/>
           </a:solidFill>
-          <a:ln w="25400">
+          <a:ln w="12700">
             <a:solidFill>
               <a:srgbClr val="008AD1"/>
             </a:solidFill>
@@ -20972,88 +18983,7 @@
       </p:sp>
       <p:sp>
         <p:nvSpPr>
-          <p:cNvPr id="5" name="Rectangle 4"/>
-          <p:cNvSpPr/>
-          <p:nvPr/>
-        </p:nvSpPr>
-        <p:spPr>
-          <a:xfrm>
-            <a:off x="457200" y="1371600"/>
-            <a:ext cx="8229600" cy="5212080"/>
-          </a:xfrm>
-          <a:prstGeom prst="rect">
-            <a:avLst/>
-          </a:prstGeom>
-          <a:solidFill>
-            <a:srgbClr val="FFFFFF"/>
-          </a:solidFill>
-          <a:ln w="12700">
-            <a:solidFill>
-              <a:srgbClr val="008AD1"/>
-            </a:solidFill>
-          </a:ln>
-        </p:spPr>
-        <p:style>
-          <a:lnRef idx="1">
-            <a:schemeClr val="accent1"/>
-          </a:lnRef>
-          <a:fillRef idx="3">
-            <a:schemeClr val="accent1"/>
-          </a:fillRef>
-          <a:effectRef idx="2">
-            <a:schemeClr val="accent1"/>
-          </a:effectRef>
-          <a:fontRef idx="minor">
-            <a:schemeClr val="lt1"/>
-          </a:fontRef>
-        </p:style>
-        <p:txBody>
-          <a:bodyPr rtlCol="0" anchor="ctr"/>
-          <a:lstStyle/>
-          <a:p>
-            <a:pPr algn="ctr"/>
-          </a:p>
-        </p:txBody>
-      </p:sp>
-      <p:sp>
-        <p:nvSpPr>
-          <p:cNvPr id="4" name="TextBox 3"/>
-          <p:cNvSpPr txBox="1"/>
-          <p:nvPr/>
-        </p:nvSpPr>
-        <p:spPr>
-          <a:xfrm>
-            <a:off x="457200" y="274320"/>
-            <a:ext cx="6400800" cy="914400"/>
-          </a:xfrm>
-          <a:prstGeom prst="rect">
-            <a:avLst/>
-          </a:prstGeom>
-          <a:noFill/>
-        </p:spPr>
-        <p:txBody>
-          <a:bodyPr wrap="square" anchor="ctr">
-            <a:spAutoFit/>
-          </a:bodyPr>
-          <a:lstStyle/>
-          <a:p>
-            <a:pPr algn="l">
-              <a:defRPr sz="3600" b="1">
-                <a:solidFill>
-                  <a:srgbClr val="008AD1"/>
-                </a:solidFill>
-                <a:latin typeface="Century Gothic"/>
-              </a:defRPr>
-            </a:pPr>
-            <a:r>
-              <a:t>SLIDE 50: Referências Finais — Próximos Passos</a:t>
-            </a:r>
-          </a:p>
-        </p:txBody>
-      </p:sp>
-      <p:sp>
-        <p:nvSpPr>
-          <p:cNvPr id="6" name="TextBox 5"/>
+          <p:cNvPr id="5" name="TextBox 4"/>
           <p:cNvSpPr txBox="1"/>
           <p:nvPr/>
         </p:nvSpPr>
@@ -22758,14 +20688,50 @@
       </p:pic>
       <p:sp>
         <p:nvSpPr>
-          <p:cNvPr id="3" name="Rectangle 2"/>
+          <p:cNvPr id="3" name="TextBox 2"/>
+          <p:cNvSpPr txBox="1"/>
+          <p:nvPr/>
+        </p:nvSpPr>
+        <p:spPr>
+          <a:xfrm>
+            <a:off x="457200" y="274320"/>
+            <a:ext cx="6400800" cy="914400"/>
+          </a:xfrm>
+          <a:prstGeom prst="rect">
+            <a:avLst/>
+          </a:prstGeom>
+          <a:noFill/>
+        </p:spPr>
+        <p:txBody>
+          <a:bodyPr wrap="square" anchor="ctr">
+            <a:spAutoFit/>
+          </a:bodyPr>
+          <a:lstStyle/>
+          <a:p>
+            <a:pPr algn="l">
+              <a:defRPr sz="3600" b="1">
+                <a:solidFill>
+                  <a:srgbClr val="008AD1"/>
+                </a:solidFill>
+                <a:latin typeface="Century Gothic"/>
+              </a:defRPr>
+            </a:pPr>
+            <a:r>
+              <a:t>SLIDE 05: Agenda</a:t>
+            </a:r>
+          </a:p>
+        </p:txBody>
+      </p:sp>
+      <p:sp>
+        <p:nvSpPr>
+          <p:cNvPr id="4" name="Rectangle 3"/>
           <p:cNvSpPr/>
           <p:nvPr/>
         </p:nvSpPr>
         <p:spPr>
           <a:xfrm>
-            <a:off x="457200" y="274320"/>
-            <a:ext cx="6400800" cy="914400"/>
+            <a:off x="457200" y="1371600"/>
+            <a:ext cx="8229600" cy="5212080"/>
           </a:xfrm>
           <a:prstGeom prst="rect">
             <a:avLst/>
@@ -22773,7 +20739,7 @@
           <a:solidFill>
             <a:srgbClr val="FFFFFF"/>
           </a:solidFill>
-          <a:ln w="25400">
+          <a:ln w="12700">
             <a:solidFill>
               <a:srgbClr val="008AD1"/>
             </a:solidFill>
@@ -22803,88 +20769,7 @@
       </p:sp>
       <p:sp>
         <p:nvSpPr>
-          <p:cNvPr id="5" name="Rectangle 4"/>
-          <p:cNvSpPr/>
-          <p:nvPr/>
-        </p:nvSpPr>
-        <p:spPr>
-          <a:xfrm>
-            <a:off x="457200" y="1371600"/>
-            <a:ext cx="8229600" cy="5212080"/>
-          </a:xfrm>
-          <a:prstGeom prst="rect">
-            <a:avLst/>
-          </a:prstGeom>
-          <a:solidFill>
-            <a:srgbClr val="FFFFFF"/>
-          </a:solidFill>
-          <a:ln w="12700">
-            <a:solidFill>
-              <a:srgbClr val="008AD1"/>
-            </a:solidFill>
-          </a:ln>
-        </p:spPr>
-        <p:style>
-          <a:lnRef idx="1">
-            <a:schemeClr val="accent1"/>
-          </a:lnRef>
-          <a:fillRef idx="3">
-            <a:schemeClr val="accent1"/>
-          </a:fillRef>
-          <a:effectRef idx="2">
-            <a:schemeClr val="accent1"/>
-          </a:effectRef>
-          <a:fontRef idx="minor">
-            <a:schemeClr val="lt1"/>
-          </a:fontRef>
-        </p:style>
-        <p:txBody>
-          <a:bodyPr rtlCol="0" anchor="ctr"/>
-          <a:lstStyle/>
-          <a:p>
-            <a:pPr algn="ctr"/>
-          </a:p>
-        </p:txBody>
-      </p:sp>
-      <p:sp>
-        <p:nvSpPr>
-          <p:cNvPr id="4" name="TextBox 3"/>
-          <p:cNvSpPr txBox="1"/>
-          <p:nvPr/>
-        </p:nvSpPr>
-        <p:spPr>
-          <a:xfrm>
-            <a:off x="457200" y="274320"/>
-            <a:ext cx="6400800" cy="914400"/>
-          </a:xfrm>
-          <a:prstGeom prst="rect">
-            <a:avLst/>
-          </a:prstGeom>
-          <a:noFill/>
-        </p:spPr>
-        <p:txBody>
-          <a:bodyPr wrap="square" anchor="ctr">
-            <a:spAutoFit/>
-          </a:bodyPr>
-          <a:lstStyle/>
-          <a:p>
-            <a:pPr algn="l">
-              <a:defRPr sz="3600" b="1">
-                <a:solidFill>
-                  <a:srgbClr val="008AD1"/>
-                </a:solidFill>
-                <a:latin typeface="Century Gothic"/>
-              </a:defRPr>
-            </a:pPr>
-            <a:r>
-              <a:t>SLIDE 05: Agenda</a:t>
-            </a:r>
-          </a:p>
-        </p:txBody>
-      </p:sp>
-      <p:sp>
-        <p:nvSpPr>
-          <p:cNvPr id="6" name="TextBox 5"/>
+          <p:cNvPr id="5" name="TextBox 4"/>
           <p:cNvSpPr txBox="1"/>
           <p:nvPr/>
         </p:nvSpPr>
@@ -23213,14 +21098,50 @@
       </p:pic>
       <p:sp>
         <p:nvSpPr>
-          <p:cNvPr id="3" name="Rectangle 2"/>
+          <p:cNvPr id="3" name="TextBox 2"/>
+          <p:cNvSpPr txBox="1"/>
+          <p:nvPr/>
+        </p:nvSpPr>
+        <p:spPr>
+          <a:xfrm>
+            <a:off x="457200" y="274320"/>
+            <a:ext cx="6400800" cy="914400"/>
+          </a:xfrm>
+          <a:prstGeom prst="rect">
+            <a:avLst/>
+          </a:prstGeom>
+          <a:noFill/>
+        </p:spPr>
+        <p:txBody>
+          <a:bodyPr wrap="square" anchor="ctr">
+            <a:spAutoFit/>
+          </a:bodyPr>
+          <a:lstStyle/>
+          <a:p>
+            <a:pPr algn="l">
+              <a:defRPr sz="3600" b="1">
+                <a:solidFill>
+                  <a:srgbClr val="008AD1"/>
+                </a:solidFill>
+                <a:latin typeface="Century Gothic"/>
+              </a:defRPr>
+            </a:pPr>
+            <a:r>
+              <a:t>SLIDE 06: Capacidades do Curso</a:t>
+            </a:r>
+          </a:p>
+        </p:txBody>
+      </p:sp>
+      <p:sp>
+        <p:nvSpPr>
+          <p:cNvPr id="4" name="Rectangle 3"/>
           <p:cNvSpPr/>
           <p:nvPr/>
         </p:nvSpPr>
         <p:spPr>
           <a:xfrm>
-            <a:off x="457200" y="274320"/>
-            <a:ext cx="6400800" cy="914400"/>
+            <a:off x="457200" y="1371600"/>
+            <a:ext cx="8229600" cy="5212080"/>
           </a:xfrm>
           <a:prstGeom prst="rect">
             <a:avLst/>
@@ -23228,7 +21149,7 @@
           <a:solidFill>
             <a:srgbClr val="FFFFFF"/>
           </a:solidFill>
-          <a:ln w="25400">
+          <a:ln w="12700">
             <a:solidFill>
               <a:srgbClr val="008AD1"/>
             </a:solidFill>
@@ -23258,88 +21179,7 @@
       </p:sp>
       <p:sp>
         <p:nvSpPr>
-          <p:cNvPr id="5" name="Rectangle 4"/>
-          <p:cNvSpPr/>
-          <p:nvPr/>
-        </p:nvSpPr>
-        <p:spPr>
-          <a:xfrm>
-            <a:off x="457200" y="1371600"/>
-            <a:ext cx="8229600" cy="5212080"/>
-          </a:xfrm>
-          <a:prstGeom prst="rect">
-            <a:avLst/>
-          </a:prstGeom>
-          <a:solidFill>
-            <a:srgbClr val="FFFFFF"/>
-          </a:solidFill>
-          <a:ln w="12700">
-            <a:solidFill>
-              <a:srgbClr val="008AD1"/>
-            </a:solidFill>
-          </a:ln>
-        </p:spPr>
-        <p:style>
-          <a:lnRef idx="1">
-            <a:schemeClr val="accent1"/>
-          </a:lnRef>
-          <a:fillRef idx="3">
-            <a:schemeClr val="accent1"/>
-          </a:fillRef>
-          <a:effectRef idx="2">
-            <a:schemeClr val="accent1"/>
-          </a:effectRef>
-          <a:fontRef idx="minor">
-            <a:schemeClr val="lt1"/>
-          </a:fontRef>
-        </p:style>
-        <p:txBody>
-          <a:bodyPr rtlCol="0" anchor="ctr"/>
-          <a:lstStyle/>
-          <a:p>
-            <a:pPr algn="ctr"/>
-          </a:p>
-        </p:txBody>
-      </p:sp>
-      <p:sp>
-        <p:nvSpPr>
-          <p:cNvPr id="4" name="TextBox 3"/>
-          <p:cNvSpPr txBox="1"/>
-          <p:nvPr/>
-        </p:nvSpPr>
-        <p:spPr>
-          <a:xfrm>
-            <a:off x="457200" y="274320"/>
-            <a:ext cx="6400800" cy="914400"/>
-          </a:xfrm>
-          <a:prstGeom prst="rect">
-            <a:avLst/>
-          </a:prstGeom>
-          <a:noFill/>
-        </p:spPr>
-        <p:txBody>
-          <a:bodyPr wrap="square" anchor="ctr">
-            <a:spAutoFit/>
-          </a:bodyPr>
-          <a:lstStyle/>
-          <a:p>
-            <a:pPr algn="l">
-              <a:defRPr sz="3600" b="1">
-                <a:solidFill>
-                  <a:srgbClr val="008AD1"/>
-                </a:solidFill>
-                <a:latin typeface="Century Gothic"/>
-              </a:defRPr>
-            </a:pPr>
-            <a:r>
-              <a:t>SLIDE 06: Capacidades do Curso</a:t>
-            </a:r>
-          </a:p>
-        </p:txBody>
-      </p:sp>
-      <p:sp>
-        <p:nvSpPr>
-          <p:cNvPr id="6" name="TextBox 5"/>
+          <p:cNvPr id="5" name="TextBox 4"/>
           <p:cNvSpPr txBox="1"/>
           <p:nvPr/>
         </p:nvSpPr>
@@ -23493,14 +21333,50 @@
       </p:pic>
       <p:sp>
         <p:nvSpPr>
-          <p:cNvPr id="3" name="Rectangle 2"/>
+          <p:cNvPr id="3" name="TextBox 2"/>
+          <p:cNvSpPr txBox="1"/>
+          <p:nvPr/>
+        </p:nvSpPr>
+        <p:spPr>
+          <a:xfrm>
+            <a:off x="457200" y="274320"/>
+            <a:ext cx="6400800" cy="914400"/>
+          </a:xfrm>
+          <a:prstGeom prst="rect">
+            <a:avLst/>
+          </a:prstGeom>
+          <a:noFill/>
+        </p:spPr>
+        <p:txBody>
+          <a:bodyPr wrap="square" anchor="ctr">
+            <a:spAutoFit/>
+          </a:bodyPr>
+          <a:lstStyle/>
+          <a:p>
+            <a:pPr algn="l">
+              <a:defRPr sz="3600" b="1">
+                <a:solidFill>
+                  <a:srgbClr val="008AD1"/>
+                </a:solidFill>
+                <a:latin typeface="Century Gothic"/>
+              </a:defRPr>
+            </a:pPr>
+            <a:r>
+              <a:t>SLIDE 07: ---</a:t>
+            </a:r>
+          </a:p>
+        </p:txBody>
+      </p:sp>
+      <p:sp>
+        <p:nvSpPr>
+          <p:cNvPr id="4" name="Rectangle 3"/>
           <p:cNvSpPr/>
           <p:nvPr/>
         </p:nvSpPr>
         <p:spPr>
           <a:xfrm>
-            <a:off x="457200" y="274320"/>
-            <a:ext cx="6400800" cy="914400"/>
+            <a:off x="457200" y="1371600"/>
+            <a:ext cx="8229600" cy="5212080"/>
           </a:xfrm>
           <a:prstGeom prst="rect">
             <a:avLst/>
@@ -23508,7 +21384,7 @@
           <a:solidFill>
             <a:srgbClr val="FFFFFF"/>
           </a:solidFill>
-          <a:ln w="25400">
+          <a:ln w="12700">
             <a:solidFill>
               <a:srgbClr val="008AD1"/>
             </a:solidFill>
@@ -23538,88 +21414,7 @@
       </p:sp>
       <p:sp>
         <p:nvSpPr>
-          <p:cNvPr id="5" name="Rectangle 4"/>
-          <p:cNvSpPr/>
-          <p:nvPr/>
-        </p:nvSpPr>
-        <p:spPr>
-          <a:xfrm>
-            <a:off x="457200" y="1371600"/>
-            <a:ext cx="8229600" cy="5212080"/>
-          </a:xfrm>
-          <a:prstGeom prst="rect">
-            <a:avLst/>
-          </a:prstGeom>
-          <a:solidFill>
-            <a:srgbClr val="FFFFFF"/>
-          </a:solidFill>
-          <a:ln w="12700">
-            <a:solidFill>
-              <a:srgbClr val="008AD1"/>
-            </a:solidFill>
-          </a:ln>
-        </p:spPr>
-        <p:style>
-          <a:lnRef idx="1">
-            <a:schemeClr val="accent1"/>
-          </a:lnRef>
-          <a:fillRef idx="3">
-            <a:schemeClr val="accent1"/>
-          </a:fillRef>
-          <a:effectRef idx="2">
-            <a:schemeClr val="accent1"/>
-          </a:effectRef>
-          <a:fontRef idx="minor">
-            <a:schemeClr val="lt1"/>
-          </a:fontRef>
-        </p:style>
-        <p:txBody>
-          <a:bodyPr rtlCol="0" anchor="ctr"/>
-          <a:lstStyle/>
-          <a:p>
-            <a:pPr algn="ctr"/>
-          </a:p>
-        </p:txBody>
-      </p:sp>
-      <p:sp>
-        <p:nvSpPr>
-          <p:cNvPr id="4" name="TextBox 3"/>
-          <p:cNvSpPr txBox="1"/>
-          <p:nvPr/>
-        </p:nvSpPr>
-        <p:spPr>
-          <a:xfrm>
-            <a:off x="457200" y="274320"/>
-            <a:ext cx="6400800" cy="914400"/>
-          </a:xfrm>
-          <a:prstGeom prst="rect">
-            <a:avLst/>
-          </a:prstGeom>
-          <a:noFill/>
-        </p:spPr>
-        <p:txBody>
-          <a:bodyPr wrap="square" anchor="ctr">
-            <a:spAutoFit/>
-          </a:bodyPr>
-          <a:lstStyle/>
-          <a:p>
-            <a:pPr algn="l">
-              <a:defRPr sz="3600" b="1">
-                <a:solidFill>
-                  <a:srgbClr val="008AD1"/>
-                </a:solidFill>
-                <a:latin typeface="Century Gothic"/>
-              </a:defRPr>
-            </a:pPr>
-            <a:r>
-              <a:t>SLIDE 07: ---</a:t>
-            </a:r>
-          </a:p>
-        </p:txBody>
-      </p:sp>
-      <p:sp>
-        <p:nvSpPr>
-          <p:cNvPr id="6" name="TextBox 5"/>
+          <p:cNvPr id="5" name="TextBox 4"/>
           <p:cNvSpPr txBox="1"/>
           <p:nvPr/>
         </p:nvSpPr>
@@ -23685,14 +21480,50 @@
       </p:pic>
       <p:sp>
         <p:nvSpPr>
-          <p:cNvPr id="3" name="Rectangle 2"/>
+          <p:cNvPr id="3" name="TextBox 2"/>
+          <p:cNvSpPr txBox="1"/>
+          <p:nvPr/>
+        </p:nvSpPr>
+        <p:spPr>
+          <a:xfrm>
+            <a:off x="457200" y="274320"/>
+            <a:ext cx="6400800" cy="914400"/>
+          </a:xfrm>
+          <a:prstGeom prst="rect">
+            <a:avLst/>
+          </a:prstGeom>
+          <a:noFill/>
+        </p:spPr>
+        <p:txBody>
+          <a:bodyPr wrap="square" anchor="ctr">
+            <a:spAutoFit/>
+          </a:bodyPr>
+          <a:lstStyle/>
+          <a:p>
+            <a:pPr algn="l">
+              <a:defRPr sz="3600" b="1">
+                <a:solidFill>
+                  <a:srgbClr val="008AD1"/>
+                </a:solidFill>
+                <a:latin typeface="Century Gothic"/>
+              </a:defRPr>
+            </a:pPr>
+            <a:r>
+              <a:t>SLIDE 08: Quem nasceu primeiro?</a:t>
+            </a:r>
+          </a:p>
+        </p:txBody>
+      </p:sp>
+      <p:sp>
+        <p:nvSpPr>
+          <p:cNvPr id="4" name="Rectangle 3"/>
           <p:cNvSpPr/>
           <p:nvPr/>
         </p:nvSpPr>
         <p:spPr>
           <a:xfrm>
-            <a:off x="457200" y="274320"/>
-            <a:ext cx="6400800" cy="914400"/>
+            <a:off x="457200" y="1371600"/>
+            <a:ext cx="8229600" cy="5212080"/>
           </a:xfrm>
           <a:prstGeom prst="rect">
             <a:avLst/>
@@ -23700,7 +21531,7 @@
           <a:solidFill>
             <a:srgbClr val="FFFFFF"/>
           </a:solidFill>
-          <a:ln w="25400">
+          <a:ln w="12700">
             <a:solidFill>
               <a:srgbClr val="008AD1"/>
             </a:solidFill>
@@ -23730,88 +21561,7 @@
       </p:sp>
       <p:sp>
         <p:nvSpPr>
-          <p:cNvPr id="5" name="Rectangle 4"/>
-          <p:cNvSpPr/>
-          <p:nvPr/>
-        </p:nvSpPr>
-        <p:spPr>
-          <a:xfrm>
-            <a:off x="457200" y="1371600"/>
-            <a:ext cx="8229600" cy="5212080"/>
-          </a:xfrm>
-          <a:prstGeom prst="rect">
-            <a:avLst/>
-          </a:prstGeom>
-          <a:solidFill>
-            <a:srgbClr val="FFFFFF"/>
-          </a:solidFill>
-          <a:ln w="12700">
-            <a:solidFill>
-              <a:srgbClr val="008AD1"/>
-            </a:solidFill>
-          </a:ln>
-        </p:spPr>
-        <p:style>
-          <a:lnRef idx="1">
-            <a:schemeClr val="accent1"/>
-          </a:lnRef>
-          <a:fillRef idx="3">
-            <a:schemeClr val="accent1"/>
-          </a:fillRef>
-          <a:effectRef idx="2">
-            <a:schemeClr val="accent1"/>
-          </a:effectRef>
-          <a:fontRef idx="minor">
-            <a:schemeClr val="lt1"/>
-          </a:fontRef>
-        </p:style>
-        <p:txBody>
-          <a:bodyPr rtlCol="0" anchor="ctr"/>
-          <a:lstStyle/>
-          <a:p>
-            <a:pPr algn="ctr"/>
-          </a:p>
-        </p:txBody>
-      </p:sp>
-      <p:sp>
-        <p:nvSpPr>
-          <p:cNvPr id="4" name="TextBox 3"/>
-          <p:cNvSpPr txBox="1"/>
-          <p:nvPr/>
-        </p:nvSpPr>
-        <p:spPr>
-          <a:xfrm>
-            <a:off x="457200" y="274320"/>
-            <a:ext cx="6400800" cy="914400"/>
-          </a:xfrm>
-          <a:prstGeom prst="rect">
-            <a:avLst/>
-          </a:prstGeom>
-          <a:noFill/>
-        </p:spPr>
-        <p:txBody>
-          <a:bodyPr wrap="square" anchor="ctr">
-            <a:spAutoFit/>
-          </a:bodyPr>
-          <a:lstStyle/>
-          <a:p>
-            <a:pPr algn="l">
-              <a:defRPr sz="3600" b="1">
-                <a:solidFill>
-                  <a:srgbClr val="008AD1"/>
-                </a:solidFill>
-                <a:latin typeface="Century Gothic"/>
-              </a:defRPr>
-            </a:pPr>
-            <a:r>
-              <a:t>SLIDE 08: Quem nasceu primeiro?</a:t>
-            </a:r>
-          </a:p>
-        </p:txBody>
-      </p:sp>
-      <p:sp>
-        <p:nvSpPr>
-          <p:cNvPr id="6" name="TextBox 5"/>
+          <p:cNvPr id="5" name="TextBox 4"/>
           <p:cNvSpPr txBox="1"/>
           <p:nvPr/>
         </p:nvSpPr>
